--- a/全体工程表_使い方ガイド（閲覧者向け）_new.pptx
+++ b/全体工程表_使い方ガイド（閲覧者向け）_new.pptx
@@ -4,19 +4,22 @@
   <p:sldMasterIdLst>
     <p:sldMasterId id="2147483648" r:id="rId1"/>
   </p:sldMasterIdLst>
+  <p:notesMasterIdLst>
+    <p:notesMasterId r:id="rId12"/>
+  </p:notesMasterIdLst>
   <p:sldIdLst>
-    <p:sldId id="256" r:id="rId7"/>
-    <p:sldId id="257" r:id="rId8"/>
-    <p:sldId id="258" r:id="rId9"/>
-    <p:sldId id="259" r:id="rId10"/>
-    <p:sldId id="260" r:id="rId11"/>
-    <p:sldId id="261" r:id="rId12"/>
-    <p:sldId id="262" r:id="rId13"/>
-    <p:sldId id="263" r:id="rId14"/>
-    <p:sldId id="264" r:id="rId15"/>
-    <p:sldId id="265" r:id="rId16"/>
+    <p:sldId id="256" r:id="rId2"/>
+    <p:sldId id="257" r:id="rId3"/>
+    <p:sldId id="258" r:id="rId4"/>
+    <p:sldId id="259" r:id="rId5"/>
+    <p:sldId id="260" r:id="rId6"/>
+    <p:sldId id="261" r:id="rId7"/>
+    <p:sldId id="262" r:id="rId8"/>
+    <p:sldId id="263" r:id="rId9"/>
+    <p:sldId id="264" r:id="rId10"/>
+    <p:sldId id="265" r:id="rId11"/>
   </p:sldIdLst>
-  <p:sldSz cx="9144000" cy="5143500" type="screen4x3"/>
+  <p:sldSz cx="9144000" cy="5143500" type="screen16x9"/>
   <p:notesSz cx="6858000" cy="9144000"/>
   <p:defaultTextStyle>
     <a:defPPr>
@@ -113,7 +116,488 @@
       </a:defRPr>
     </a:lvl9pPr>
   </p:defaultTextStyle>
+  <p:extLst>
+    <p:ext uri="{EFAFB233-063F-42B5-8137-9DF3F51BA10A}">
+      <p15:sldGuideLst xmlns:p15="http://schemas.microsoft.com/office/powerpoint/2012/main">
+        <p15:guide id="1" orient="horz" pos="2160">
+          <p15:clr>
+            <a:srgbClr val="A4A3A4"/>
+          </p15:clr>
+        </p15:guide>
+        <p15:guide id="2" pos="2880">
+          <p15:clr>
+            <a:srgbClr val="A4A3A4"/>
+          </p15:clr>
+        </p15:guide>
+      </p15:sldGuideLst>
+    </p:ext>
+  </p:extLst>
 </p:presentation>
+</file>
+
+<file path=ppt/notesMasters/notesMaster1.xml><?xml version="1.0" encoding="utf-8"?>
+<p:notesMaster xmlns:a="http://schemas.openxmlformats.org/drawingml/2006/main" xmlns:r="http://schemas.openxmlformats.org/officeDocument/2006/relationships" xmlns:p="http://schemas.openxmlformats.org/presentationml/2006/main">
+  <p:cSld>
+    <p:bg>
+      <p:bgRef idx="1001">
+        <a:schemeClr val="bg1"/>
+      </p:bgRef>
+    </p:bg>
+    <p:spTree>
+      <p:nvGrpSpPr>
+        <p:cNvPr id="1" name=""/>
+        <p:cNvGrpSpPr/>
+        <p:nvPr/>
+      </p:nvGrpSpPr>
+      <p:grpSpPr>
+        <a:xfrm>
+          <a:off x="0" y="0"/>
+          <a:ext cx="0" cy="0"/>
+          <a:chOff x="0" y="0"/>
+          <a:chExt cx="0" cy="0"/>
+        </a:xfrm>
+      </p:grpSpPr>
+      <p:sp>
+        <p:nvSpPr>
+          <p:cNvPr id="2" name="ヘッダー プレースホルダー 1"/>
+          <p:cNvSpPr>
+            <a:spLocks noGrp="1"/>
+          </p:cNvSpPr>
+          <p:nvPr>
+            <p:ph type="hdr" sz="quarter"/>
+          </p:nvPr>
+        </p:nvSpPr>
+        <p:spPr>
+          <a:xfrm>
+            <a:off x="0" y="0"/>
+            <a:ext cx="2971800" cy="458788"/>
+          </a:xfrm>
+          <a:prstGeom prst="rect">
+            <a:avLst/>
+          </a:prstGeom>
+        </p:spPr>
+        <p:txBody>
+          <a:bodyPr vert="horz" lIns="91440" tIns="45720" rIns="91440" bIns="45720" rtlCol="0"/>
+          <a:lstStyle>
+            <a:lvl1pPr algn="l">
+              <a:defRPr sz="1200"/>
+            </a:lvl1pPr>
+          </a:lstStyle>
+          <a:p>
+            <a:endParaRPr kumimoji="1" lang="ja-JP" altLang="en-US"/>
+          </a:p>
+        </p:txBody>
+      </p:sp>
+      <p:sp>
+        <p:nvSpPr>
+          <p:cNvPr id="3" name="日付プレースホルダー 2"/>
+          <p:cNvSpPr>
+            <a:spLocks noGrp="1"/>
+          </p:cNvSpPr>
+          <p:nvPr>
+            <p:ph type="dt" idx="1"/>
+          </p:nvPr>
+        </p:nvSpPr>
+        <p:spPr>
+          <a:xfrm>
+            <a:off x="3884613" y="0"/>
+            <a:ext cx="2971800" cy="458788"/>
+          </a:xfrm>
+          <a:prstGeom prst="rect">
+            <a:avLst/>
+          </a:prstGeom>
+        </p:spPr>
+        <p:txBody>
+          <a:bodyPr vert="horz" lIns="91440" tIns="45720" rIns="91440" bIns="45720" rtlCol="0"/>
+          <a:lstStyle>
+            <a:lvl1pPr algn="r">
+              <a:defRPr sz="1200"/>
+            </a:lvl1pPr>
+          </a:lstStyle>
+          <a:p>
+            <a:fld id="{D1C6CA67-6603-4AC2-AC5B-2B62DBB42C3C}" type="datetimeFigureOut">
+              <a:rPr kumimoji="1" lang="ja-JP" altLang="en-US" smtClean="0"/>
+              <a:t>2026/4/30</a:t>
+            </a:fld>
+            <a:endParaRPr kumimoji="1" lang="ja-JP" altLang="en-US"/>
+          </a:p>
+        </p:txBody>
+      </p:sp>
+      <p:sp>
+        <p:nvSpPr>
+          <p:cNvPr id="4" name="スライド イメージ プレースホルダー 3"/>
+          <p:cNvSpPr>
+            <a:spLocks noGrp="1" noRot="1" noChangeAspect="1"/>
+          </p:cNvSpPr>
+          <p:nvPr>
+            <p:ph type="sldImg" idx="2"/>
+          </p:nvPr>
+        </p:nvSpPr>
+        <p:spPr>
+          <a:xfrm>
+            <a:off x="685800" y="1143000"/>
+            <a:ext cx="5486400" cy="3086100"/>
+          </a:xfrm>
+          <a:prstGeom prst="rect">
+            <a:avLst/>
+          </a:prstGeom>
+          <a:noFill/>
+          <a:ln w="12700">
+            <a:solidFill>
+              <a:prstClr val="black"/>
+            </a:solidFill>
+          </a:ln>
+        </p:spPr>
+        <p:txBody>
+          <a:bodyPr vert="horz" lIns="91440" tIns="45720" rIns="91440" bIns="45720" rtlCol="0" anchor="ctr"/>
+          <a:lstStyle/>
+          <a:p>
+            <a:endParaRPr lang="ja-JP" altLang="en-US"/>
+          </a:p>
+        </p:txBody>
+      </p:sp>
+      <p:sp>
+        <p:nvSpPr>
+          <p:cNvPr id="5" name="ノート プレースホルダー 4"/>
+          <p:cNvSpPr>
+            <a:spLocks noGrp="1"/>
+          </p:cNvSpPr>
+          <p:nvPr>
+            <p:ph type="body" sz="quarter" idx="3"/>
+          </p:nvPr>
+        </p:nvSpPr>
+        <p:spPr>
+          <a:xfrm>
+            <a:off x="685800" y="4400550"/>
+            <a:ext cx="5486400" cy="3600450"/>
+          </a:xfrm>
+          <a:prstGeom prst="rect">
+            <a:avLst/>
+          </a:prstGeom>
+        </p:spPr>
+        <p:txBody>
+          <a:bodyPr vert="horz" lIns="91440" tIns="45720" rIns="91440" bIns="45720" rtlCol="0"/>
+          <a:lstStyle/>
+          <a:p>
+            <a:pPr lvl="0"/>
+            <a:r>
+              <a:rPr kumimoji="1" lang="ja-JP" altLang="en-US"/>
+              <a:t>マスター テキストの書式設定</a:t>
+            </a:r>
+          </a:p>
+          <a:p>
+            <a:pPr lvl="1"/>
+            <a:r>
+              <a:rPr kumimoji="1" lang="ja-JP" altLang="en-US"/>
+              <a:t>第 </a:t>
+            </a:r>
+            <a:r>
+              <a:rPr kumimoji="1" lang="en-US" altLang="ja-JP"/>
+              <a:t>2 </a:t>
+            </a:r>
+            <a:r>
+              <a:rPr kumimoji="1" lang="ja-JP" altLang="en-US"/>
+              <a:t>レベル</a:t>
+            </a:r>
+          </a:p>
+          <a:p>
+            <a:pPr lvl="2"/>
+            <a:r>
+              <a:rPr kumimoji="1" lang="ja-JP" altLang="en-US"/>
+              <a:t>第 </a:t>
+            </a:r>
+            <a:r>
+              <a:rPr kumimoji="1" lang="en-US" altLang="ja-JP"/>
+              <a:t>3 </a:t>
+            </a:r>
+            <a:r>
+              <a:rPr kumimoji="1" lang="ja-JP" altLang="en-US"/>
+              <a:t>レベル</a:t>
+            </a:r>
+          </a:p>
+          <a:p>
+            <a:pPr lvl="3"/>
+            <a:r>
+              <a:rPr kumimoji="1" lang="ja-JP" altLang="en-US"/>
+              <a:t>第 </a:t>
+            </a:r>
+            <a:r>
+              <a:rPr kumimoji="1" lang="en-US" altLang="ja-JP"/>
+              <a:t>4 </a:t>
+            </a:r>
+            <a:r>
+              <a:rPr kumimoji="1" lang="ja-JP" altLang="en-US"/>
+              <a:t>レベル</a:t>
+            </a:r>
+          </a:p>
+          <a:p>
+            <a:pPr lvl="4"/>
+            <a:r>
+              <a:rPr kumimoji="1" lang="ja-JP" altLang="en-US"/>
+              <a:t>第 </a:t>
+            </a:r>
+            <a:r>
+              <a:rPr kumimoji="1" lang="en-US" altLang="ja-JP"/>
+              <a:t>5 </a:t>
+            </a:r>
+            <a:r>
+              <a:rPr kumimoji="1" lang="ja-JP" altLang="en-US"/>
+              <a:t>レベル</a:t>
+            </a:r>
+          </a:p>
+        </p:txBody>
+      </p:sp>
+      <p:sp>
+        <p:nvSpPr>
+          <p:cNvPr id="6" name="フッター プレースホルダー 5"/>
+          <p:cNvSpPr>
+            <a:spLocks noGrp="1"/>
+          </p:cNvSpPr>
+          <p:nvPr>
+            <p:ph type="ftr" sz="quarter" idx="4"/>
+          </p:nvPr>
+        </p:nvSpPr>
+        <p:spPr>
+          <a:xfrm>
+            <a:off x="0" y="8685213"/>
+            <a:ext cx="2971800" cy="458787"/>
+          </a:xfrm>
+          <a:prstGeom prst="rect">
+            <a:avLst/>
+          </a:prstGeom>
+        </p:spPr>
+        <p:txBody>
+          <a:bodyPr vert="horz" lIns="91440" tIns="45720" rIns="91440" bIns="45720" rtlCol="0" anchor="b"/>
+          <a:lstStyle>
+            <a:lvl1pPr algn="l">
+              <a:defRPr sz="1200"/>
+            </a:lvl1pPr>
+          </a:lstStyle>
+          <a:p>
+            <a:endParaRPr kumimoji="1" lang="ja-JP" altLang="en-US"/>
+          </a:p>
+        </p:txBody>
+      </p:sp>
+      <p:sp>
+        <p:nvSpPr>
+          <p:cNvPr id="7" name="スライド番号プレースホルダー 6"/>
+          <p:cNvSpPr>
+            <a:spLocks noGrp="1"/>
+          </p:cNvSpPr>
+          <p:nvPr>
+            <p:ph type="sldNum" sz="quarter" idx="5"/>
+          </p:nvPr>
+        </p:nvSpPr>
+        <p:spPr>
+          <a:xfrm>
+            <a:off x="3884613" y="8685213"/>
+            <a:ext cx="2971800" cy="458787"/>
+          </a:xfrm>
+          <a:prstGeom prst="rect">
+            <a:avLst/>
+          </a:prstGeom>
+        </p:spPr>
+        <p:txBody>
+          <a:bodyPr vert="horz" lIns="91440" tIns="45720" rIns="91440" bIns="45720" rtlCol="0" anchor="b"/>
+          <a:lstStyle>
+            <a:lvl1pPr algn="r">
+              <a:defRPr sz="1200"/>
+            </a:lvl1pPr>
+          </a:lstStyle>
+          <a:p>
+            <a:fld id="{8E71FDB5-65A8-4413-B52A-1D0F5A9DFE4E}" type="slidenum">
+              <a:rPr kumimoji="1" lang="ja-JP" altLang="en-US" smtClean="0"/>
+              <a:t>‹#›</a:t>
+            </a:fld>
+            <a:endParaRPr kumimoji="1" lang="ja-JP" altLang="en-US"/>
+          </a:p>
+        </p:txBody>
+      </p:sp>
+    </p:spTree>
+    <p:extLst>
+      <p:ext uri="{BB962C8B-B14F-4D97-AF65-F5344CB8AC3E}">
+        <p14:creationId xmlns:p14="http://schemas.microsoft.com/office/powerpoint/2010/main" val="2276475732"/>
+      </p:ext>
+    </p:extLst>
+  </p:cSld>
+  <p:clrMap bg1="lt1" tx1="dk1" bg2="lt2" tx2="dk2" accent1="accent1" accent2="accent2" accent3="accent3" accent4="accent4" accent5="accent5" accent6="accent6" hlink="hlink" folHlink="folHlink"/>
+  <p:notesStyle>
+    <a:lvl1pPr marL="0" algn="l" defTabSz="914400" rtl="0" eaLnBrk="1" latinLnBrk="0" hangingPunct="1">
+      <a:defRPr kumimoji="1" sz="1200" kern="1200">
+        <a:solidFill>
+          <a:schemeClr val="tx1"/>
+        </a:solidFill>
+        <a:latin typeface="+mn-lt"/>
+        <a:ea typeface="+mn-ea"/>
+        <a:cs typeface="+mn-cs"/>
+      </a:defRPr>
+    </a:lvl1pPr>
+    <a:lvl2pPr marL="457200" algn="l" defTabSz="914400" rtl="0" eaLnBrk="1" latinLnBrk="0" hangingPunct="1">
+      <a:defRPr kumimoji="1" sz="1200" kern="1200">
+        <a:solidFill>
+          <a:schemeClr val="tx1"/>
+        </a:solidFill>
+        <a:latin typeface="+mn-lt"/>
+        <a:ea typeface="+mn-ea"/>
+        <a:cs typeface="+mn-cs"/>
+      </a:defRPr>
+    </a:lvl2pPr>
+    <a:lvl3pPr marL="914400" algn="l" defTabSz="914400" rtl="0" eaLnBrk="1" latinLnBrk="0" hangingPunct="1">
+      <a:defRPr kumimoji="1" sz="1200" kern="1200">
+        <a:solidFill>
+          <a:schemeClr val="tx1"/>
+        </a:solidFill>
+        <a:latin typeface="+mn-lt"/>
+        <a:ea typeface="+mn-ea"/>
+        <a:cs typeface="+mn-cs"/>
+      </a:defRPr>
+    </a:lvl3pPr>
+    <a:lvl4pPr marL="1371600" algn="l" defTabSz="914400" rtl="0" eaLnBrk="1" latinLnBrk="0" hangingPunct="1">
+      <a:defRPr kumimoji="1" sz="1200" kern="1200">
+        <a:solidFill>
+          <a:schemeClr val="tx1"/>
+        </a:solidFill>
+        <a:latin typeface="+mn-lt"/>
+        <a:ea typeface="+mn-ea"/>
+        <a:cs typeface="+mn-cs"/>
+      </a:defRPr>
+    </a:lvl4pPr>
+    <a:lvl5pPr marL="1828800" algn="l" defTabSz="914400" rtl="0" eaLnBrk="1" latinLnBrk="0" hangingPunct="1">
+      <a:defRPr kumimoji="1" sz="1200" kern="1200">
+        <a:solidFill>
+          <a:schemeClr val="tx1"/>
+        </a:solidFill>
+        <a:latin typeface="+mn-lt"/>
+        <a:ea typeface="+mn-ea"/>
+        <a:cs typeface="+mn-cs"/>
+      </a:defRPr>
+    </a:lvl5pPr>
+    <a:lvl6pPr marL="2286000" algn="l" defTabSz="914400" rtl="0" eaLnBrk="1" latinLnBrk="0" hangingPunct="1">
+      <a:defRPr kumimoji="1" sz="1200" kern="1200">
+        <a:solidFill>
+          <a:schemeClr val="tx1"/>
+        </a:solidFill>
+        <a:latin typeface="+mn-lt"/>
+        <a:ea typeface="+mn-ea"/>
+        <a:cs typeface="+mn-cs"/>
+      </a:defRPr>
+    </a:lvl6pPr>
+    <a:lvl7pPr marL="2743200" algn="l" defTabSz="914400" rtl="0" eaLnBrk="1" latinLnBrk="0" hangingPunct="1">
+      <a:defRPr kumimoji="1" sz="1200" kern="1200">
+        <a:solidFill>
+          <a:schemeClr val="tx1"/>
+        </a:solidFill>
+        <a:latin typeface="+mn-lt"/>
+        <a:ea typeface="+mn-ea"/>
+        <a:cs typeface="+mn-cs"/>
+      </a:defRPr>
+    </a:lvl7pPr>
+    <a:lvl8pPr marL="3200400" algn="l" defTabSz="914400" rtl="0" eaLnBrk="1" latinLnBrk="0" hangingPunct="1">
+      <a:defRPr kumimoji="1" sz="1200" kern="1200">
+        <a:solidFill>
+          <a:schemeClr val="tx1"/>
+        </a:solidFill>
+        <a:latin typeface="+mn-lt"/>
+        <a:ea typeface="+mn-ea"/>
+        <a:cs typeface="+mn-cs"/>
+      </a:defRPr>
+    </a:lvl8pPr>
+    <a:lvl9pPr marL="3657600" algn="l" defTabSz="914400" rtl="0" eaLnBrk="1" latinLnBrk="0" hangingPunct="1">
+      <a:defRPr kumimoji="1" sz="1200" kern="1200">
+        <a:solidFill>
+          <a:schemeClr val="tx1"/>
+        </a:solidFill>
+        <a:latin typeface="+mn-lt"/>
+        <a:ea typeface="+mn-ea"/>
+        <a:cs typeface="+mn-cs"/>
+      </a:defRPr>
+    </a:lvl9pPr>
+  </p:notesStyle>
+</p:notesMaster>
+</file>
+
+<file path=ppt/notesSlides/notesSlide1.xml><?xml version="1.0" encoding="utf-8"?>
+<p:notes xmlns:a="http://schemas.openxmlformats.org/drawingml/2006/main" xmlns:r="http://schemas.openxmlformats.org/officeDocument/2006/relationships" xmlns:p="http://schemas.openxmlformats.org/presentationml/2006/main">
+  <p:cSld>
+    <p:spTree>
+      <p:nvGrpSpPr>
+        <p:cNvPr id="1" name=""/>
+        <p:cNvGrpSpPr/>
+        <p:nvPr/>
+      </p:nvGrpSpPr>
+      <p:grpSpPr>
+        <a:xfrm>
+          <a:off x="0" y="0"/>
+          <a:ext cx="0" cy="0"/>
+          <a:chOff x="0" y="0"/>
+          <a:chExt cx="0" cy="0"/>
+        </a:xfrm>
+      </p:grpSpPr>
+      <p:sp>
+        <p:nvSpPr>
+          <p:cNvPr id="2" name="スライド イメージ プレースホルダー 1"/>
+          <p:cNvSpPr>
+            <a:spLocks noGrp="1" noRot="1" noChangeAspect="1"/>
+          </p:cNvSpPr>
+          <p:nvPr>
+            <p:ph type="sldImg"/>
+          </p:nvPr>
+        </p:nvSpPr>
+        <p:spPr/>
+      </p:sp>
+      <p:sp>
+        <p:nvSpPr>
+          <p:cNvPr id="3" name="ノート プレースホルダー 2"/>
+          <p:cNvSpPr>
+            <a:spLocks noGrp="1"/>
+          </p:cNvSpPr>
+          <p:nvPr>
+            <p:ph type="body" idx="1"/>
+          </p:nvPr>
+        </p:nvSpPr>
+        <p:spPr/>
+        <p:txBody>
+          <a:bodyPr/>
+          <a:lstStyle/>
+          <a:p>
+            <a:endParaRPr kumimoji="1" lang="ja-JP" altLang="en-US" dirty="0"/>
+          </a:p>
+        </p:txBody>
+      </p:sp>
+      <p:sp>
+        <p:nvSpPr>
+          <p:cNvPr id="4" name="スライド番号プレースホルダー 3"/>
+          <p:cNvSpPr>
+            <a:spLocks noGrp="1"/>
+          </p:cNvSpPr>
+          <p:nvPr>
+            <p:ph type="sldNum" sz="quarter" idx="5"/>
+          </p:nvPr>
+        </p:nvSpPr>
+        <p:spPr/>
+        <p:txBody>
+          <a:bodyPr/>
+          <a:lstStyle/>
+          <a:p>
+            <a:fld id="{8E71FDB5-65A8-4413-B52A-1D0F5A9DFE4E}" type="slidenum">
+              <a:rPr kumimoji="1" lang="ja-JP" altLang="en-US" smtClean="0"/>
+              <a:t>10</a:t>
+            </a:fld>
+            <a:endParaRPr kumimoji="1" lang="ja-JP" altLang="en-US"/>
+          </a:p>
+        </p:txBody>
+      </p:sp>
+    </p:spTree>
+    <p:extLst>
+      <p:ext uri="{BB962C8B-B14F-4D97-AF65-F5344CB8AC3E}">
+        <p14:creationId xmlns:p14="http://schemas.microsoft.com/office/powerpoint/2010/main" val="2121420836"/>
+      </p:ext>
+    </p:extLst>
+  </p:cSld>
+  <p:clrMapOvr>
+    <a:masterClrMapping/>
+  </p:clrMapOvr>
+</p:notes>
 </file>
 
 <file path=ppt/slideLayouts/slideLayout1.xml><?xml version="1.0" encoding="utf-8"?>
@@ -154,10 +638,9 @@
           <a:lstStyle/>
           <a:p>
             <a:r>
-              <a:rPr lang="en-US" smtClean="0"/>
+              <a:rPr lang="en-US"/>
               <a:t>Click to edit Master title style</a:t>
             </a:r>
-            <a:endParaRPr lang="en-US"/>
           </a:p>
         </p:txBody>
       </p:sp>
@@ -273,10 +756,9 @@
           </a:lstStyle>
           <a:p>
             <a:r>
-              <a:rPr lang="en-US" smtClean="0"/>
+              <a:rPr lang="en-US"/>
               <a:t>Click to edit Master subtitle style</a:t>
             </a:r>
-            <a:endParaRPr lang="en-US"/>
           </a:p>
         </p:txBody>
       </p:sp>
@@ -297,7 +779,7 @@
           <a:p>
             <a:fld id="{5BCAD085-E8A6-8845-BD4E-CB4CCA059FC4}" type="datetimeFigureOut">
               <a:rPr lang="en-US" smtClean="0"/>
-              <a:t>1/27/13</a:t>
+              <a:t>4/30/2026</a:t>
             </a:fld>
             <a:endParaRPr lang="en-US"/>
           </a:p>
@@ -391,10 +873,9 @@
           <a:lstStyle/>
           <a:p>
             <a:r>
-              <a:rPr lang="en-US" smtClean="0"/>
+              <a:rPr lang="en-US"/>
               <a:t>Click to edit Master title style</a:t>
             </a:r>
-            <a:endParaRPr lang="en-US"/>
           </a:p>
         </p:txBody>
       </p:sp>
@@ -415,38 +896,37 @@
           <a:p>
             <a:pPr lvl="0"/>
             <a:r>
-              <a:rPr lang="en-US" smtClean="0"/>
+              <a:rPr lang="en-US"/>
               <a:t>Click to edit Master text styles</a:t>
             </a:r>
           </a:p>
           <a:p>
             <a:pPr lvl="1"/>
             <a:r>
-              <a:rPr lang="en-US" smtClean="0"/>
+              <a:rPr lang="en-US"/>
               <a:t>Second level</a:t>
             </a:r>
           </a:p>
           <a:p>
             <a:pPr lvl="2"/>
             <a:r>
-              <a:rPr lang="en-US" smtClean="0"/>
+              <a:rPr lang="en-US"/>
               <a:t>Third level</a:t>
             </a:r>
           </a:p>
           <a:p>
             <a:pPr lvl="3"/>
             <a:r>
-              <a:rPr lang="en-US" smtClean="0"/>
+              <a:rPr lang="en-US"/>
               <a:t>Fourth level</a:t>
             </a:r>
           </a:p>
           <a:p>
             <a:pPr lvl="4"/>
             <a:r>
-              <a:rPr lang="en-US" smtClean="0"/>
+              <a:rPr lang="en-US"/>
               <a:t>Fifth level</a:t>
             </a:r>
-            <a:endParaRPr lang="en-US"/>
           </a:p>
         </p:txBody>
       </p:sp>
@@ -467,7 +947,7 @@
           <a:p>
             <a:fld id="{5BCAD085-E8A6-8845-BD4E-CB4CCA059FC4}" type="datetimeFigureOut">
               <a:rPr lang="en-US" smtClean="0"/>
-              <a:t>1/27/13</a:t>
+              <a:t>4/30/2026</a:t>
             </a:fld>
             <a:endParaRPr lang="en-US"/>
           </a:p>
@@ -566,10 +1046,9 @@
           <a:lstStyle/>
           <a:p>
             <a:r>
-              <a:rPr lang="en-US" smtClean="0"/>
+              <a:rPr lang="en-US"/>
               <a:t>Click to edit Master title style</a:t>
             </a:r>
-            <a:endParaRPr lang="en-US"/>
           </a:p>
         </p:txBody>
       </p:sp>
@@ -595,38 +1074,37 @@
           <a:p>
             <a:pPr lvl="0"/>
             <a:r>
-              <a:rPr lang="en-US" smtClean="0"/>
+              <a:rPr lang="en-US"/>
               <a:t>Click to edit Master text styles</a:t>
             </a:r>
           </a:p>
           <a:p>
             <a:pPr lvl="1"/>
             <a:r>
-              <a:rPr lang="en-US" smtClean="0"/>
+              <a:rPr lang="en-US"/>
               <a:t>Second level</a:t>
             </a:r>
           </a:p>
           <a:p>
             <a:pPr lvl="2"/>
             <a:r>
-              <a:rPr lang="en-US" smtClean="0"/>
+              <a:rPr lang="en-US"/>
               <a:t>Third level</a:t>
             </a:r>
           </a:p>
           <a:p>
             <a:pPr lvl="3"/>
             <a:r>
-              <a:rPr lang="en-US" smtClean="0"/>
+              <a:rPr lang="en-US"/>
               <a:t>Fourth level</a:t>
             </a:r>
           </a:p>
           <a:p>
             <a:pPr lvl="4"/>
             <a:r>
-              <a:rPr lang="en-US" smtClean="0"/>
+              <a:rPr lang="en-US"/>
               <a:t>Fifth level</a:t>
             </a:r>
-            <a:endParaRPr lang="en-US"/>
           </a:p>
         </p:txBody>
       </p:sp>
@@ -647,7 +1125,7 @@
           <a:p>
             <a:fld id="{5BCAD085-E8A6-8845-BD4E-CB4CCA059FC4}" type="datetimeFigureOut">
               <a:rPr lang="en-US" smtClean="0"/>
-              <a:t>1/27/13</a:t>
+              <a:t>4/30/2026</a:t>
             </a:fld>
             <a:endParaRPr lang="en-US"/>
           </a:p>
@@ -741,10 +1219,9 @@
           <a:lstStyle/>
           <a:p>
             <a:r>
-              <a:rPr lang="en-US" smtClean="0"/>
+              <a:rPr lang="en-US"/>
               <a:t>Click to edit Master title style</a:t>
             </a:r>
-            <a:endParaRPr lang="en-US"/>
           </a:p>
         </p:txBody>
       </p:sp>
@@ -765,38 +1242,37 @@
           <a:p>
             <a:pPr lvl="0"/>
             <a:r>
-              <a:rPr lang="en-US" smtClean="0"/>
+              <a:rPr lang="en-US"/>
               <a:t>Click to edit Master text styles</a:t>
             </a:r>
           </a:p>
           <a:p>
             <a:pPr lvl="1"/>
             <a:r>
-              <a:rPr lang="en-US" smtClean="0"/>
+              <a:rPr lang="en-US"/>
               <a:t>Second level</a:t>
             </a:r>
           </a:p>
           <a:p>
             <a:pPr lvl="2"/>
             <a:r>
-              <a:rPr lang="en-US" smtClean="0"/>
+              <a:rPr lang="en-US"/>
               <a:t>Third level</a:t>
             </a:r>
           </a:p>
           <a:p>
             <a:pPr lvl="3"/>
             <a:r>
-              <a:rPr lang="en-US" smtClean="0"/>
+              <a:rPr lang="en-US"/>
               <a:t>Fourth level</a:t>
             </a:r>
           </a:p>
           <a:p>
             <a:pPr lvl="4"/>
             <a:r>
-              <a:rPr lang="en-US" smtClean="0"/>
+              <a:rPr lang="en-US"/>
               <a:t>Fifth level</a:t>
             </a:r>
-            <a:endParaRPr lang="en-US"/>
           </a:p>
         </p:txBody>
       </p:sp>
@@ -817,7 +1293,7 @@
           <a:p>
             <a:fld id="{5BCAD085-E8A6-8845-BD4E-CB4CCA059FC4}" type="datetimeFigureOut">
               <a:rPr lang="en-US" smtClean="0"/>
-              <a:t>1/27/13</a:t>
+              <a:t>4/30/2026</a:t>
             </a:fld>
             <a:endParaRPr lang="en-US"/>
           </a:p>
@@ -920,10 +1396,9 @@
           </a:lstStyle>
           <a:p>
             <a:r>
-              <a:rPr lang="en-US" smtClean="0"/>
+              <a:rPr lang="en-US"/>
               <a:t>Click to edit Master title style</a:t>
             </a:r>
-            <a:endParaRPr lang="en-US"/>
           </a:p>
         </p:txBody>
       </p:sp>
@@ -1040,7 +1515,7 @@
           <a:p>
             <a:pPr lvl="0"/>
             <a:r>
-              <a:rPr lang="en-US" smtClean="0"/>
+              <a:rPr lang="en-US"/>
               <a:t>Click to edit Master text styles</a:t>
             </a:r>
           </a:p>
@@ -1063,7 +1538,7 @@
           <a:p>
             <a:fld id="{5BCAD085-E8A6-8845-BD4E-CB4CCA059FC4}" type="datetimeFigureOut">
               <a:rPr lang="en-US" smtClean="0"/>
-              <a:t>1/27/13</a:t>
+              <a:t>4/30/2026</a:t>
             </a:fld>
             <a:endParaRPr lang="en-US"/>
           </a:p>
@@ -1157,10 +1632,9 @@
           <a:lstStyle/>
           <a:p>
             <a:r>
-              <a:rPr lang="en-US" smtClean="0"/>
+              <a:rPr lang="en-US"/>
               <a:t>Click to edit Master title style</a:t>
             </a:r>
-            <a:endParaRPr lang="en-US"/>
           </a:p>
         </p:txBody>
       </p:sp>
@@ -1214,38 +1688,37 @@
           <a:p>
             <a:pPr lvl="0"/>
             <a:r>
-              <a:rPr lang="en-US" smtClean="0"/>
+              <a:rPr lang="en-US"/>
               <a:t>Click to edit Master text styles</a:t>
             </a:r>
           </a:p>
           <a:p>
             <a:pPr lvl="1"/>
             <a:r>
-              <a:rPr lang="en-US" smtClean="0"/>
+              <a:rPr lang="en-US"/>
               <a:t>Second level</a:t>
             </a:r>
           </a:p>
           <a:p>
             <a:pPr lvl="2"/>
             <a:r>
-              <a:rPr lang="en-US" smtClean="0"/>
+              <a:rPr lang="en-US"/>
               <a:t>Third level</a:t>
             </a:r>
           </a:p>
           <a:p>
             <a:pPr lvl="3"/>
             <a:r>
-              <a:rPr lang="en-US" smtClean="0"/>
+              <a:rPr lang="en-US"/>
               <a:t>Fourth level</a:t>
             </a:r>
           </a:p>
           <a:p>
             <a:pPr lvl="4"/>
             <a:r>
-              <a:rPr lang="en-US" smtClean="0"/>
+              <a:rPr lang="en-US"/>
               <a:t>Fifth level</a:t>
             </a:r>
-            <a:endParaRPr lang="en-US"/>
           </a:p>
         </p:txBody>
       </p:sp>
@@ -1299,38 +1772,37 @@
           <a:p>
             <a:pPr lvl="0"/>
             <a:r>
-              <a:rPr lang="en-US" smtClean="0"/>
+              <a:rPr lang="en-US"/>
               <a:t>Click to edit Master text styles</a:t>
             </a:r>
           </a:p>
           <a:p>
             <a:pPr lvl="1"/>
             <a:r>
-              <a:rPr lang="en-US" smtClean="0"/>
+              <a:rPr lang="en-US"/>
               <a:t>Second level</a:t>
             </a:r>
           </a:p>
           <a:p>
             <a:pPr lvl="2"/>
             <a:r>
-              <a:rPr lang="en-US" smtClean="0"/>
+              <a:rPr lang="en-US"/>
               <a:t>Third level</a:t>
             </a:r>
           </a:p>
           <a:p>
             <a:pPr lvl="3"/>
             <a:r>
-              <a:rPr lang="en-US" smtClean="0"/>
+              <a:rPr lang="en-US"/>
               <a:t>Fourth level</a:t>
             </a:r>
           </a:p>
           <a:p>
             <a:pPr lvl="4"/>
             <a:r>
-              <a:rPr lang="en-US" smtClean="0"/>
+              <a:rPr lang="en-US"/>
               <a:t>Fifth level</a:t>
             </a:r>
-            <a:endParaRPr lang="en-US"/>
           </a:p>
         </p:txBody>
       </p:sp>
@@ -1351,7 +1823,7 @@
           <a:p>
             <a:fld id="{5BCAD085-E8A6-8845-BD4E-CB4CCA059FC4}" type="datetimeFigureOut">
               <a:rPr lang="en-US" smtClean="0"/>
-              <a:t>1/27/13</a:t>
+              <a:t>4/30/2026</a:t>
             </a:fld>
             <a:endParaRPr lang="en-US"/>
           </a:p>
@@ -1449,10 +1921,9 @@
           </a:lstStyle>
           <a:p>
             <a:r>
-              <a:rPr lang="en-US" smtClean="0"/>
+              <a:rPr lang="en-US"/>
               <a:t>Click to edit Master title style</a:t>
             </a:r>
-            <a:endParaRPr lang="en-US"/>
           </a:p>
         </p:txBody>
       </p:sp>
@@ -1515,7 +1986,7 @@
           <a:p>
             <a:pPr lvl="0"/>
             <a:r>
-              <a:rPr lang="en-US" smtClean="0"/>
+              <a:rPr lang="en-US"/>
               <a:t>Click to edit Master text styles</a:t>
             </a:r>
           </a:p>
@@ -1571,38 +2042,37 @@
           <a:p>
             <a:pPr lvl="0"/>
             <a:r>
-              <a:rPr lang="en-US" smtClean="0"/>
+              <a:rPr lang="en-US"/>
               <a:t>Click to edit Master text styles</a:t>
             </a:r>
           </a:p>
           <a:p>
             <a:pPr lvl="1"/>
             <a:r>
-              <a:rPr lang="en-US" smtClean="0"/>
+              <a:rPr lang="en-US"/>
               <a:t>Second level</a:t>
             </a:r>
           </a:p>
           <a:p>
             <a:pPr lvl="2"/>
             <a:r>
-              <a:rPr lang="en-US" smtClean="0"/>
+              <a:rPr lang="en-US"/>
               <a:t>Third level</a:t>
             </a:r>
           </a:p>
           <a:p>
             <a:pPr lvl="3"/>
             <a:r>
-              <a:rPr lang="en-US" smtClean="0"/>
+              <a:rPr lang="en-US"/>
               <a:t>Fourth level</a:t>
             </a:r>
           </a:p>
           <a:p>
             <a:pPr lvl="4"/>
             <a:r>
-              <a:rPr lang="en-US" smtClean="0"/>
+              <a:rPr lang="en-US"/>
               <a:t>Fifth level</a:t>
             </a:r>
-            <a:endParaRPr lang="en-US"/>
           </a:p>
         </p:txBody>
       </p:sp>
@@ -1665,7 +2135,7 @@
           <a:p>
             <a:pPr lvl="0"/>
             <a:r>
-              <a:rPr lang="en-US" smtClean="0"/>
+              <a:rPr lang="en-US"/>
               <a:t>Click to edit Master text styles</a:t>
             </a:r>
           </a:p>
@@ -1721,38 +2191,37 @@
           <a:p>
             <a:pPr lvl="0"/>
             <a:r>
-              <a:rPr lang="en-US" smtClean="0"/>
+              <a:rPr lang="en-US"/>
               <a:t>Click to edit Master text styles</a:t>
             </a:r>
           </a:p>
           <a:p>
             <a:pPr lvl="1"/>
             <a:r>
-              <a:rPr lang="en-US" smtClean="0"/>
+              <a:rPr lang="en-US"/>
               <a:t>Second level</a:t>
             </a:r>
           </a:p>
           <a:p>
             <a:pPr lvl="2"/>
             <a:r>
-              <a:rPr lang="en-US" smtClean="0"/>
+              <a:rPr lang="en-US"/>
               <a:t>Third level</a:t>
             </a:r>
           </a:p>
           <a:p>
             <a:pPr lvl="3"/>
             <a:r>
-              <a:rPr lang="en-US" smtClean="0"/>
+              <a:rPr lang="en-US"/>
               <a:t>Fourth level</a:t>
             </a:r>
           </a:p>
           <a:p>
             <a:pPr lvl="4"/>
             <a:r>
-              <a:rPr lang="en-US" smtClean="0"/>
+              <a:rPr lang="en-US"/>
               <a:t>Fifth level</a:t>
             </a:r>
-            <a:endParaRPr lang="en-US"/>
           </a:p>
         </p:txBody>
       </p:sp>
@@ -1773,7 +2242,7 @@
           <a:p>
             <a:fld id="{5BCAD085-E8A6-8845-BD4E-CB4CCA059FC4}" type="datetimeFigureOut">
               <a:rPr lang="en-US" smtClean="0"/>
-              <a:t>1/27/13</a:t>
+              <a:t>4/30/2026</a:t>
             </a:fld>
             <a:endParaRPr lang="en-US"/>
           </a:p>
@@ -1867,10 +2336,9 @@
           <a:lstStyle/>
           <a:p>
             <a:r>
-              <a:rPr lang="en-US" smtClean="0"/>
+              <a:rPr lang="en-US"/>
               <a:t>Click to edit Master title style</a:t>
             </a:r>
-            <a:endParaRPr lang="en-US"/>
           </a:p>
         </p:txBody>
       </p:sp>
@@ -1891,7 +2359,7 @@
           <a:p>
             <a:fld id="{5BCAD085-E8A6-8845-BD4E-CB4CCA059FC4}" type="datetimeFigureOut">
               <a:rPr lang="en-US" smtClean="0"/>
-              <a:t>1/27/13</a:t>
+              <a:t>4/30/2026</a:t>
             </a:fld>
             <a:endParaRPr lang="en-US"/>
           </a:p>
@@ -1986,7 +2454,7 @@
           <a:p>
             <a:fld id="{5BCAD085-E8A6-8845-BD4E-CB4CCA059FC4}" type="datetimeFigureOut">
               <a:rPr lang="en-US" smtClean="0"/>
-              <a:t>1/27/13</a:t>
+              <a:t>4/30/2026</a:t>
             </a:fld>
             <a:endParaRPr lang="en-US"/>
           </a:p>
@@ -2089,10 +2557,9 @@
           </a:lstStyle>
           <a:p>
             <a:r>
-              <a:rPr lang="en-US" smtClean="0"/>
+              <a:rPr lang="en-US"/>
               <a:t>Click to edit Master title style</a:t>
             </a:r>
-            <a:endParaRPr lang="en-US"/>
           </a:p>
         </p:txBody>
       </p:sp>
@@ -2146,38 +2613,37 @@
           <a:p>
             <a:pPr lvl="0"/>
             <a:r>
-              <a:rPr lang="en-US" smtClean="0"/>
+              <a:rPr lang="en-US"/>
               <a:t>Click to edit Master text styles</a:t>
             </a:r>
           </a:p>
           <a:p>
             <a:pPr lvl="1"/>
             <a:r>
-              <a:rPr lang="en-US" smtClean="0"/>
+              <a:rPr lang="en-US"/>
               <a:t>Second level</a:t>
             </a:r>
           </a:p>
           <a:p>
             <a:pPr lvl="2"/>
             <a:r>
-              <a:rPr lang="en-US" smtClean="0"/>
+              <a:rPr lang="en-US"/>
               <a:t>Third level</a:t>
             </a:r>
           </a:p>
           <a:p>
             <a:pPr lvl="3"/>
             <a:r>
-              <a:rPr lang="en-US" smtClean="0"/>
+              <a:rPr lang="en-US"/>
               <a:t>Fourth level</a:t>
             </a:r>
           </a:p>
           <a:p>
             <a:pPr lvl="4"/>
             <a:r>
-              <a:rPr lang="en-US" smtClean="0"/>
+              <a:rPr lang="en-US"/>
               <a:t>Fifth level</a:t>
             </a:r>
-            <a:endParaRPr lang="en-US"/>
           </a:p>
         </p:txBody>
       </p:sp>
@@ -2240,7 +2706,7 @@
           <a:p>
             <a:pPr lvl="0"/>
             <a:r>
-              <a:rPr lang="en-US" smtClean="0"/>
+              <a:rPr lang="en-US"/>
               <a:t>Click to edit Master text styles</a:t>
             </a:r>
           </a:p>
@@ -2263,7 +2729,7 @@
           <a:p>
             <a:fld id="{5BCAD085-E8A6-8845-BD4E-CB4CCA059FC4}" type="datetimeFigureOut">
               <a:rPr lang="en-US" smtClean="0"/>
-              <a:t>1/27/13</a:t>
+              <a:t>4/30/2026</a:t>
             </a:fld>
             <a:endParaRPr lang="en-US"/>
           </a:p>
@@ -2366,10 +2832,9 @@
           </a:lstStyle>
           <a:p>
             <a:r>
-              <a:rPr lang="en-US" smtClean="0"/>
+              <a:rPr lang="en-US"/>
               <a:t>Click to edit Master title style</a:t>
             </a:r>
-            <a:endParaRPr lang="en-US"/>
           </a:p>
         </p:txBody>
       </p:sp>
@@ -2493,7 +2958,7 @@
           <a:p>
             <a:pPr lvl="0"/>
             <a:r>
-              <a:rPr lang="en-US" smtClean="0"/>
+              <a:rPr lang="en-US"/>
               <a:t>Click to edit Master text styles</a:t>
             </a:r>
           </a:p>
@@ -2516,7 +2981,7 @@
           <a:p>
             <a:fld id="{5BCAD085-E8A6-8845-BD4E-CB4CCA059FC4}" type="datetimeFigureOut">
               <a:rPr lang="en-US" smtClean="0"/>
-              <a:t>1/27/13</a:t>
+              <a:t>4/30/2026</a:t>
             </a:fld>
             <a:endParaRPr lang="en-US"/>
           </a:p>
@@ -2625,10 +3090,9 @@
           <a:lstStyle/>
           <a:p>
             <a:r>
-              <a:rPr lang="en-US" smtClean="0"/>
+              <a:rPr lang="en-US"/>
               <a:t>Click to edit Master title style</a:t>
             </a:r>
-            <a:endParaRPr lang="en-US"/>
           </a:p>
         </p:txBody>
       </p:sp>
@@ -2659,38 +3123,37 @@
           <a:p>
             <a:pPr lvl="0"/>
             <a:r>
-              <a:rPr lang="en-US" smtClean="0"/>
+              <a:rPr lang="en-US"/>
               <a:t>Click to edit Master text styles</a:t>
             </a:r>
           </a:p>
           <a:p>
             <a:pPr lvl="1"/>
             <a:r>
-              <a:rPr lang="en-US" smtClean="0"/>
+              <a:rPr lang="en-US"/>
               <a:t>Second level</a:t>
             </a:r>
           </a:p>
           <a:p>
             <a:pPr lvl="2"/>
             <a:r>
-              <a:rPr lang="en-US" smtClean="0"/>
+              <a:rPr lang="en-US"/>
               <a:t>Third level</a:t>
             </a:r>
           </a:p>
           <a:p>
             <a:pPr lvl="3"/>
             <a:r>
-              <a:rPr lang="en-US" smtClean="0"/>
+              <a:rPr lang="en-US"/>
               <a:t>Fourth level</a:t>
             </a:r>
           </a:p>
           <a:p>
             <a:pPr lvl="4"/>
             <a:r>
-              <a:rPr lang="en-US" smtClean="0"/>
+              <a:rPr lang="en-US"/>
               <a:t>Fifth level</a:t>
             </a:r>
-            <a:endParaRPr lang="en-US"/>
           </a:p>
         </p:txBody>
       </p:sp>
@@ -2729,7 +3192,7 @@
           <a:p>
             <a:fld id="{5BCAD085-E8A6-8845-BD4E-CB4CCA059FC4}" type="datetimeFigureOut">
               <a:rPr lang="en-US" smtClean="0"/>
-              <a:t>1/27/13</a:t>
+              <a:t>4/30/2026</a:t>
             </a:fld>
             <a:endParaRPr lang="en-US"/>
           </a:p>
@@ -3088,7 +3551,7 @@
 </file>
 
 <file path=ppt/slides/slide1.xml><?xml version="1.0" encoding="utf-8"?>
-<p:sld xmlns:a="http://schemas.openxmlformats.org/drawingml/2006/main" xmlns:p="http://schemas.openxmlformats.org/presentationml/2006/main" xmlns:r="http://schemas.openxmlformats.org/officeDocument/2006/relationships">
+<p:sld xmlns:a="http://schemas.openxmlformats.org/drawingml/2006/main" xmlns:r="http://schemas.openxmlformats.org/officeDocument/2006/relationships" xmlns:p="http://schemas.openxmlformats.org/presentationml/2006/main">
   <p:cSld>
     <p:bg>
       <p:bgPr>
@@ -3104,7 +3567,14 @@
         <p:cNvGrpSpPr/>
         <p:nvPr/>
       </p:nvGrpSpPr>
-      <p:grpSpPr/>
+      <p:grpSpPr>
+        <a:xfrm>
+          <a:off x="0" y="0"/>
+          <a:ext cx="0" cy="0"/>
+          <a:chOff x="0" y="0"/>
+          <a:chExt cx="0" cy="0"/>
+        </a:xfrm>
+      </p:grpSpPr>
       <p:sp>
         <p:nvSpPr>
           <p:cNvPr id="2" name="Rectangle 1"/>
@@ -3145,6 +3615,7 @@
           <a:lstStyle/>
           <a:p>
             <a:pPr algn="ctr"/>
+            <a:endParaRPr/>
           </a:p>
         </p:txBody>
       </p:sp>
@@ -3188,6 +3659,7 @@
           <a:lstStyle/>
           <a:p>
             <a:pPr algn="ctr"/>
+            <a:endParaRPr/>
           </a:p>
         </p:txBody>
       </p:sp>
@@ -3231,6 +3703,7 @@
           <a:lstStyle/>
           <a:p>
             <a:pPr algn="ctr"/>
+            <a:endParaRPr/>
           </a:p>
         </p:txBody>
       </p:sp>
@@ -3274,6 +3747,7 @@
           <a:lstStyle/>
           <a:p>
             <a:pPr algn="ctr"/>
+            <a:endParaRPr/>
           </a:p>
         </p:txBody>
       </p:sp>
@@ -3317,6 +3791,7 @@
           <a:lstStyle/>
           <a:p>
             <a:pPr algn="ctr"/>
+            <a:endParaRPr/>
           </a:p>
         </p:txBody>
       </p:sp>
@@ -3337,7 +3812,7 @@
           <a:noFill/>
         </p:spPr>
         <p:txBody>
-          <a:bodyPr wrap="square" anchor="ctr" lIns="0" rIns="0" tIns="0" bIns="0">
+          <a:bodyPr wrap="square" lIns="0" tIns="0" rIns="0" bIns="0" anchor="ctr">
             <a:spAutoFit/>
           </a:bodyPr>
           <a:lstStyle/>
@@ -3372,7 +3847,7 @@
           <a:noFill/>
         </p:spPr>
         <p:txBody>
-          <a:bodyPr wrap="square" anchor="t" lIns="0" rIns="0" tIns="0" bIns="0">
+          <a:bodyPr wrap="square" lIns="0" tIns="0" rIns="0" bIns="0" anchor="t">
             <a:spAutoFit/>
           </a:bodyPr>
           <a:lstStyle/>
@@ -3419,14 +3894,14 @@
           <a:noFill/>
         </p:spPr>
         <p:txBody>
-          <a:bodyPr wrap="square" anchor="ctr" lIns="0" rIns="0" tIns="0" bIns="0">
+          <a:bodyPr wrap="square" lIns="0" tIns="0" rIns="0" bIns="0" anchor="ctr">
             <a:spAutoFit/>
           </a:bodyPr>
           <a:lstStyle/>
           <a:p>
             <a:pPr algn="l"/>
             <a:r>
-              <a:rPr sz="1200" b="0" i="0">
+              <a:rPr sz="1200" b="0" i="0" dirty="0" err="1">
                 <a:solidFill>
                   <a:srgbClr val="5C7065"/>
                 </a:solidFill>
@@ -3434,6 +3909,12 @@
               </a:rPr>
               <a:t>ログアウト状態（閲覧者）でできること</a:t>
             </a:r>
+            <a:endParaRPr sz="1200" b="0" i="0" dirty="0">
+              <a:solidFill>
+                <a:srgbClr val="5C7065"/>
+              </a:solidFill>
+              <a:latin typeface="Meiryo"/>
+            </a:endParaRPr>
           </a:p>
         </p:txBody>
       </p:sp>
@@ -3477,76 +3958,50 @@
           <a:lstStyle/>
           <a:p>
             <a:pPr algn="ctr"/>
-          </a:p>
-        </p:txBody>
-      </p:sp>
-      <p:sp>
-        <p:nvSpPr>
-          <p:cNvPr id="11" name="TextBox 10"/>
-          <p:cNvSpPr txBox="1"/>
-          <p:nvPr/>
-        </p:nvSpPr>
-        <p:spPr>
-          <a:xfrm>
-            <a:off x="640080" y="3291840"/>
-            <a:ext cx="1828800" cy="274320"/>
-          </a:xfrm>
-          <a:prstGeom prst="rect">
-            <a:avLst/>
-          </a:prstGeom>
-          <a:noFill/>
-        </p:spPr>
-        <p:txBody>
-          <a:bodyPr wrap="square" anchor="ctr" lIns="0" rIns="0" tIns="0" bIns="0">
+            <a:endParaRPr/>
+          </a:p>
+        </p:txBody>
+      </p:sp>
+      <p:sp>
+        <p:nvSpPr>
+          <p:cNvPr id="12" name="TextBox 11"/>
+          <p:cNvSpPr txBox="1"/>
+          <p:nvPr/>
+        </p:nvSpPr>
+        <p:spPr>
+          <a:xfrm>
+            <a:off x="6035040" y="524441"/>
+            <a:ext cx="2926080" cy="276999"/>
+          </a:xfrm>
+          <a:prstGeom prst="rect">
+            <a:avLst/>
+          </a:prstGeom>
+          <a:noFill/>
+        </p:spPr>
+        <p:txBody>
+          <a:bodyPr wrap="square" lIns="0" tIns="0" rIns="0" bIns="0" anchor="ctr">
             <a:spAutoFit/>
           </a:bodyPr>
           <a:lstStyle/>
           <a:p>
             <a:pPr algn="l"/>
             <a:r>
-              <a:rPr sz="1100" b="0" i="0">
-                <a:solidFill>
-                  <a:srgbClr val="9AAEA4"/>
-                </a:solidFill>
-                <a:latin typeface="Meiryo"/>
-              </a:rPr>
-              <a:t>2026</a:t>
-            </a:r>
-          </a:p>
-        </p:txBody>
-      </p:sp>
-      <p:sp>
-        <p:nvSpPr>
-          <p:cNvPr id="12" name="TextBox 11"/>
-          <p:cNvSpPr txBox="1"/>
-          <p:nvPr/>
-        </p:nvSpPr>
-        <p:spPr>
-          <a:xfrm>
-            <a:off x="6035040" y="502920"/>
-            <a:ext cx="2926080" cy="320040"/>
-          </a:xfrm>
-          <a:prstGeom prst="rect">
-            <a:avLst/>
-          </a:prstGeom>
-          <a:noFill/>
-        </p:spPr>
-        <p:txBody>
-          <a:bodyPr wrap="square" anchor="ctr" lIns="0" rIns="0" tIns="0" bIns="0">
-            <a:spAutoFit/>
-          </a:bodyPr>
-          <a:lstStyle/>
-          <a:p>
-            <a:pPr algn="l"/>
-            <a:r>
-              <a:rPr sz="1200" b="1" i="0">
+              <a:rPr lang="ja-JP" altLang="en-US" b="1" dirty="0">
                 <a:solidFill>
                   <a:srgbClr val="B2D3BA"/>
                 </a:solidFill>
-                <a:latin typeface="Meiryo"/>
-              </a:rPr>
-              <a:t>このガイドで学ぶこと</a:t>
-            </a:r>
+                <a:latin typeface="メイリオ" panose="020B0604030504040204" pitchFamily="50" charset="-128"/>
+                <a:ea typeface="メイリオ" panose="020B0604030504040204" pitchFamily="50" charset="-128"/>
+              </a:rPr>
+              <a:t>目次</a:t>
+            </a:r>
+            <a:endParaRPr b="1" i="0" dirty="0">
+              <a:solidFill>
+                <a:srgbClr val="B2D3BA"/>
+              </a:solidFill>
+              <a:latin typeface="メイリオ" panose="020B0604030504040204" pitchFamily="50" charset="-128"/>
+              <a:ea typeface="メイリオ" panose="020B0604030504040204" pitchFamily="50" charset="-128"/>
+            </a:endParaRPr>
           </a:p>
         </p:txBody>
       </p:sp>
@@ -3590,6 +4045,7 @@
           <a:lstStyle/>
           <a:p>
             <a:pPr algn="ctr"/>
+            <a:endParaRPr/>
           </a:p>
         </p:txBody>
       </p:sp>
@@ -3633,6 +4089,7 @@
           <a:lstStyle/>
           <a:p>
             <a:pPr algn="ctr"/>
+            <a:endParaRPr/>
           </a:p>
         </p:txBody>
       </p:sp>
@@ -3653,14 +4110,14 @@
           <a:noFill/>
         </p:spPr>
         <p:txBody>
-          <a:bodyPr wrap="square" anchor="ctr" lIns="0" rIns="0" tIns="0" bIns="0">
+          <a:bodyPr wrap="square" lIns="0" tIns="0" rIns="0" bIns="0" anchor="ctr">
             <a:spAutoFit/>
           </a:bodyPr>
           <a:lstStyle/>
           <a:p>
             <a:pPr algn="l"/>
             <a:r>
-              <a:rPr sz="1150" b="0" i="0">
+              <a:rPr sz="1150" b="0" i="0" dirty="0" err="1">
                 <a:solidFill>
                   <a:srgbClr val="FAFBF8"/>
                 </a:solidFill>
@@ -3668,6 +4125,12 @@
               </a:rPr>
               <a:t>画面の構成と各エリアの役割</a:t>
             </a:r>
+            <a:endParaRPr sz="1150" b="0" i="0" dirty="0">
+              <a:solidFill>
+                <a:srgbClr val="FAFBF8"/>
+              </a:solidFill>
+              <a:latin typeface="Meiryo"/>
+            </a:endParaRPr>
           </a:p>
         </p:txBody>
       </p:sp>
@@ -3711,6 +4174,7 @@
           <a:lstStyle/>
           <a:p>
             <a:pPr algn="ctr"/>
+            <a:endParaRPr/>
           </a:p>
         </p:txBody>
       </p:sp>
@@ -3731,7 +4195,7 @@
           <a:noFill/>
         </p:spPr>
         <p:txBody>
-          <a:bodyPr wrap="square" anchor="ctr" lIns="0" rIns="0" tIns="0" bIns="0">
+          <a:bodyPr wrap="square" lIns="0" tIns="0" rIns="0" bIns="0" anchor="ctr">
             <a:spAutoFit/>
           </a:bodyPr>
           <a:lstStyle/>
@@ -3789,6 +4253,7 @@
           <a:lstStyle/>
           <a:p>
             <a:pPr algn="ctr"/>
+            <a:endParaRPr/>
           </a:p>
         </p:txBody>
       </p:sp>
@@ -3809,7 +4274,7 @@
           <a:noFill/>
         </p:spPr>
         <p:txBody>
-          <a:bodyPr wrap="square" anchor="ctr" lIns="0" rIns="0" tIns="0" bIns="0">
+          <a:bodyPr wrap="square" lIns="0" tIns="0" rIns="0" bIns="0" anchor="ctr">
             <a:spAutoFit/>
           </a:bodyPr>
           <a:lstStyle/>
@@ -3867,6 +4332,7 @@
           <a:lstStyle/>
           <a:p>
             <a:pPr algn="ctr"/>
+            <a:endParaRPr/>
           </a:p>
         </p:txBody>
       </p:sp>
@@ -3887,7 +4353,7 @@
           <a:noFill/>
         </p:spPr>
         <p:txBody>
-          <a:bodyPr wrap="square" anchor="ctr" lIns="0" rIns="0" tIns="0" bIns="0">
+          <a:bodyPr wrap="square" lIns="0" tIns="0" rIns="0" bIns="0" anchor="ctr">
             <a:spAutoFit/>
           </a:bodyPr>
           <a:lstStyle/>
@@ -3945,6 +4411,7 @@
           <a:lstStyle/>
           <a:p>
             <a:pPr algn="ctr"/>
+            <a:endParaRPr/>
           </a:p>
         </p:txBody>
       </p:sp>
@@ -3965,7 +4432,7 @@
           <a:noFill/>
         </p:spPr>
         <p:txBody>
-          <a:bodyPr wrap="square" anchor="ctr" lIns="0" rIns="0" tIns="0" bIns="0">
+          <a:bodyPr wrap="square" lIns="0" tIns="0" rIns="0" bIns="0" anchor="ctr">
             <a:spAutoFit/>
           </a:bodyPr>
           <a:lstStyle/>
@@ -4023,6 +4490,7 @@
           <a:lstStyle/>
           <a:p>
             <a:pPr algn="ctr"/>
+            <a:endParaRPr/>
           </a:p>
         </p:txBody>
       </p:sp>
@@ -4043,7 +4511,7 @@
           <a:noFill/>
         </p:spPr>
         <p:txBody>
-          <a:bodyPr wrap="square" anchor="ctr" lIns="0" rIns="0" tIns="0" bIns="0">
+          <a:bodyPr wrap="square" lIns="0" tIns="0" rIns="0" bIns="0" anchor="ctr">
             <a:spAutoFit/>
           </a:bodyPr>
           <a:lstStyle/>
@@ -4078,7 +4546,7 @@
           <a:noFill/>
         </p:spPr>
         <p:txBody>
-          <a:bodyPr wrap="square" anchor="ctr" lIns="0" rIns="0" tIns="0" bIns="0">
+          <a:bodyPr wrap="square" lIns="0" tIns="0" rIns="0" bIns="0" anchor="ctr">
             <a:spAutoFit/>
           </a:bodyPr>
           <a:lstStyle/>
@@ -4105,7 +4573,7 @@
 </file>
 
 <file path=ppt/slides/slide10.xml><?xml version="1.0" encoding="utf-8"?>
-<p:sld xmlns:a="http://schemas.openxmlformats.org/drawingml/2006/main" xmlns:p="http://schemas.openxmlformats.org/presentationml/2006/main" xmlns:r="http://schemas.openxmlformats.org/officeDocument/2006/relationships">
+<p:sld xmlns:a="http://schemas.openxmlformats.org/drawingml/2006/main" xmlns:r="http://schemas.openxmlformats.org/officeDocument/2006/relationships" xmlns:p="http://schemas.openxmlformats.org/presentationml/2006/main">
   <p:cSld>
     <p:bg>
       <p:bgPr>
@@ -4121,7 +4589,14 @@
         <p:cNvGrpSpPr/>
         <p:nvPr/>
       </p:nvGrpSpPr>
-      <p:grpSpPr/>
+      <p:grpSpPr>
+        <a:xfrm>
+          <a:off x="0" y="0"/>
+          <a:ext cx="0" cy="0"/>
+          <a:chOff x="0" y="0"/>
+          <a:chExt cx="0" cy="0"/>
+        </a:xfrm>
+      </p:grpSpPr>
       <p:sp>
         <p:nvSpPr>
           <p:cNvPr id="2" name="Rectangle 1"/>
@@ -4162,6 +4637,7 @@
           <a:lstStyle/>
           <a:p>
             <a:pPr algn="ctr"/>
+            <a:endParaRPr/>
           </a:p>
         </p:txBody>
       </p:sp>
@@ -4205,6 +4681,7 @@
           <a:lstStyle/>
           <a:p>
             <a:pPr algn="ctr"/>
+            <a:endParaRPr/>
           </a:p>
         </p:txBody>
       </p:sp>
@@ -4225,7 +4702,7 @@
           <a:noFill/>
         </p:spPr>
         <p:txBody>
-          <a:bodyPr wrap="square" anchor="ctr" lIns="0" rIns="0" tIns="0" bIns="0">
+          <a:bodyPr wrap="square" lIns="0" tIns="0" rIns="0" bIns="0" anchor="ctr">
             <a:spAutoFit/>
           </a:bodyPr>
           <a:lstStyle/>
@@ -4283,6 +4760,7 @@
           <a:lstStyle/>
           <a:p>
             <a:pPr algn="ctr"/>
+            <a:endParaRPr/>
           </a:p>
         </p:txBody>
       </p:sp>
@@ -4328,6 +4806,7 @@
           <a:lstStyle/>
           <a:p>
             <a:pPr algn="ctr"/>
+            <a:endParaRPr/>
           </a:p>
         </p:txBody>
       </p:sp>
@@ -4348,7 +4827,7 @@
           <a:noFill/>
         </p:spPr>
         <p:txBody>
-          <a:bodyPr wrap="square" anchor="ctr" lIns="0" rIns="0" tIns="0" bIns="0">
+          <a:bodyPr wrap="square" lIns="0" tIns="0" rIns="0" bIns="0" anchor="ctr">
             <a:spAutoFit/>
           </a:bodyPr>
           <a:lstStyle/>
@@ -4408,6 +4887,7 @@
           <a:lstStyle/>
           <a:p>
             <a:pPr algn="ctr"/>
+            <a:endParaRPr/>
           </a:p>
         </p:txBody>
       </p:sp>
@@ -4428,7 +4908,7 @@
           <a:noFill/>
         </p:spPr>
         <p:txBody>
-          <a:bodyPr wrap="square" anchor="ctr" lIns="0" rIns="0" tIns="0" bIns="0">
+          <a:bodyPr wrap="square" lIns="0" tIns="0" rIns="0" bIns="0" anchor="ctr">
             <a:spAutoFit/>
           </a:bodyPr>
           <a:lstStyle/>
@@ -4488,6 +4968,7 @@
           <a:lstStyle/>
           <a:p>
             <a:pPr algn="ctr"/>
+            <a:endParaRPr/>
           </a:p>
         </p:txBody>
       </p:sp>
@@ -4508,7 +4989,7 @@
           <a:noFill/>
         </p:spPr>
         <p:txBody>
-          <a:bodyPr wrap="square" anchor="ctr" lIns="0" rIns="0" tIns="0" bIns="0">
+          <a:bodyPr wrap="square" lIns="0" tIns="0" rIns="0" bIns="0" anchor="ctr">
             <a:spAutoFit/>
           </a:bodyPr>
           <a:lstStyle/>
@@ -4568,6 +5049,7 @@
           <a:lstStyle/>
           <a:p>
             <a:pPr algn="ctr"/>
+            <a:endParaRPr/>
           </a:p>
         </p:txBody>
       </p:sp>
@@ -4588,7 +5070,7 @@
           <a:noFill/>
         </p:spPr>
         <p:txBody>
-          <a:bodyPr wrap="square" anchor="ctr" lIns="0" rIns="0" tIns="0" bIns="0">
+          <a:bodyPr wrap="square" lIns="0" tIns="0" rIns="0" bIns="0" anchor="ctr">
             <a:spAutoFit/>
           </a:bodyPr>
           <a:lstStyle/>
@@ -4648,6 +5130,7 @@
           <a:lstStyle/>
           <a:p>
             <a:pPr algn="ctr"/>
+            <a:endParaRPr/>
           </a:p>
         </p:txBody>
       </p:sp>
@@ -4668,7 +5151,7 @@
           <a:noFill/>
         </p:spPr>
         <p:txBody>
-          <a:bodyPr wrap="square" anchor="ctr" lIns="0" rIns="0" tIns="0" bIns="0">
+          <a:bodyPr wrap="square" lIns="0" tIns="0" rIns="0" bIns="0" anchor="ctr">
             <a:spAutoFit/>
           </a:bodyPr>
           <a:lstStyle/>
@@ -4728,6 +5211,7 @@
           <a:lstStyle/>
           <a:p>
             <a:pPr algn="ctr"/>
+            <a:endParaRPr/>
           </a:p>
         </p:txBody>
       </p:sp>
@@ -4748,7 +5232,7 @@
           <a:noFill/>
         </p:spPr>
         <p:txBody>
-          <a:bodyPr wrap="square" anchor="ctr" lIns="0" rIns="0" tIns="0" bIns="0">
+          <a:bodyPr wrap="square" lIns="0" tIns="0" rIns="0" bIns="0" anchor="ctr">
             <a:spAutoFit/>
           </a:bodyPr>
           <a:lstStyle/>
@@ -4808,6 +5292,7 @@
           <a:lstStyle/>
           <a:p>
             <a:pPr algn="ctr"/>
+            <a:endParaRPr/>
           </a:p>
         </p:txBody>
       </p:sp>
@@ -4828,7 +5313,7 @@
           <a:noFill/>
         </p:spPr>
         <p:txBody>
-          <a:bodyPr wrap="square" anchor="ctr" lIns="0" rIns="0" tIns="0" bIns="0">
+          <a:bodyPr wrap="square" lIns="0" tIns="0" rIns="0" bIns="0" anchor="ctr">
             <a:spAutoFit/>
           </a:bodyPr>
           <a:lstStyle/>
@@ -4888,6 +5373,7 @@
           <a:lstStyle/>
           <a:p>
             <a:pPr algn="ctr"/>
+            <a:endParaRPr/>
           </a:p>
         </p:txBody>
       </p:sp>
@@ -4908,7 +5394,7 @@
           <a:noFill/>
         </p:spPr>
         <p:txBody>
-          <a:bodyPr wrap="square" anchor="ctr" lIns="0" rIns="0" tIns="0" bIns="0">
+          <a:bodyPr wrap="square" lIns="0" tIns="0" rIns="0" bIns="0" anchor="ctr">
             <a:spAutoFit/>
           </a:bodyPr>
           <a:lstStyle/>
@@ -4968,6 +5454,7 @@
           <a:lstStyle/>
           <a:p>
             <a:pPr algn="ctr"/>
+            <a:endParaRPr/>
           </a:p>
         </p:txBody>
       </p:sp>
@@ -4988,7 +5475,7 @@
           <a:noFill/>
         </p:spPr>
         <p:txBody>
-          <a:bodyPr wrap="square" anchor="ctr" lIns="0" rIns="0" tIns="0" bIns="0">
+          <a:bodyPr wrap="square" lIns="0" tIns="0" rIns="0" bIns="0" anchor="ctr">
             <a:spAutoFit/>
           </a:bodyPr>
           <a:lstStyle/>
@@ -5048,6 +5535,7 @@
           <a:lstStyle/>
           <a:p>
             <a:pPr algn="ctr"/>
+            <a:endParaRPr/>
           </a:p>
         </p:txBody>
       </p:sp>
@@ -5068,7 +5556,7 @@
           <a:noFill/>
         </p:spPr>
         <p:txBody>
-          <a:bodyPr wrap="square" anchor="ctr" lIns="0" rIns="0" tIns="0" bIns="0">
+          <a:bodyPr wrap="square" lIns="0" tIns="0" rIns="0" bIns="0" anchor="ctr">
             <a:spAutoFit/>
           </a:bodyPr>
           <a:lstStyle/>
@@ -5128,6 +5616,7 @@
           <a:lstStyle/>
           <a:p>
             <a:pPr algn="ctr"/>
+            <a:endParaRPr/>
           </a:p>
         </p:txBody>
       </p:sp>
@@ -5148,7 +5637,7 @@
           <a:noFill/>
         </p:spPr>
         <p:txBody>
-          <a:bodyPr wrap="square" anchor="ctr" lIns="0" rIns="0" tIns="0" bIns="0">
+          <a:bodyPr wrap="square" lIns="0" tIns="0" rIns="0" bIns="0" anchor="ctr">
             <a:spAutoFit/>
           </a:bodyPr>
           <a:lstStyle/>
@@ -5208,6 +5697,7 @@
           <a:lstStyle/>
           <a:p>
             <a:pPr algn="ctr"/>
+            <a:endParaRPr/>
           </a:p>
         </p:txBody>
       </p:sp>
@@ -5228,7 +5718,7 @@
           <a:noFill/>
         </p:spPr>
         <p:txBody>
-          <a:bodyPr wrap="square" anchor="ctr" lIns="0" rIns="0" tIns="0" bIns="0">
+          <a:bodyPr wrap="square" lIns="0" tIns="0" rIns="0" bIns="0" anchor="ctr">
             <a:spAutoFit/>
           </a:bodyPr>
           <a:lstStyle/>
@@ -5288,6 +5778,7 @@
           <a:lstStyle/>
           <a:p>
             <a:pPr algn="ctr"/>
+            <a:endParaRPr/>
           </a:p>
         </p:txBody>
       </p:sp>
@@ -5308,7 +5799,7 @@
           <a:noFill/>
         </p:spPr>
         <p:txBody>
-          <a:bodyPr wrap="square" anchor="ctr" lIns="0" rIns="0" tIns="0" bIns="0">
+          <a:bodyPr wrap="square" lIns="0" tIns="0" rIns="0" bIns="0" anchor="ctr">
             <a:spAutoFit/>
           </a:bodyPr>
           <a:lstStyle/>
@@ -5368,6 +5859,7 @@
           <a:lstStyle/>
           <a:p>
             <a:pPr algn="ctr"/>
+            <a:endParaRPr/>
           </a:p>
         </p:txBody>
       </p:sp>
@@ -5388,7 +5880,7 @@
           <a:noFill/>
         </p:spPr>
         <p:txBody>
-          <a:bodyPr wrap="square" anchor="ctr" lIns="0" rIns="0" tIns="0" bIns="0">
+          <a:bodyPr wrap="square" lIns="0" tIns="0" rIns="0" bIns="0" anchor="ctr">
             <a:spAutoFit/>
           </a:bodyPr>
           <a:lstStyle/>
@@ -5448,6 +5940,7 @@
           <a:lstStyle/>
           <a:p>
             <a:pPr algn="ctr"/>
+            <a:endParaRPr/>
           </a:p>
         </p:txBody>
       </p:sp>
@@ -5468,7 +5961,7 @@
           <a:noFill/>
         </p:spPr>
         <p:txBody>
-          <a:bodyPr wrap="square" anchor="ctr" lIns="0" rIns="0" tIns="0" bIns="0">
+          <a:bodyPr wrap="square" lIns="0" tIns="0" rIns="0" bIns="0" anchor="ctr">
             <a:spAutoFit/>
           </a:bodyPr>
           <a:lstStyle/>
@@ -5528,6 +6021,7 @@
           <a:lstStyle/>
           <a:p>
             <a:pPr algn="ctr"/>
+            <a:endParaRPr/>
           </a:p>
         </p:txBody>
       </p:sp>
@@ -5548,7 +6042,7 @@
           <a:noFill/>
         </p:spPr>
         <p:txBody>
-          <a:bodyPr wrap="square" anchor="ctr" lIns="0" rIns="0" tIns="0" bIns="0">
+          <a:bodyPr wrap="square" lIns="0" tIns="0" rIns="0" bIns="0" anchor="ctr">
             <a:spAutoFit/>
           </a:bodyPr>
           <a:lstStyle/>
@@ -5608,6 +6102,7 @@
           <a:lstStyle/>
           <a:p>
             <a:pPr algn="ctr"/>
+            <a:endParaRPr/>
           </a:p>
         </p:txBody>
       </p:sp>
@@ -5628,7 +6123,7 @@
           <a:noFill/>
         </p:spPr>
         <p:txBody>
-          <a:bodyPr wrap="square" anchor="ctr" lIns="0" rIns="0" tIns="0" bIns="0">
+          <a:bodyPr wrap="square" lIns="0" tIns="0" rIns="0" bIns="0" anchor="ctr">
             <a:spAutoFit/>
           </a:bodyPr>
           <a:lstStyle/>
@@ -5688,6 +6183,7 @@
           <a:lstStyle/>
           <a:p>
             <a:pPr algn="ctr"/>
+            <a:endParaRPr/>
           </a:p>
         </p:txBody>
       </p:sp>
@@ -5699,29 +6195,47 @@
         </p:nvSpPr>
         <p:spPr>
           <a:xfrm>
-            <a:off x="6638544" y="2724912"/>
-            <a:ext cx="2414015" cy="420624"/>
-          </a:xfrm>
-          <a:prstGeom prst="rect">
-            <a:avLst/>
-          </a:prstGeom>
-          <a:noFill/>
-        </p:spPr>
-        <p:txBody>
-          <a:bodyPr wrap="square" anchor="ctr" lIns="0" rIns="0" tIns="0" bIns="0">
-            <a:spAutoFit/>
-          </a:bodyPr>
-          <a:lstStyle/>
-          <a:p>
-            <a:pPr algn="ctr"/>
-            <a:r>
-              <a:rPr sz="1100" b="1" i="0">
+            <a:off x="6638544" y="2850585"/>
+            <a:ext cx="2414015" cy="169277"/>
+          </a:xfrm>
+          <a:prstGeom prst="rect">
+            <a:avLst/>
+          </a:prstGeom>
+          <a:noFill/>
+        </p:spPr>
+        <p:txBody>
+          <a:bodyPr wrap="square" lIns="0" tIns="0" rIns="0" bIns="0" anchor="ctr">
+            <a:spAutoFit/>
+          </a:bodyPr>
+          <a:lstStyle/>
+          <a:p>
+            <a:pPr algn="ctr"/>
+            <a:r>
+              <a:rPr sz="1100" b="1" i="0" dirty="0">
                 <a:solidFill>
                   <a:srgbClr val="B56A6A"/>
                 </a:solidFill>
                 <a:latin typeface="Meiryo"/>
               </a:rPr>
-              <a:t>❌  ×（編集者は常に最新）</a:t>
+              <a:t>❌  （</a:t>
+            </a:r>
+            <a:r>
+              <a:rPr sz="1100" b="1" i="0" dirty="0" err="1">
+                <a:solidFill>
+                  <a:srgbClr val="B56A6A"/>
+                </a:solidFill>
+                <a:latin typeface="Meiryo"/>
+              </a:rPr>
+              <a:t>編集者は常に最新</a:t>
+            </a:r>
+            <a:r>
+              <a:rPr sz="1100" b="1" i="0" dirty="0">
+                <a:solidFill>
+                  <a:srgbClr val="B56A6A"/>
+                </a:solidFill>
+                <a:latin typeface="Meiryo"/>
+              </a:rPr>
+              <a:t>）</a:t>
             </a:r>
           </a:p>
         </p:txBody>
@@ -5768,6 +6282,7 @@
           <a:lstStyle/>
           <a:p>
             <a:pPr algn="ctr"/>
+            <a:endParaRPr/>
           </a:p>
         </p:txBody>
       </p:sp>
@@ -5788,7 +6303,7 @@
           <a:noFill/>
         </p:spPr>
         <p:txBody>
-          <a:bodyPr wrap="square" anchor="ctr" lIns="0" rIns="0" tIns="0" bIns="0">
+          <a:bodyPr wrap="square" lIns="0" tIns="0" rIns="0" bIns="0" anchor="ctr">
             <a:spAutoFit/>
           </a:bodyPr>
           <a:lstStyle/>
@@ -5848,6 +6363,7 @@
           <a:lstStyle/>
           <a:p>
             <a:pPr algn="ctr"/>
+            <a:endParaRPr/>
           </a:p>
         </p:txBody>
       </p:sp>
@@ -5868,7 +6384,7 @@
           <a:noFill/>
         </p:spPr>
         <p:txBody>
-          <a:bodyPr wrap="square" anchor="ctr" lIns="0" rIns="0" tIns="0" bIns="0">
+          <a:bodyPr wrap="square" lIns="0" tIns="0" rIns="0" bIns="0" anchor="ctr">
             <a:spAutoFit/>
           </a:bodyPr>
           <a:lstStyle/>
@@ -5928,6 +6444,7 @@
           <a:lstStyle/>
           <a:p>
             <a:pPr algn="ctr"/>
+            <a:endParaRPr/>
           </a:p>
         </p:txBody>
       </p:sp>
@@ -5948,7 +6465,7 @@
           <a:noFill/>
         </p:spPr>
         <p:txBody>
-          <a:bodyPr wrap="square" anchor="ctr" lIns="0" rIns="0" tIns="0" bIns="0">
+          <a:bodyPr wrap="square" lIns="0" tIns="0" rIns="0" bIns="0" anchor="ctr">
             <a:spAutoFit/>
           </a:bodyPr>
           <a:lstStyle/>
@@ -6008,6 +6525,7 @@
           <a:lstStyle/>
           <a:p>
             <a:pPr algn="ctr"/>
+            <a:endParaRPr/>
           </a:p>
         </p:txBody>
       </p:sp>
@@ -6028,7 +6546,7 @@
           <a:noFill/>
         </p:spPr>
         <p:txBody>
-          <a:bodyPr wrap="square" anchor="ctr" lIns="0" rIns="0" tIns="0" bIns="0">
+          <a:bodyPr wrap="square" lIns="0" tIns="0" rIns="0" bIns="0" anchor="ctr">
             <a:spAutoFit/>
           </a:bodyPr>
           <a:lstStyle/>
@@ -6088,6 +6606,7 @@
           <a:lstStyle/>
           <a:p>
             <a:pPr algn="ctr"/>
+            <a:endParaRPr/>
           </a:p>
         </p:txBody>
       </p:sp>
@@ -6108,7 +6627,7 @@
           <a:noFill/>
         </p:spPr>
         <p:txBody>
-          <a:bodyPr wrap="square" anchor="ctr" lIns="0" rIns="0" tIns="0" bIns="0">
+          <a:bodyPr wrap="square" lIns="0" tIns="0" rIns="0" bIns="0" anchor="ctr">
             <a:spAutoFit/>
           </a:bodyPr>
           <a:lstStyle/>
@@ -6168,6 +6687,7 @@
           <a:lstStyle/>
           <a:p>
             <a:pPr algn="ctr"/>
+            <a:endParaRPr/>
           </a:p>
         </p:txBody>
       </p:sp>
@@ -6188,7 +6708,7 @@
           <a:noFill/>
         </p:spPr>
         <p:txBody>
-          <a:bodyPr wrap="square" anchor="ctr" lIns="0" rIns="0" tIns="0" bIns="0">
+          <a:bodyPr wrap="square" lIns="0" tIns="0" rIns="0" bIns="0" anchor="ctr">
             <a:spAutoFit/>
           </a:bodyPr>
           <a:lstStyle/>
@@ -6248,6 +6768,7 @@
           <a:lstStyle/>
           <a:p>
             <a:pPr algn="ctr"/>
+            <a:endParaRPr/>
           </a:p>
         </p:txBody>
       </p:sp>
@@ -6268,7 +6789,7 @@
           <a:noFill/>
         </p:spPr>
         <p:txBody>
-          <a:bodyPr wrap="square" anchor="ctr" lIns="0" rIns="0" tIns="0" bIns="0">
+          <a:bodyPr wrap="square" lIns="0" tIns="0" rIns="0" bIns="0" anchor="ctr">
             <a:spAutoFit/>
           </a:bodyPr>
           <a:lstStyle/>
@@ -6328,6 +6849,7 @@
           <a:lstStyle/>
           <a:p>
             <a:pPr algn="ctr"/>
+            <a:endParaRPr/>
           </a:p>
         </p:txBody>
       </p:sp>
@@ -6348,7 +6870,7 @@
           <a:noFill/>
         </p:spPr>
         <p:txBody>
-          <a:bodyPr wrap="square" anchor="ctr" lIns="0" rIns="0" tIns="0" bIns="0">
+          <a:bodyPr wrap="square" lIns="0" tIns="0" rIns="0" bIns="0" anchor="ctr">
             <a:spAutoFit/>
           </a:bodyPr>
           <a:lstStyle/>
@@ -6408,6 +6930,7 @@
           <a:lstStyle/>
           <a:p>
             <a:pPr algn="ctr"/>
+            <a:endParaRPr/>
           </a:p>
         </p:txBody>
       </p:sp>
@@ -6428,7 +6951,7 @@
           <a:noFill/>
         </p:spPr>
         <p:txBody>
-          <a:bodyPr wrap="square" anchor="ctr" lIns="0" rIns="0" tIns="0" bIns="0">
+          <a:bodyPr wrap="square" lIns="0" tIns="0" rIns="0" bIns="0" anchor="ctr">
             <a:spAutoFit/>
           </a:bodyPr>
           <a:lstStyle/>
@@ -6488,6 +7011,7 @@
           <a:lstStyle/>
           <a:p>
             <a:pPr algn="ctr"/>
+            <a:endParaRPr/>
           </a:p>
         </p:txBody>
       </p:sp>
@@ -6508,7 +7032,7 @@
           <a:noFill/>
         </p:spPr>
         <p:txBody>
-          <a:bodyPr wrap="square" anchor="ctr" lIns="0" rIns="0" tIns="0" bIns="0">
+          <a:bodyPr wrap="square" lIns="0" tIns="0" rIns="0" bIns="0" anchor="ctr">
             <a:spAutoFit/>
           </a:bodyPr>
           <a:lstStyle/>
@@ -6568,6 +7092,7 @@
           <a:lstStyle/>
           <a:p>
             <a:pPr algn="ctr"/>
+            <a:endParaRPr/>
           </a:p>
         </p:txBody>
       </p:sp>
@@ -6588,7 +7113,7 @@
           <a:noFill/>
         </p:spPr>
         <p:txBody>
-          <a:bodyPr wrap="square" anchor="ctr" lIns="0" rIns="0" tIns="0" bIns="0">
+          <a:bodyPr wrap="square" lIns="0" tIns="0" rIns="0" bIns="0" anchor="ctr">
             <a:spAutoFit/>
           </a:bodyPr>
           <a:lstStyle/>
@@ -6648,6 +7173,7 @@
           <a:lstStyle/>
           <a:p>
             <a:pPr algn="ctr"/>
+            <a:endParaRPr/>
           </a:p>
         </p:txBody>
       </p:sp>
@@ -6668,7 +7194,7 @@
           <a:noFill/>
         </p:spPr>
         <p:txBody>
-          <a:bodyPr wrap="square" anchor="ctr" lIns="0" rIns="0" tIns="0" bIns="0">
+          <a:bodyPr wrap="square" lIns="0" tIns="0" rIns="0" bIns="0" anchor="ctr">
             <a:spAutoFit/>
           </a:bodyPr>
           <a:lstStyle/>
@@ -6703,7 +7229,7 @@
           <a:noFill/>
         </p:spPr>
         <p:txBody>
-          <a:bodyPr wrap="square" anchor="ctr" lIns="0" rIns="0" tIns="0" bIns="0">
+          <a:bodyPr wrap="square" lIns="0" tIns="0" rIns="0" bIns="0" anchor="ctr">
             <a:spAutoFit/>
           </a:bodyPr>
           <a:lstStyle/>
@@ -6738,7 +7264,7 @@
           <a:noFill/>
         </p:spPr>
         <p:txBody>
-          <a:bodyPr wrap="square" anchor="ctr" lIns="0" rIns="0" tIns="0" bIns="0">
+          <a:bodyPr wrap="square" lIns="0" tIns="0" rIns="0" bIns="0" anchor="ctr">
             <a:spAutoFit/>
           </a:bodyPr>
           <a:lstStyle/>
@@ -6765,7 +7291,7 @@
 </file>
 
 <file path=ppt/slides/slide2.xml><?xml version="1.0" encoding="utf-8"?>
-<p:sld xmlns:a="http://schemas.openxmlformats.org/drawingml/2006/main" xmlns:p="http://schemas.openxmlformats.org/presentationml/2006/main" xmlns:r="http://schemas.openxmlformats.org/officeDocument/2006/relationships">
+<p:sld xmlns:a="http://schemas.openxmlformats.org/drawingml/2006/main" xmlns:r="http://schemas.openxmlformats.org/officeDocument/2006/relationships" xmlns:p="http://schemas.openxmlformats.org/presentationml/2006/main">
   <p:cSld>
     <p:bg>
       <p:bgPr>
@@ -6781,7 +7307,14 @@
         <p:cNvGrpSpPr/>
         <p:nvPr/>
       </p:nvGrpSpPr>
-      <p:grpSpPr/>
+      <p:grpSpPr>
+        <a:xfrm>
+          <a:off x="0" y="0"/>
+          <a:ext cx="0" cy="0"/>
+          <a:chOff x="0" y="0"/>
+          <a:chExt cx="0" cy="0"/>
+        </a:xfrm>
+      </p:grpSpPr>
       <p:sp>
         <p:nvSpPr>
           <p:cNvPr id="2" name="Rectangle 1"/>
@@ -6822,6 +7355,7 @@
           <a:lstStyle/>
           <a:p>
             <a:pPr algn="ctr"/>
+            <a:endParaRPr/>
           </a:p>
         </p:txBody>
       </p:sp>
@@ -6865,6 +7399,7 @@
           <a:lstStyle/>
           <a:p>
             <a:pPr algn="ctr"/>
+            <a:endParaRPr/>
           </a:p>
         </p:txBody>
       </p:sp>
@@ -6908,6 +7443,7 @@
           <a:lstStyle/>
           <a:p>
             <a:pPr algn="ctr"/>
+            <a:endParaRPr/>
           </a:p>
         </p:txBody>
       </p:sp>
@@ -6928,7 +7464,7 @@
           <a:noFill/>
         </p:spPr>
         <p:txBody>
-          <a:bodyPr wrap="square" anchor="ctr" lIns="0" rIns="0" tIns="0" bIns="0">
+          <a:bodyPr wrap="square" lIns="0" tIns="0" rIns="0" bIns="0" anchor="ctr">
             <a:spAutoFit/>
           </a:bodyPr>
           <a:lstStyle/>
@@ -6986,6 +7522,7 @@
           <a:lstStyle/>
           <a:p>
             <a:pPr algn="ctr"/>
+            <a:endParaRPr/>
           </a:p>
         </p:txBody>
       </p:sp>
@@ -7029,6 +7566,7 @@
           <a:lstStyle/>
           <a:p>
             <a:pPr algn="ctr"/>
+            <a:endParaRPr/>
           </a:p>
         </p:txBody>
       </p:sp>
@@ -7049,7 +7587,7 @@
           <a:noFill/>
         </p:spPr>
         <p:txBody>
-          <a:bodyPr wrap="square" anchor="ctr" lIns="0" rIns="0" tIns="0" bIns="0">
+          <a:bodyPr wrap="square" lIns="0" tIns="0" rIns="0" bIns="0" anchor="ctr">
             <a:spAutoFit/>
           </a:bodyPr>
           <a:lstStyle/>
@@ -7084,7 +7622,7 @@
           <a:noFill/>
         </p:spPr>
         <p:txBody>
-          <a:bodyPr wrap="square" anchor="ctr" lIns="0" rIns="0" tIns="0" bIns="0">
+          <a:bodyPr wrap="square" lIns="0" tIns="0" rIns="0" bIns="0" anchor="ctr">
             <a:spAutoFit/>
           </a:bodyPr>
           <a:lstStyle/>
@@ -7144,6 +7682,7 @@
           <a:lstStyle/>
           <a:p>
             <a:pPr algn="ctr"/>
+            <a:endParaRPr/>
           </a:p>
         </p:txBody>
       </p:sp>
@@ -7187,6 +7726,7 @@
           <a:lstStyle/>
           <a:p>
             <a:pPr algn="ctr"/>
+            <a:endParaRPr/>
           </a:p>
         </p:txBody>
       </p:sp>
@@ -7230,6 +7770,7 @@
           <a:lstStyle/>
           <a:p>
             <a:pPr algn="ctr"/>
+            <a:endParaRPr/>
           </a:p>
         </p:txBody>
       </p:sp>
@@ -7250,7 +7791,7 @@
           <a:noFill/>
         </p:spPr>
         <p:txBody>
-          <a:bodyPr wrap="square" anchor="ctr" lIns="0" rIns="0" tIns="0" bIns="0">
+          <a:bodyPr wrap="square" lIns="0" tIns="0" rIns="0" bIns="0" anchor="ctr">
             <a:spAutoFit/>
           </a:bodyPr>
           <a:lstStyle/>
@@ -7308,6 +7849,7 @@
           <a:lstStyle/>
           <a:p>
             <a:pPr algn="ctr"/>
+            <a:endParaRPr/>
           </a:p>
         </p:txBody>
       </p:sp>
@@ -7328,7 +7870,7 @@
           <a:noFill/>
         </p:spPr>
         <p:txBody>
-          <a:bodyPr wrap="square" anchor="ctr" lIns="0" rIns="0" tIns="0" bIns="0">
+          <a:bodyPr wrap="square" lIns="0" tIns="0" rIns="0" bIns="0" anchor="ctr">
             <a:spAutoFit/>
           </a:bodyPr>
           <a:lstStyle/>
@@ -7386,6 +7928,7 @@
           <a:lstStyle/>
           <a:p>
             <a:pPr algn="ctr"/>
+            <a:endParaRPr/>
           </a:p>
         </p:txBody>
       </p:sp>
@@ -7406,7 +7949,7 @@
           <a:noFill/>
         </p:spPr>
         <p:txBody>
-          <a:bodyPr wrap="square" anchor="ctr" lIns="0" rIns="0" tIns="0" bIns="0">
+          <a:bodyPr wrap="square" lIns="0" tIns="0" rIns="0" bIns="0" anchor="ctr">
             <a:spAutoFit/>
           </a:bodyPr>
           <a:lstStyle/>
@@ -7464,6 +8007,7 @@
           <a:lstStyle/>
           <a:p>
             <a:pPr algn="ctr"/>
+            <a:endParaRPr/>
           </a:p>
         </p:txBody>
       </p:sp>
@@ -7484,7 +8028,7 @@
           <a:noFill/>
         </p:spPr>
         <p:txBody>
-          <a:bodyPr wrap="square" anchor="ctr" lIns="0" rIns="0" tIns="0" bIns="0">
+          <a:bodyPr wrap="square" lIns="0" tIns="0" rIns="0" bIns="0" anchor="ctr">
             <a:spAutoFit/>
           </a:bodyPr>
           <a:lstStyle/>
@@ -7542,6 +8086,7 @@
           <a:lstStyle/>
           <a:p>
             <a:pPr algn="ctr"/>
+            <a:endParaRPr/>
           </a:p>
         </p:txBody>
       </p:sp>
@@ -7562,7 +8107,7 @@
           <a:noFill/>
         </p:spPr>
         <p:txBody>
-          <a:bodyPr wrap="square" anchor="ctr" lIns="0" rIns="0" tIns="0" bIns="0">
+          <a:bodyPr wrap="square" lIns="0" tIns="0" rIns="0" bIns="0" anchor="ctr">
             <a:spAutoFit/>
           </a:bodyPr>
           <a:lstStyle/>
@@ -7620,6 +8165,7 @@
           <a:lstStyle/>
           <a:p>
             <a:pPr algn="ctr"/>
+            <a:endParaRPr/>
           </a:p>
         </p:txBody>
       </p:sp>
@@ -7640,7 +8186,7 @@
           <a:noFill/>
         </p:spPr>
         <p:txBody>
-          <a:bodyPr wrap="square" anchor="ctr" lIns="0" rIns="0" tIns="0" bIns="0">
+          <a:bodyPr wrap="square" lIns="0" tIns="0" rIns="0" bIns="0" anchor="ctr">
             <a:spAutoFit/>
           </a:bodyPr>
           <a:lstStyle/>
@@ -7675,7 +8221,7 @@
           <a:noFill/>
         </p:spPr>
         <p:txBody>
-          <a:bodyPr wrap="square" anchor="ctr" lIns="0" rIns="0" tIns="0" bIns="0">
+          <a:bodyPr wrap="square" lIns="0" tIns="0" rIns="0" bIns="0" anchor="ctr">
             <a:spAutoFit/>
           </a:bodyPr>
           <a:lstStyle/>
@@ -7735,6 +8281,7 @@
           <a:lstStyle/>
           <a:p>
             <a:pPr algn="ctr"/>
+            <a:endParaRPr/>
           </a:p>
         </p:txBody>
       </p:sp>
@@ -7778,6 +8325,7 @@
           <a:lstStyle/>
           <a:p>
             <a:pPr algn="ctr"/>
+            <a:endParaRPr/>
           </a:p>
         </p:txBody>
       </p:sp>
@@ -7821,6 +8369,7 @@
           <a:lstStyle/>
           <a:p>
             <a:pPr algn="ctr"/>
+            <a:endParaRPr/>
           </a:p>
         </p:txBody>
       </p:sp>
@@ -7841,7 +8390,7 @@
           <a:noFill/>
         </p:spPr>
         <p:txBody>
-          <a:bodyPr wrap="square" anchor="ctr" lIns="0" rIns="0" tIns="0" bIns="0">
+          <a:bodyPr wrap="square" lIns="0" tIns="0" rIns="0" bIns="0" anchor="ctr">
             <a:spAutoFit/>
           </a:bodyPr>
           <a:lstStyle/>
@@ -7901,6 +8450,7 @@
           <a:lstStyle/>
           <a:p>
             <a:pPr algn="ctr"/>
+            <a:endParaRPr/>
           </a:p>
         </p:txBody>
       </p:sp>
@@ -7921,7 +8471,7 @@
           <a:noFill/>
         </p:spPr>
         <p:txBody>
-          <a:bodyPr wrap="square" anchor="ctr" lIns="0" rIns="0" tIns="0" bIns="0">
+          <a:bodyPr wrap="square" lIns="0" tIns="0" rIns="0" bIns="0" anchor="ctr">
             <a:spAutoFit/>
           </a:bodyPr>
           <a:lstStyle/>
@@ -7981,6 +8531,7 @@
           <a:lstStyle/>
           <a:p>
             <a:pPr algn="ctr"/>
+            <a:endParaRPr/>
           </a:p>
         </p:txBody>
       </p:sp>
@@ -8001,7 +8552,7 @@
           <a:noFill/>
         </p:spPr>
         <p:txBody>
-          <a:bodyPr wrap="square" anchor="ctr" lIns="0" rIns="0" tIns="0" bIns="0">
+          <a:bodyPr wrap="square" lIns="0" tIns="0" rIns="0" bIns="0" anchor="ctr">
             <a:spAutoFit/>
           </a:bodyPr>
           <a:lstStyle/>
@@ -8061,6 +8612,7 @@
           <a:lstStyle/>
           <a:p>
             <a:pPr algn="ctr"/>
+            <a:endParaRPr/>
           </a:p>
         </p:txBody>
       </p:sp>
@@ -8081,7 +8633,7 @@
           <a:noFill/>
         </p:spPr>
         <p:txBody>
-          <a:bodyPr wrap="square" anchor="ctr" lIns="0" rIns="0" tIns="0" bIns="0">
+          <a:bodyPr wrap="square" lIns="0" tIns="0" rIns="0" bIns="0" anchor="ctr">
             <a:spAutoFit/>
           </a:bodyPr>
           <a:lstStyle/>
@@ -8141,6 +8693,7 @@
           <a:lstStyle/>
           <a:p>
             <a:pPr algn="ctr"/>
+            <a:endParaRPr/>
           </a:p>
         </p:txBody>
       </p:sp>
@@ -8161,7 +8714,7 @@
           <a:noFill/>
         </p:spPr>
         <p:txBody>
-          <a:bodyPr wrap="square" anchor="ctr" lIns="0" rIns="0" tIns="0" bIns="0">
+          <a:bodyPr wrap="square" lIns="0" tIns="0" rIns="0" bIns="0" anchor="ctr">
             <a:spAutoFit/>
           </a:bodyPr>
           <a:lstStyle/>
@@ -8221,6 +8774,7 @@
           <a:lstStyle/>
           <a:p>
             <a:pPr algn="ctr"/>
+            <a:endParaRPr/>
           </a:p>
         </p:txBody>
       </p:sp>
@@ -8241,7 +8795,7 @@
           <a:noFill/>
         </p:spPr>
         <p:txBody>
-          <a:bodyPr wrap="square" anchor="ctr" lIns="0" rIns="0" tIns="0" bIns="0">
+          <a:bodyPr wrap="square" lIns="0" tIns="0" rIns="0" bIns="0" anchor="ctr">
             <a:spAutoFit/>
           </a:bodyPr>
           <a:lstStyle/>
@@ -8301,6 +8855,7 @@
           <a:lstStyle/>
           <a:p>
             <a:pPr algn="ctr"/>
+            <a:endParaRPr/>
           </a:p>
         </p:txBody>
       </p:sp>
@@ -8321,7 +8876,7 @@
           <a:noFill/>
         </p:spPr>
         <p:txBody>
-          <a:bodyPr wrap="square" anchor="ctr" lIns="0" rIns="0" tIns="0" bIns="0">
+          <a:bodyPr wrap="square" lIns="0" tIns="0" rIns="0" bIns="0" anchor="ctr">
             <a:spAutoFit/>
           </a:bodyPr>
           <a:lstStyle/>
@@ -8381,6 +8936,7 @@
           <a:lstStyle/>
           <a:p>
             <a:pPr algn="ctr"/>
+            <a:endParaRPr/>
           </a:p>
         </p:txBody>
       </p:sp>
@@ -8401,7 +8957,7 @@
           <a:noFill/>
         </p:spPr>
         <p:txBody>
-          <a:bodyPr wrap="square" anchor="ctr" lIns="0" rIns="0" tIns="0" bIns="0">
+          <a:bodyPr wrap="square" lIns="0" tIns="0" rIns="0" bIns="0" anchor="ctr">
             <a:spAutoFit/>
           </a:bodyPr>
           <a:lstStyle/>
@@ -8461,6 +9017,7 @@
           <a:lstStyle/>
           <a:p>
             <a:pPr algn="ctr"/>
+            <a:endParaRPr/>
           </a:p>
         </p:txBody>
       </p:sp>
@@ -8481,7 +9038,7 @@
           <a:noFill/>
         </p:spPr>
         <p:txBody>
-          <a:bodyPr wrap="square" anchor="ctr" lIns="0" rIns="0" tIns="0" bIns="0">
+          <a:bodyPr wrap="square" lIns="0" tIns="0" rIns="0" bIns="0" anchor="ctr">
             <a:spAutoFit/>
           </a:bodyPr>
           <a:lstStyle/>
@@ -8541,6 +9098,7 @@
           <a:lstStyle/>
           <a:p>
             <a:pPr algn="ctr"/>
+            <a:endParaRPr/>
           </a:p>
         </p:txBody>
       </p:sp>
@@ -8561,7 +9119,7 @@
           <a:noFill/>
         </p:spPr>
         <p:txBody>
-          <a:bodyPr wrap="square" anchor="ctr" lIns="0" rIns="0" tIns="0" bIns="0">
+          <a:bodyPr wrap="square" lIns="0" tIns="0" rIns="0" bIns="0" anchor="ctr">
             <a:spAutoFit/>
           </a:bodyPr>
           <a:lstStyle/>
@@ -8619,6 +9177,7 @@
           <a:lstStyle/>
           <a:p>
             <a:pPr algn="ctr"/>
+            <a:endParaRPr/>
           </a:p>
         </p:txBody>
       </p:sp>
@@ -8664,6 +9223,7 @@
           <a:lstStyle/>
           <a:p>
             <a:pPr algn="ctr"/>
+            <a:endParaRPr/>
           </a:p>
         </p:txBody>
       </p:sp>
@@ -8684,7 +9244,7 @@
           <a:noFill/>
         </p:spPr>
         <p:txBody>
-          <a:bodyPr wrap="square" anchor="ctr" lIns="0" rIns="0" tIns="0" bIns="0">
+          <a:bodyPr wrap="square" lIns="0" tIns="0" rIns="0" bIns="0" anchor="ctr">
             <a:spAutoFit/>
           </a:bodyPr>
           <a:lstStyle/>
@@ -8744,6 +9304,7 @@
           <a:lstStyle/>
           <a:p>
             <a:pPr algn="ctr"/>
+            <a:endParaRPr/>
           </a:p>
         </p:txBody>
       </p:sp>
@@ -8764,7 +9325,7 @@
           <a:noFill/>
         </p:spPr>
         <p:txBody>
-          <a:bodyPr wrap="square" anchor="ctr" lIns="0" rIns="0" tIns="0" bIns="0">
+          <a:bodyPr wrap="square" lIns="0" tIns="0" rIns="0" bIns="0" anchor="ctr">
             <a:spAutoFit/>
           </a:bodyPr>
           <a:lstStyle/>
@@ -8822,6 +9383,7 @@
           <a:lstStyle/>
           <a:p>
             <a:pPr algn="ctr"/>
+            <a:endParaRPr/>
           </a:p>
         </p:txBody>
       </p:sp>
@@ -8867,6 +9429,7 @@
           <a:lstStyle/>
           <a:p>
             <a:pPr algn="ctr"/>
+            <a:endParaRPr/>
           </a:p>
         </p:txBody>
       </p:sp>
@@ -8887,7 +9450,7 @@
           <a:noFill/>
         </p:spPr>
         <p:txBody>
-          <a:bodyPr wrap="square" anchor="ctr" lIns="0" rIns="0" tIns="0" bIns="0">
+          <a:bodyPr wrap="square" lIns="0" tIns="0" rIns="0" bIns="0" anchor="ctr">
             <a:spAutoFit/>
           </a:bodyPr>
           <a:lstStyle/>
@@ -8947,6 +9510,7 @@
           <a:lstStyle/>
           <a:p>
             <a:pPr algn="ctr"/>
+            <a:endParaRPr/>
           </a:p>
         </p:txBody>
       </p:sp>
@@ -8967,7 +9531,7 @@
           <a:noFill/>
         </p:spPr>
         <p:txBody>
-          <a:bodyPr wrap="square" anchor="ctr" lIns="0" rIns="0" tIns="0" bIns="0">
+          <a:bodyPr wrap="square" lIns="0" tIns="0" rIns="0" bIns="0" anchor="ctr">
             <a:spAutoFit/>
           </a:bodyPr>
           <a:lstStyle/>
@@ -9025,6 +9589,7 @@
           <a:lstStyle/>
           <a:p>
             <a:pPr algn="ctr"/>
+            <a:endParaRPr/>
           </a:p>
         </p:txBody>
       </p:sp>
@@ -9045,7 +9610,7 @@
           <a:noFill/>
         </p:spPr>
         <p:txBody>
-          <a:bodyPr wrap="square" anchor="ctr" lIns="0" rIns="0" tIns="0" bIns="0">
+          <a:bodyPr wrap="square" lIns="0" tIns="0" rIns="0" bIns="0" anchor="ctr">
             <a:spAutoFit/>
           </a:bodyPr>
           <a:lstStyle/>
@@ -9080,7 +9645,7 @@
           <a:noFill/>
         </p:spPr>
         <p:txBody>
-          <a:bodyPr wrap="square" anchor="ctr" lIns="0" rIns="0" tIns="0" bIns="0">
+          <a:bodyPr wrap="square" lIns="0" tIns="0" rIns="0" bIns="0" anchor="ctr">
             <a:spAutoFit/>
           </a:bodyPr>
           <a:lstStyle/>
@@ -9115,7 +9680,7 @@
           <a:noFill/>
         </p:spPr>
         <p:txBody>
-          <a:bodyPr wrap="square" anchor="ctr" lIns="0" rIns="0" tIns="0" bIns="0">
+          <a:bodyPr wrap="square" lIns="0" tIns="0" rIns="0" bIns="0" anchor="ctr">
             <a:spAutoFit/>
           </a:bodyPr>
           <a:lstStyle/>
@@ -9150,7 +9715,7 @@
           <a:noFill/>
         </p:spPr>
         <p:txBody>
-          <a:bodyPr wrap="square" anchor="ctr" lIns="0" rIns="0" tIns="0" bIns="0">
+          <a:bodyPr wrap="square" lIns="0" tIns="0" rIns="0" bIns="0" anchor="ctr">
             <a:spAutoFit/>
           </a:bodyPr>
           <a:lstStyle/>
@@ -9185,7 +9750,7 @@
           <a:noFill/>
         </p:spPr>
         <p:txBody>
-          <a:bodyPr wrap="square" anchor="ctr" lIns="0" rIns="0" tIns="0" bIns="0">
+          <a:bodyPr wrap="square" lIns="0" tIns="0" rIns="0" bIns="0" anchor="ctr">
             <a:spAutoFit/>
           </a:bodyPr>
           <a:lstStyle/>
@@ -9220,7 +9785,7 @@
           <a:noFill/>
         </p:spPr>
         <p:txBody>
-          <a:bodyPr wrap="square" anchor="ctr" lIns="0" rIns="0" tIns="0" bIns="0">
+          <a:bodyPr wrap="square" lIns="0" tIns="0" rIns="0" bIns="0" anchor="ctr">
             <a:spAutoFit/>
           </a:bodyPr>
           <a:lstStyle/>
@@ -9255,7 +9820,7 @@
           <a:noFill/>
         </p:spPr>
         <p:txBody>
-          <a:bodyPr wrap="square" anchor="ctr" lIns="0" rIns="0" tIns="0" bIns="0">
+          <a:bodyPr wrap="square" lIns="0" tIns="0" rIns="0" bIns="0" anchor="ctr">
             <a:spAutoFit/>
           </a:bodyPr>
           <a:lstStyle/>
@@ -9290,7 +9855,7 @@
           <a:noFill/>
         </p:spPr>
         <p:txBody>
-          <a:bodyPr wrap="square" anchor="ctr" lIns="0" rIns="0" tIns="0" bIns="0">
+          <a:bodyPr wrap="square" lIns="0" tIns="0" rIns="0" bIns="0" anchor="ctr">
             <a:spAutoFit/>
           </a:bodyPr>
           <a:lstStyle/>
@@ -9325,7 +9890,7 @@
           <a:noFill/>
         </p:spPr>
         <p:txBody>
-          <a:bodyPr wrap="square" anchor="ctr" lIns="0" rIns="0" tIns="0" bIns="0">
+          <a:bodyPr wrap="square" lIns="0" tIns="0" rIns="0" bIns="0" anchor="ctr">
             <a:spAutoFit/>
           </a:bodyPr>
           <a:lstStyle/>
@@ -9360,7 +9925,7 @@
           <a:noFill/>
         </p:spPr>
         <p:txBody>
-          <a:bodyPr wrap="square" anchor="ctr" lIns="0" rIns="0" tIns="0" bIns="0">
+          <a:bodyPr wrap="square" lIns="0" tIns="0" rIns="0" bIns="0" anchor="ctr">
             <a:spAutoFit/>
           </a:bodyPr>
           <a:lstStyle/>
@@ -9395,7 +9960,7 @@
           <a:noFill/>
         </p:spPr>
         <p:txBody>
-          <a:bodyPr wrap="square" anchor="ctr" lIns="0" rIns="0" tIns="0" bIns="0">
+          <a:bodyPr wrap="square" lIns="0" tIns="0" rIns="0" bIns="0" anchor="ctr">
             <a:spAutoFit/>
           </a:bodyPr>
           <a:lstStyle/>
@@ -9422,7 +9987,7 @@
 </file>
 
 <file path=ppt/slides/slide3.xml><?xml version="1.0" encoding="utf-8"?>
-<p:sld xmlns:a="http://schemas.openxmlformats.org/drawingml/2006/main" xmlns:p="http://schemas.openxmlformats.org/presentationml/2006/main" xmlns:r="http://schemas.openxmlformats.org/officeDocument/2006/relationships">
+<p:sld xmlns:a="http://schemas.openxmlformats.org/drawingml/2006/main" xmlns:r="http://schemas.openxmlformats.org/officeDocument/2006/relationships" xmlns:p="http://schemas.openxmlformats.org/presentationml/2006/main">
   <p:cSld>
     <p:bg>
       <p:bgPr>
@@ -9438,7 +10003,14 @@
         <p:cNvGrpSpPr/>
         <p:nvPr/>
       </p:nvGrpSpPr>
-      <p:grpSpPr/>
+      <p:grpSpPr>
+        <a:xfrm>
+          <a:off x="0" y="0"/>
+          <a:ext cx="0" cy="0"/>
+          <a:chOff x="0" y="0"/>
+          <a:chExt cx="0" cy="0"/>
+        </a:xfrm>
+      </p:grpSpPr>
       <p:sp>
         <p:nvSpPr>
           <p:cNvPr id="2" name="Rectangle 1"/>
@@ -9479,6 +10051,7 @@
           <a:lstStyle/>
           <a:p>
             <a:pPr algn="ctr"/>
+            <a:endParaRPr/>
           </a:p>
         </p:txBody>
       </p:sp>
@@ -9522,6 +10095,7 @@
           <a:lstStyle/>
           <a:p>
             <a:pPr algn="ctr"/>
+            <a:endParaRPr/>
           </a:p>
         </p:txBody>
       </p:sp>
@@ -9565,6 +10139,7 @@
           <a:lstStyle/>
           <a:p>
             <a:pPr algn="ctr"/>
+            <a:endParaRPr/>
           </a:p>
         </p:txBody>
       </p:sp>
@@ -9585,7 +10160,7 @@
           <a:noFill/>
         </p:spPr>
         <p:txBody>
-          <a:bodyPr wrap="square" anchor="ctr" lIns="0" rIns="0" tIns="0" bIns="0">
+          <a:bodyPr wrap="square" lIns="0" tIns="0" rIns="0" bIns="0" anchor="ctr">
             <a:spAutoFit/>
           </a:bodyPr>
           <a:lstStyle/>
@@ -9645,6 +10220,7 @@
           <a:lstStyle/>
           <a:p>
             <a:pPr algn="ctr"/>
+            <a:endParaRPr/>
           </a:p>
         </p:txBody>
       </p:sp>
@@ -9688,6 +10264,7 @@
           <a:lstStyle/>
           <a:p>
             <a:pPr algn="ctr"/>
+            <a:endParaRPr/>
           </a:p>
         </p:txBody>
       </p:sp>
@@ -9708,7 +10285,7 @@
           <a:noFill/>
         </p:spPr>
         <p:txBody>
-          <a:bodyPr wrap="square" anchor="ctr" lIns="0" rIns="0" tIns="0" bIns="0">
+          <a:bodyPr wrap="square" lIns="0" tIns="0" rIns="0" bIns="0" anchor="ctr">
             <a:spAutoFit/>
           </a:bodyPr>
           <a:lstStyle/>
@@ -9766,6 +10343,7 @@
           <a:lstStyle/>
           <a:p>
             <a:pPr algn="ctr"/>
+            <a:endParaRPr/>
           </a:p>
         </p:txBody>
       </p:sp>
@@ -9809,6 +10387,7 @@
           <a:lstStyle/>
           <a:p>
             <a:pPr algn="ctr"/>
+            <a:endParaRPr/>
           </a:p>
         </p:txBody>
       </p:sp>
@@ -9829,7 +10408,7 @@
           <a:noFill/>
         </p:spPr>
         <p:txBody>
-          <a:bodyPr wrap="square" anchor="ctr" lIns="0" rIns="0" tIns="0" bIns="0">
+          <a:bodyPr wrap="square" lIns="0" tIns="0" rIns="0" bIns="0" anchor="ctr">
             <a:spAutoFit/>
           </a:bodyPr>
           <a:lstStyle/>
@@ -9864,7 +10443,7 @@
           <a:noFill/>
         </p:spPr>
         <p:txBody>
-          <a:bodyPr wrap="square" anchor="ctr" lIns="0" rIns="0" tIns="0" bIns="0">
+          <a:bodyPr wrap="square" lIns="0" tIns="0" rIns="0" bIns="0" anchor="ctr">
             <a:spAutoFit/>
           </a:bodyPr>
           <a:lstStyle/>
@@ -9899,7 +10478,7 @@
           <a:noFill/>
         </p:spPr>
         <p:txBody>
-          <a:bodyPr wrap="square" anchor="t" lIns="0" rIns="0" tIns="0" bIns="0">
+          <a:bodyPr wrap="square" lIns="0" tIns="0" rIns="0" bIns="0" anchor="t">
             <a:spAutoFit/>
           </a:bodyPr>
           <a:lstStyle/>
@@ -9957,6 +10536,7 @@
           <a:lstStyle/>
           <a:p>
             <a:pPr algn="ctr"/>
+            <a:endParaRPr/>
           </a:p>
         </p:txBody>
       </p:sp>
@@ -9977,7 +10557,7 @@
           <a:noFill/>
         </p:spPr>
         <p:txBody>
-          <a:bodyPr wrap="square" anchor="ctr" lIns="0" rIns="0" tIns="0" bIns="0">
+          <a:bodyPr wrap="square" lIns="0" tIns="0" rIns="0" bIns="0" anchor="ctr">
             <a:spAutoFit/>
           </a:bodyPr>
           <a:lstStyle/>
@@ -10012,7 +10592,7 @@
           <a:noFill/>
         </p:spPr>
         <p:txBody>
-          <a:bodyPr wrap="square" anchor="ctr" lIns="0" rIns="0" tIns="0" bIns="0">
+          <a:bodyPr wrap="square" lIns="0" tIns="0" rIns="0" bIns="0" anchor="ctr">
             <a:spAutoFit/>
           </a:bodyPr>
           <a:lstStyle/>
@@ -10047,7 +10627,7 @@
           <a:noFill/>
         </p:spPr>
         <p:txBody>
-          <a:bodyPr wrap="square" anchor="t" lIns="0" rIns="0" tIns="0" bIns="0">
+          <a:bodyPr wrap="square" lIns="0" tIns="0" rIns="0" bIns="0" anchor="t">
             <a:spAutoFit/>
           </a:bodyPr>
           <a:lstStyle/>
@@ -10105,6 +10685,7 @@
           <a:lstStyle/>
           <a:p>
             <a:pPr algn="ctr"/>
+            <a:endParaRPr/>
           </a:p>
         </p:txBody>
       </p:sp>
@@ -10125,7 +10706,7 @@
           <a:noFill/>
         </p:spPr>
         <p:txBody>
-          <a:bodyPr wrap="square" anchor="ctr" lIns="0" rIns="0" tIns="0" bIns="0">
+          <a:bodyPr wrap="square" lIns="0" tIns="0" rIns="0" bIns="0" anchor="ctr">
             <a:spAutoFit/>
           </a:bodyPr>
           <a:lstStyle/>
@@ -10160,7 +10741,7 @@
           <a:noFill/>
         </p:spPr>
         <p:txBody>
-          <a:bodyPr wrap="square" anchor="ctr" lIns="0" rIns="0" tIns="0" bIns="0">
+          <a:bodyPr wrap="square" lIns="0" tIns="0" rIns="0" bIns="0" anchor="ctr">
             <a:spAutoFit/>
           </a:bodyPr>
           <a:lstStyle/>
@@ -10195,7 +10776,7 @@
           <a:noFill/>
         </p:spPr>
         <p:txBody>
-          <a:bodyPr wrap="square" anchor="t" lIns="0" rIns="0" tIns="0" bIns="0">
+          <a:bodyPr wrap="square" lIns="0" tIns="0" rIns="0" bIns="0" anchor="t">
             <a:spAutoFit/>
           </a:bodyPr>
           <a:lstStyle/>
@@ -10253,6 +10834,7 @@
           <a:lstStyle/>
           <a:p>
             <a:pPr algn="ctr"/>
+            <a:endParaRPr/>
           </a:p>
         </p:txBody>
       </p:sp>
@@ -10273,7 +10855,7 @@
           <a:noFill/>
         </p:spPr>
         <p:txBody>
-          <a:bodyPr wrap="square" anchor="ctr" lIns="0" rIns="0" tIns="0" bIns="0">
+          <a:bodyPr wrap="square" lIns="0" tIns="0" rIns="0" bIns="0" anchor="ctr">
             <a:spAutoFit/>
           </a:bodyPr>
           <a:lstStyle/>
@@ -10308,7 +10890,7 @@
           <a:noFill/>
         </p:spPr>
         <p:txBody>
-          <a:bodyPr wrap="square" anchor="ctr" lIns="0" rIns="0" tIns="0" bIns="0">
+          <a:bodyPr wrap="square" lIns="0" tIns="0" rIns="0" bIns="0" anchor="ctr">
             <a:spAutoFit/>
           </a:bodyPr>
           <a:lstStyle/>
@@ -10343,7 +10925,7 @@
           <a:noFill/>
         </p:spPr>
         <p:txBody>
-          <a:bodyPr wrap="square" anchor="t" lIns="0" rIns="0" tIns="0" bIns="0">
+          <a:bodyPr wrap="square" lIns="0" tIns="0" rIns="0" bIns="0" anchor="t">
             <a:spAutoFit/>
           </a:bodyPr>
           <a:lstStyle/>
@@ -10401,6 +10983,7 @@
           <a:lstStyle/>
           <a:p>
             <a:pPr algn="ctr"/>
+            <a:endParaRPr/>
           </a:p>
         </p:txBody>
       </p:sp>
@@ -10421,7 +11004,7 @@
           <a:noFill/>
         </p:spPr>
         <p:txBody>
-          <a:bodyPr wrap="square" anchor="ctr" lIns="0" rIns="0" tIns="0" bIns="0">
+          <a:bodyPr wrap="square" lIns="0" tIns="0" rIns="0" bIns="0" anchor="ctr">
             <a:spAutoFit/>
           </a:bodyPr>
           <a:lstStyle/>
@@ -10456,7 +11039,7 @@
           <a:noFill/>
         </p:spPr>
         <p:txBody>
-          <a:bodyPr wrap="square" anchor="ctr" lIns="0" rIns="0" tIns="0" bIns="0">
+          <a:bodyPr wrap="square" lIns="0" tIns="0" rIns="0" bIns="0" anchor="ctr">
             <a:spAutoFit/>
           </a:bodyPr>
           <a:lstStyle/>
@@ -10491,7 +11074,7 @@
           <a:noFill/>
         </p:spPr>
         <p:txBody>
-          <a:bodyPr wrap="square" anchor="t" lIns="0" rIns="0" tIns="0" bIns="0">
+          <a:bodyPr wrap="square" lIns="0" tIns="0" rIns="0" bIns="0" anchor="t">
             <a:spAutoFit/>
           </a:bodyPr>
           <a:lstStyle/>
@@ -10526,7 +11109,7 @@
           <a:noFill/>
         </p:spPr>
         <p:txBody>
-          <a:bodyPr wrap="square" anchor="ctr" lIns="0" rIns="0" tIns="0" bIns="0">
+          <a:bodyPr wrap="square" lIns="0" tIns="0" rIns="0" bIns="0" anchor="ctr">
             <a:spAutoFit/>
           </a:bodyPr>
           <a:lstStyle/>
@@ -10553,7 +11136,7 @@
 </file>
 
 <file path=ppt/slides/slide4.xml><?xml version="1.0" encoding="utf-8"?>
-<p:sld xmlns:a="http://schemas.openxmlformats.org/drawingml/2006/main" xmlns:p="http://schemas.openxmlformats.org/presentationml/2006/main" xmlns:r="http://schemas.openxmlformats.org/officeDocument/2006/relationships">
+<p:sld xmlns:a="http://schemas.openxmlformats.org/drawingml/2006/main" xmlns:r="http://schemas.openxmlformats.org/officeDocument/2006/relationships" xmlns:p="http://schemas.openxmlformats.org/presentationml/2006/main">
   <p:cSld>
     <p:bg>
       <p:bgPr>
@@ -10569,7 +11152,14 @@
         <p:cNvGrpSpPr/>
         <p:nvPr/>
       </p:nvGrpSpPr>
-      <p:grpSpPr/>
+      <p:grpSpPr>
+        <a:xfrm>
+          <a:off x="0" y="0"/>
+          <a:ext cx="0" cy="0"/>
+          <a:chOff x="0" y="0"/>
+          <a:chExt cx="0" cy="0"/>
+        </a:xfrm>
+      </p:grpSpPr>
       <p:sp>
         <p:nvSpPr>
           <p:cNvPr id="2" name="Rectangle 1"/>
@@ -10610,6 +11200,7 @@
           <a:lstStyle/>
           <a:p>
             <a:pPr algn="ctr"/>
+            <a:endParaRPr/>
           </a:p>
         </p:txBody>
       </p:sp>
@@ -10653,6 +11244,7 @@
           <a:lstStyle/>
           <a:p>
             <a:pPr algn="ctr"/>
+            <a:endParaRPr/>
           </a:p>
         </p:txBody>
       </p:sp>
@@ -10696,6 +11288,7 @@
           <a:lstStyle/>
           <a:p>
             <a:pPr algn="ctr"/>
+            <a:endParaRPr/>
           </a:p>
         </p:txBody>
       </p:sp>
@@ -10716,7 +11309,7 @@
           <a:noFill/>
         </p:spPr>
         <p:txBody>
-          <a:bodyPr wrap="square" anchor="ctr" lIns="0" rIns="0" tIns="0" bIns="0">
+          <a:bodyPr wrap="square" lIns="0" tIns="0" rIns="0" bIns="0" anchor="ctr">
             <a:spAutoFit/>
           </a:bodyPr>
           <a:lstStyle/>
@@ -10776,6 +11369,7 @@
           <a:lstStyle/>
           <a:p>
             <a:pPr algn="ctr"/>
+            <a:endParaRPr/>
           </a:p>
         </p:txBody>
       </p:sp>
@@ -10819,6 +11413,7 @@
           <a:lstStyle/>
           <a:p>
             <a:pPr algn="ctr"/>
+            <a:endParaRPr/>
           </a:p>
         </p:txBody>
       </p:sp>
@@ -10862,6 +11457,7 @@
           <a:lstStyle/>
           <a:p>
             <a:pPr algn="ctr"/>
+            <a:endParaRPr/>
           </a:p>
         </p:txBody>
       </p:sp>
@@ -10905,6 +11501,7 @@
           <a:lstStyle/>
           <a:p>
             <a:pPr algn="ctr"/>
+            <a:endParaRPr/>
           </a:p>
         </p:txBody>
       </p:sp>
@@ -10925,7 +11522,7 @@
           <a:noFill/>
         </p:spPr>
         <p:txBody>
-          <a:bodyPr wrap="square" anchor="ctr" lIns="0" rIns="0" tIns="0" bIns="0">
+          <a:bodyPr wrap="square" lIns="0" tIns="0" rIns="0" bIns="0" anchor="ctr">
             <a:spAutoFit/>
           </a:bodyPr>
           <a:lstStyle/>
@@ -10957,7 +11554,7 @@
           <a:noFill/>
         </p:spPr>
         <p:txBody>
-          <a:bodyPr wrap="square" anchor="ctr" lIns="0" rIns="0" tIns="0" bIns="0">
+          <a:bodyPr wrap="square" lIns="0" tIns="0" rIns="0" bIns="0" anchor="ctr">
             <a:spAutoFit/>
           </a:bodyPr>
           <a:lstStyle/>
@@ -11015,6 +11612,7 @@
           <a:lstStyle/>
           <a:p>
             <a:pPr algn="ctr"/>
+            <a:endParaRPr/>
           </a:p>
         </p:txBody>
       </p:sp>
@@ -11035,7 +11633,7 @@
           <a:noFill/>
         </p:spPr>
         <p:txBody>
-          <a:bodyPr wrap="square" anchor="t" lIns="0" rIns="0" tIns="0" bIns="0">
+          <a:bodyPr wrap="square" lIns="0" tIns="0" rIns="0" bIns="0" anchor="t">
             <a:spAutoFit/>
           </a:bodyPr>
           <a:lstStyle/>
@@ -11097,6 +11695,7 @@
           <a:lstStyle/>
           <a:p>
             <a:pPr algn="ctr"/>
+            <a:endParaRPr/>
           </a:p>
         </p:txBody>
       </p:sp>
@@ -11140,6 +11739,7 @@
           <a:lstStyle/>
           <a:p>
             <a:pPr algn="ctr"/>
+            <a:endParaRPr/>
           </a:p>
         </p:txBody>
       </p:sp>
@@ -11183,6 +11783,7 @@
           <a:lstStyle/>
           <a:p>
             <a:pPr algn="ctr"/>
+            <a:endParaRPr/>
           </a:p>
         </p:txBody>
       </p:sp>
@@ -11226,6 +11827,7 @@
           <a:lstStyle/>
           <a:p>
             <a:pPr algn="ctr"/>
+            <a:endParaRPr/>
           </a:p>
         </p:txBody>
       </p:sp>
@@ -11246,7 +11848,7 @@
           <a:noFill/>
         </p:spPr>
         <p:txBody>
-          <a:bodyPr wrap="square" anchor="ctr" lIns="0" rIns="0" tIns="0" bIns="0">
+          <a:bodyPr wrap="square" lIns="0" tIns="0" rIns="0" bIns="0" anchor="ctr">
             <a:spAutoFit/>
           </a:bodyPr>
           <a:lstStyle/>
@@ -11278,7 +11880,7 @@
           <a:noFill/>
         </p:spPr>
         <p:txBody>
-          <a:bodyPr wrap="square" anchor="ctr" lIns="0" rIns="0" tIns="0" bIns="0">
+          <a:bodyPr wrap="square" lIns="0" tIns="0" rIns="0" bIns="0" anchor="ctr">
             <a:spAutoFit/>
           </a:bodyPr>
           <a:lstStyle/>
@@ -11336,6 +11938,7 @@
           <a:lstStyle/>
           <a:p>
             <a:pPr algn="ctr"/>
+            <a:endParaRPr/>
           </a:p>
         </p:txBody>
       </p:sp>
@@ -11356,7 +11959,7 @@
           <a:noFill/>
         </p:spPr>
         <p:txBody>
-          <a:bodyPr wrap="square" anchor="t" lIns="0" rIns="0" tIns="0" bIns="0">
+          <a:bodyPr wrap="square" lIns="0" tIns="0" rIns="0" bIns="0" anchor="t">
             <a:spAutoFit/>
           </a:bodyPr>
           <a:lstStyle/>
@@ -11418,6 +12021,7 @@
           <a:lstStyle/>
           <a:p>
             <a:pPr algn="ctr"/>
+            <a:endParaRPr/>
           </a:p>
         </p:txBody>
       </p:sp>
@@ -11461,6 +12065,7 @@
           <a:lstStyle/>
           <a:p>
             <a:pPr algn="ctr"/>
+            <a:endParaRPr/>
           </a:p>
         </p:txBody>
       </p:sp>
@@ -11504,6 +12109,7 @@
           <a:lstStyle/>
           <a:p>
             <a:pPr algn="ctr"/>
+            <a:endParaRPr/>
           </a:p>
         </p:txBody>
       </p:sp>
@@ -11547,6 +12153,7 @@
           <a:lstStyle/>
           <a:p>
             <a:pPr algn="ctr"/>
+            <a:endParaRPr/>
           </a:p>
         </p:txBody>
       </p:sp>
@@ -11567,7 +12174,7 @@
           <a:noFill/>
         </p:spPr>
         <p:txBody>
-          <a:bodyPr wrap="square" anchor="ctr" lIns="0" rIns="0" tIns="0" bIns="0">
+          <a:bodyPr wrap="square" lIns="0" tIns="0" rIns="0" bIns="0" anchor="ctr">
             <a:spAutoFit/>
           </a:bodyPr>
           <a:lstStyle/>
@@ -11599,7 +12206,7 @@
           <a:noFill/>
         </p:spPr>
         <p:txBody>
-          <a:bodyPr wrap="square" anchor="ctr" lIns="0" rIns="0" tIns="0" bIns="0">
+          <a:bodyPr wrap="square" lIns="0" tIns="0" rIns="0" bIns="0" anchor="ctr">
             <a:spAutoFit/>
           </a:bodyPr>
           <a:lstStyle/>
@@ -11657,6 +12264,7 @@
           <a:lstStyle/>
           <a:p>
             <a:pPr algn="ctr"/>
+            <a:endParaRPr/>
           </a:p>
         </p:txBody>
       </p:sp>
@@ -11677,7 +12285,7 @@
           <a:noFill/>
         </p:spPr>
         <p:txBody>
-          <a:bodyPr wrap="square" anchor="t" lIns="0" rIns="0" tIns="0" bIns="0">
+          <a:bodyPr wrap="square" lIns="0" tIns="0" rIns="0" bIns="0" anchor="t">
             <a:spAutoFit/>
           </a:bodyPr>
           <a:lstStyle/>
@@ -11739,6 +12347,7 @@
           <a:lstStyle/>
           <a:p>
             <a:pPr algn="ctr"/>
+            <a:endParaRPr/>
           </a:p>
         </p:txBody>
       </p:sp>
@@ -11782,6 +12391,7 @@
           <a:lstStyle/>
           <a:p>
             <a:pPr algn="ctr"/>
+            <a:endParaRPr/>
           </a:p>
         </p:txBody>
       </p:sp>
@@ -11825,6 +12435,7 @@
           <a:lstStyle/>
           <a:p>
             <a:pPr algn="ctr"/>
+            <a:endParaRPr/>
           </a:p>
         </p:txBody>
       </p:sp>
@@ -11868,6 +12479,7 @@
           <a:lstStyle/>
           <a:p>
             <a:pPr algn="ctr"/>
+            <a:endParaRPr/>
           </a:p>
         </p:txBody>
       </p:sp>
@@ -11888,7 +12500,7 @@
           <a:noFill/>
         </p:spPr>
         <p:txBody>
-          <a:bodyPr wrap="square" anchor="ctr" lIns="0" rIns="0" tIns="0" bIns="0">
+          <a:bodyPr wrap="square" lIns="0" tIns="0" rIns="0" bIns="0" anchor="ctr">
             <a:spAutoFit/>
           </a:bodyPr>
           <a:lstStyle/>
@@ -11920,7 +12532,7 @@
           <a:noFill/>
         </p:spPr>
         <p:txBody>
-          <a:bodyPr wrap="square" anchor="ctr" lIns="0" rIns="0" tIns="0" bIns="0">
+          <a:bodyPr wrap="square" lIns="0" tIns="0" rIns="0" bIns="0" anchor="ctr">
             <a:spAutoFit/>
           </a:bodyPr>
           <a:lstStyle/>
@@ -11978,6 +12590,7 @@
           <a:lstStyle/>
           <a:p>
             <a:pPr algn="ctr"/>
+            <a:endParaRPr/>
           </a:p>
         </p:txBody>
       </p:sp>
@@ -11998,7 +12611,7 @@
           <a:noFill/>
         </p:spPr>
         <p:txBody>
-          <a:bodyPr wrap="square" anchor="t" lIns="0" rIns="0" tIns="0" bIns="0">
+          <a:bodyPr wrap="square" lIns="0" tIns="0" rIns="0" bIns="0" anchor="t">
             <a:spAutoFit/>
           </a:bodyPr>
           <a:lstStyle/>
@@ -12035,7 +12648,7 @@
           <a:noFill/>
         </p:spPr>
         <p:txBody>
-          <a:bodyPr wrap="square" anchor="ctr" lIns="0" rIns="0" tIns="0" bIns="0">
+          <a:bodyPr wrap="square" lIns="0" tIns="0" rIns="0" bIns="0" anchor="ctr">
             <a:spAutoFit/>
           </a:bodyPr>
           <a:lstStyle/>
@@ -12062,7 +12675,7 @@
 </file>
 
 <file path=ppt/slides/slide5.xml><?xml version="1.0" encoding="utf-8"?>
-<p:sld xmlns:a="http://schemas.openxmlformats.org/drawingml/2006/main" xmlns:p="http://schemas.openxmlformats.org/presentationml/2006/main" xmlns:r="http://schemas.openxmlformats.org/officeDocument/2006/relationships">
+<p:sld xmlns:a="http://schemas.openxmlformats.org/drawingml/2006/main" xmlns:r="http://schemas.openxmlformats.org/officeDocument/2006/relationships" xmlns:p="http://schemas.openxmlformats.org/presentationml/2006/main">
   <p:cSld>
     <p:bg>
       <p:bgPr>
@@ -12078,7 +12691,14 @@
         <p:cNvGrpSpPr/>
         <p:nvPr/>
       </p:nvGrpSpPr>
-      <p:grpSpPr/>
+      <p:grpSpPr>
+        <a:xfrm>
+          <a:off x="0" y="0"/>
+          <a:ext cx="0" cy="0"/>
+          <a:chOff x="0" y="0"/>
+          <a:chExt cx="0" cy="0"/>
+        </a:xfrm>
+      </p:grpSpPr>
       <p:sp>
         <p:nvSpPr>
           <p:cNvPr id="2" name="Rectangle 1"/>
@@ -12119,6 +12739,7 @@
           <a:lstStyle/>
           <a:p>
             <a:pPr algn="ctr"/>
+            <a:endParaRPr/>
           </a:p>
         </p:txBody>
       </p:sp>
@@ -12162,6 +12783,7 @@
           <a:lstStyle/>
           <a:p>
             <a:pPr algn="ctr"/>
+            <a:endParaRPr/>
           </a:p>
         </p:txBody>
       </p:sp>
@@ -12205,6 +12827,7 @@
           <a:lstStyle/>
           <a:p>
             <a:pPr algn="ctr"/>
+            <a:endParaRPr/>
           </a:p>
         </p:txBody>
       </p:sp>
@@ -12225,7 +12848,7 @@
           <a:noFill/>
         </p:spPr>
         <p:txBody>
-          <a:bodyPr wrap="square" anchor="ctr" lIns="0" rIns="0" tIns="0" bIns="0">
+          <a:bodyPr wrap="square" lIns="0" tIns="0" rIns="0" bIns="0" anchor="ctr">
             <a:spAutoFit/>
           </a:bodyPr>
           <a:lstStyle/>
@@ -12285,6 +12908,7 @@
           <a:lstStyle/>
           <a:p>
             <a:pPr algn="ctr"/>
+            <a:endParaRPr/>
           </a:p>
         </p:txBody>
       </p:sp>
@@ -12328,6 +12952,7 @@
           <a:lstStyle/>
           <a:p>
             <a:pPr algn="ctr"/>
+            <a:endParaRPr/>
           </a:p>
         </p:txBody>
       </p:sp>
@@ -12348,7 +12973,7 @@
           <a:noFill/>
         </p:spPr>
         <p:txBody>
-          <a:bodyPr wrap="square" anchor="ctr" lIns="0" rIns="0" tIns="0" bIns="0">
+          <a:bodyPr wrap="square" lIns="0" tIns="0" rIns="0" bIns="0" anchor="ctr">
             <a:spAutoFit/>
           </a:bodyPr>
           <a:lstStyle/>
@@ -12406,6 +13031,7 @@
           <a:lstStyle/>
           <a:p>
             <a:pPr algn="ctr"/>
+            <a:endParaRPr/>
           </a:p>
         </p:txBody>
       </p:sp>
@@ -12426,7 +13052,7 @@
           <a:noFill/>
         </p:spPr>
         <p:txBody>
-          <a:bodyPr wrap="square" anchor="t" lIns="0" rIns="0" tIns="0" bIns="0">
+          <a:bodyPr wrap="square" lIns="0" tIns="0" rIns="0" bIns="0" anchor="t">
             <a:spAutoFit/>
           </a:bodyPr>
           <a:lstStyle/>
@@ -12484,6 +13110,7 @@
           <a:lstStyle/>
           <a:p>
             <a:pPr algn="ctr"/>
+            <a:endParaRPr/>
           </a:p>
         </p:txBody>
       </p:sp>
@@ -12504,7 +13131,7 @@
           <a:noFill/>
         </p:spPr>
         <p:txBody>
-          <a:bodyPr wrap="square" anchor="ctr" lIns="0" rIns="0" tIns="0" bIns="0">
+          <a:bodyPr wrap="square" lIns="0" tIns="0" rIns="0" bIns="0" anchor="ctr">
             <a:spAutoFit/>
           </a:bodyPr>
           <a:lstStyle/>
@@ -12562,6 +13189,7 @@
           <a:lstStyle/>
           <a:p>
             <a:pPr algn="ctr"/>
+            <a:endParaRPr/>
           </a:p>
         </p:txBody>
       </p:sp>
@@ -12582,7 +13210,7 @@
           <a:noFill/>
         </p:spPr>
         <p:txBody>
-          <a:bodyPr wrap="square" anchor="ctr" lIns="0" rIns="0" tIns="0" bIns="0">
+          <a:bodyPr wrap="square" lIns="0" tIns="0" rIns="0" bIns="0" anchor="ctr">
             <a:spAutoFit/>
           </a:bodyPr>
           <a:lstStyle/>
@@ -12640,6 +13268,7 @@
           <a:lstStyle/>
           <a:p>
             <a:pPr algn="ctr"/>
+            <a:endParaRPr/>
           </a:p>
         </p:txBody>
       </p:sp>
@@ -12660,7 +13289,7 @@
           <a:noFill/>
         </p:spPr>
         <p:txBody>
-          <a:bodyPr wrap="square" anchor="ctr" lIns="0" rIns="0" tIns="0" bIns="0">
+          <a:bodyPr wrap="square" lIns="0" tIns="0" rIns="0" bIns="0" anchor="ctr">
             <a:spAutoFit/>
           </a:bodyPr>
           <a:lstStyle/>
@@ -12718,6 +13347,7 @@
           <a:lstStyle/>
           <a:p>
             <a:pPr algn="ctr"/>
+            <a:endParaRPr/>
           </a:p>
         </p:txBody>
       </p:sp>
@@ -12738,7 +13368,7 @@
           <a:noFill/>
         </p:spPr>
         <p:txBody>
-          <a:bodyPr wrap="square" anchor="ctr" lIns="0" rIns="0" tIns="0" bIns="0">
+          <a:bodyPr wrap="square" lIns="0" tIns="0" rIns="0" bIns="0" anchor="ctr">
             <a:spAutoFit/>
           </a:bodyPr>
           <a:lstStyle/>
@@ -12796,6 +13426,7 @@
           <a:lstStyle/>
           <a:p>
             <a:pPr algn="ctr"/>
+            <a:endParaRPr/>
           </a:p>
         </p:txBody>
       </p:sp>
@@ -12816,7 +13447,7 @@
           <a:noFill/>
         </p:spPr>
         <p:txBody>
-          <a:bodyPr wrap="square" anchor="ctr" lIns="0" rIns="0" tIns="0" bIns="0">
+          <a:bodyPr wrap="square" lIns="0" tIns="0" rIns="0" bIns="0" anchor="ctr">
             <a:spAutoFit/>
           </a:bodyPr>
           <a:lstStyle/>
@@ -12874,6 +13505,7 @@
           <a:lstStyle/>
           <a:p>
             <a:pPr algn="ctr"/>
+            <a:endParaRPr/>
           </a:p>
         </p:txBody>
       </p:sp>
@@ -12894,7 +13526,7 @@
           <a:noFill/>
         </p:spPr>
         <p:txBody>
-          <a:bodyPr wrap="square" anchor="ctr" lIns="0" rIns="0" tIns="0" bIns="0">
+          <a:bodyPr wrap="square" lIns="0" tIns="0" rIns="0" bIns="0" anchor="ctr">
             <a:spAutoFit/>
           </a:bodyPr>
           <a:lstStyle/>
@@ -12952,6 +13584,7 @@
           <a:lstStyle/>
           <a:p>
             <a:pPr algn="ctr"/>
+            <a:endParaRPr/>
           </a:p>
         </p:txBody>
       </p:sp>
@@ -12972,7 +13605,7 @@
           <a:noFill/>
         </p:spPr>
         <p:txBody>
-          <a:bodyPr wrap="square" anchor="ctr" lIns="0" rIns="0" tIns="0" bIns="0">
+          <a:bodyPr wrap="square" lIns="0" tIns="0" rIns="0" bIns="0" anchor="ctr">
             <a:spAutoFit/>
           </a:bodyPr>
           <a:lstStyle/>
@@ -13030,6 +13663,7 @@
           <a:lstStyle/>
           <a:p>
             <a:pPr algn="ctr"/>
+            <a:endParaRPr/>
           </a:p>
         </p:txBody>
       </p:sp>
@@ -13050,7 +13684,7 @@
           <a:noFill/>
         </p:spPr>
         <p:txBody>
-          <a:bodyPr wrap="square" anchor="ctr" lIns="0" rIns="0" tIns="0" bIns="0">
+          <a:bodyPr wrap="square" lIns="0" tIns="0" rIns="0" bIns="0" anchor="ctr">
             <a:spAutoFit/>
           </a:bodyPr>
           <a:lstStyle/>
@@ -13108,6 +13742,7 @@
           <a:lstStyle/>
           <a:p>
             <a:pPr algn="ctr"/>
+            <a:endParaRPr/>
           </a:p>
         </p:txBody>
       </p:sp>
@@ -13128,7 +13763,7 @@
           <a:noFill/>
         </p:spPr>
         <p:txBody>
-          <a:bodyPr wrap="square" anchor="ctr" lIns="0" rIns="0" tIns="0" bIns="0">
+          <a:bodyPr wrap="square" lIns="0" tIns="0" rIns="0" bIns="0" anchor="ctr">
             <a:spAutoFit/>
           </a:bodyPr>
           <a:lstStyle/>
@@ -13163,7 +13798,7 @@
           <a:noFill/>
         </p:spPr>
         <p:txBody>
-          <a:bodyPr wrap="square" anchor="ctr" lIns="0" rIns="0" tIns="0" bIns="0">
+          <a:bodyPr wrap="square" lIns="0" tIns="0" rIns="0" bIns="0" anchor="ctr">
             <a:spAutoFit/>
           </a:bodyPr>
           <a:lstStyle/>
@@ -13223,6 +13858,7 @@
           <a:lstStyle/>
           <a:p>
             <a:pPr algn="ctr"/>
+            <a:endParaRPr/>
           </a:p>
         </p:txBody>
       </p:sp>
@@ -13266,6 +13902,7 @@
           <a:lstStyle/>
           <a:p>
             <a:pPr algn="ctr"/>
+            <a:endParaRPr/>
           </a:p>
         </p:txBody>
       </p:sp>
@@ -13286,7 +13923,7 @@
           <a:noFill/>
         </p:spPr>
         <p:txBody>
-          <a:bodyPr wrap="square" anchor="ctr" lIns="0" rIns="0" tIns="0" bIns="0">
+          <a:bodyPr wrap="square" lIns="0" tIns="0" rIns="0" bIns="0" anchor="ctr">
             <a:spAutoFit/>
           </a:bodyPr>
           <a:lstStyle/>
@@ -13344,6 +13981,7 @@
           <a:lstStyle/>
           <a:p>
             <a:pPr algn="ctr"/>
+            <a:endParaRPr/>
           </a:p>
         </p:txBody>
       </p:sp>
@@ -13364,7 +14002,7 @@
           <a:noFill/>
         </p:spPr>
         <p:txBody>
-          <a:bodyPr wrap="square" anchor="t" lIns="0" rIns="0" tIns="0" bIns="0">
+          <a:bodyPr wrap="square" lIns="0" tIns="0" rIns="0" bIns="0" anchor="t">
             <a:spAutoFit/>
           </a:bodyPr>
           <a:lstStyle/>
@@ -13424,6 +14062,7 @@
           <a:lstStyle/>
           <a:p>
             <a:pPr algn="ctr"/>
+            <a:endParaRPr/>
           </a:p>
         </p:txBody>
       </p:sp>
@@ -13467,6 +14106,7 @@
           <a:lstStyle/>
           <a:p>
             <a:pPr algn="ctr"/>
+            <a:endParaRPr/>
           </a:p>
         </p:txBody>
       </p:sp>
@@ -13487,7 +14127,7 @@
           <a:noFill/>
         </p:spPr>
         <p:txBody>
-          <a:bodyPr wrap="square" anchor="ctr" lIns="0" rIns="0" tIns="0" bIns="0">
+          <a:bodyPr wrap="square" lIns="0" tIns="0" rIns="0" bIns="0" anchor="ctr">
             <a:spAutoFit/>
           </a:bodyPr>
           <a:lstStyle/>
@@ -13519,7 +14159,7 @@
           <a:noFill/>
         </p:spPr>
         <p:txBody>
-          <a:bodyPr wrap="square" anchor="ctr" lIns="0" rIns="0" tIns="0" bIns="0">
+          <a:bodyPr wrap="square" lIns="0" tIns="0" rIns="0" bIns="0" anchor="ctr">
             <a:spAutoFit/>
           </a:bodyPr>
           <a:lstStyle/>
@@ -13554,7 +14194,7 @@
           <a:noFill/>
         </p:spPr>
         <p:txBody>
-          <a:bodyPr wrap="square" anchor="ctr" lIns="0" rIns="0" tIns="0" bIns="0">
+          <a:bodyPr wrap="square" lIns="0" tIns="0" rIns="0" bIns="0" anchor="ctr">
             <a:spAutoFit/>
           </a:bodyPr>
           <a:lstStyle/>
@@ -13614,6 +14254,7 @@
           <a:lstStyle/>
           <a:p>
             <a:pPr algn="ctr"/>
+            <a:endParaRPr/>
           </a:p>
         </p:txBody>
       </p:sp>
@@ -13657,6 +14298,7 @@
           <a:lstStyle/>
           <a:p>
             <a:pPr algn="ctr"/>
+            <a:endParaRPr/>
           </a:p>
         </p:txBody>
       </p:sp>
@@ -13677,7 +14319,7 @@
           <a:noFill/>
         </p:spPr>
         <p:txBody>
-          <a:bodyPr wrap="square" anchor="ctr" lIns="0" rIns="0" tIns="0" bIns="0">
+          <a:bodyPr wrap="square" lIns="0" tIns="0" rIns="0" bIns="0" anchor="ctr">
             <a:spAutoFit/>
           </a:bodyPr>
           <a:lstStyle/>
@@ -13709,7 +14351,7 @@
           <a:noFill/>
         </p:spPr>
         <p:txBody>
-          <a:bodyPr wrap="square" anchor="ctr" lIns="0" rIns="0" tIns="0" bIns="0">
+          <a:bodyPr wrap="square" lIns="0" tIns="0" rIns="0" bIns="0" anchor="ctr">
             <a:spAutoFit/>
           </a:bodyPr>
           <a:lstStyle/>
@@ -13744,7 +14386,7 @@
           <a:noFill/>
         </p:spPr>
         <p:txBody>
-          <a:bodyPr wrap="square" anchor="ctr" lIns="0" rIns="0" tIns="0" bIns="0">
+          <a:bodyPr wrap="square" lIns="0" tIns="0" rIns="0" bIns="0" anchor="ctr">
             <a:spAutoFit/>
           </a:bodyPr>
           <a:lstStyle/>
@@ -13804,6 +14446,7 @@
           <a:lstStyle/>
           <a:p>
             <a:pPr algn="ctr"/>
+            <a:endParaRPr/>
           </a:p>
         </p:txBody>
       </p:sp>
@@ -13847,6 +14490,7 @@
           <a:lstStyle/>
           <a:p>
             <a:pPr algn="ctr"/>
+            <a:endParaRPr/>
           </a:p>
         </p:txBody>
       </p:sp>
@@ -13867,7 +14511,7 @@
           <a:noFill/>
         </p:spPr>
         <p:txBody>
-          <a:bodyPr wrap="square" anchor="ctr" lIns="0" rIns="0" tIns="0" bIns="0">
+          <a:bodyPr wrap="square" lIns="0" tIns="0" rIns="0" bIns="0" anchor="ctr">
             <a:spAutoFit/>
           </a:bodyPr>
           <a:lstStyle/>
@@ -13899,7 +14543,7 @@
           <a:noFill/>
         </p:spPr>
         <p:txBody>
-          <a:bodyPr wrap="square" anchor="ctr" lIns="0" rIns="0" tIns="0" bIns="0">
+          <a:bodyPr wrap="square" lIns="0" tIns="0" rIns="0" bIns="0" anchor="ctr">
             <a:spAutoFit/>
           </a:bodyPr>
           <a:lstStyle/>
@@ -13934,7 +14578,7 @@
           <a:noFill/>
         </p:spPr>
         <p:txBody>
-          <a:bodyPr wrap="square" anchor="ctr" lIns="0" rIns="0" tIns="0" bIns="0">
+          <a:bodyPr wrap="square" lIns="0" tIns="0" rIns="0" bIns="0" anchor="ctr">
             <a:spAutoFit/>
           </a:bodyPr>
           <a:lstStyle/>
@@ -13994,6 +14638,7 @@
           <a:lstStyle/>
           <a:p>
             <a:pPr algn="ctr"/>
+            <a:endParaRPr/>
           </a:p>
         </p:txBody>
       </p:sp>
@@ -14037,6 +14682,7 @@
           <a:lstStyle/>
           <a:p>
             <a:pPr algn="ctr"/>
+            <a:endParaRPr/>
           </a:p>
         </p:txBody>
       </p:sp>
@@ -14057,7 +14703,7 @@
           <a:noFill/>
         </p:spPr>
         <p:txBody>
-          <a:bodyPr wrap="square" anchor="ctr" lIns="0" rIns="0" tIns="0" bIns="0">
+          <a:bodyPr wrap="square" lIns="0" tIns="0" rIns="0" bIns="0" anchor="ctr">
             <a:spAutoFit/>
           </a:bodyPr>
           <a:lstStyle/>
@@ -14089,7 +14735,7 @@
           <a:noFill/>
         </p:spPr>
         <p:txBody>
-          <a:bodyPr wrap="square" anchor="ctr" lIns="0" rIns="0" tIns="0" bIns="0">
+          <a:bodyPr wrap="square" lIns="0" tIns="0" rIns="0" bIns="0" anchor="ctr">
             <a:spAutoFit/>
           </a:bodyPr>
           <a:lstStyle/>
@@ -14124,7 +14770,7 @@
           <a:noFill/>
         </p:spPr>
         <p:txBody>
-          <a:bodyPr wrap="square" anchor="ctr" lIns="0" rIns="0" tIns="0" bIns="0">
+          <a:bodyPr wrap="square" lIns="0" tIns="0" rIns="0" bIns="0" anchor="ctr">
             <a:spAutoFit/>
           </a:bodyPr>
           <a:lstStyle/>
@@ -14159,7 +14805,7 @@
           <a:noFill/>
         </p:spPr>
         <p:txBody>
-          <a:bodyPr wrap="square" anchor="ctr" lIns="0" rIns="0" tIns="0" bIns="0">
+          <a:bodyPr wrap="square" lIns="0" tIns="0" rIns="0" bIns="0" anchor="ctr">
             <a:spAutoFit/>
           </a:bodyPr>
           <a:lstStyle/>
@@ -14186,7 +14832,7 @@
 </file>
 
 <file path=ppt/slides/slide6.xml><?xml version="1.0" encoding="utf-8"?>
-<p:sld xmlns:a="http://schemas.openxmlformats.org/drawingml/2006/main" xmlns:p="http://schemas.openxmlformats.org/presentationml/2006/main" xmlns:r="http://schemas.openxmlformats.org/officeDocument/2006/relationships">
+<p:sld xmlns:a="http://schemas.openxmlformats.org/drawingml/2006/main" xmlns:r="http://schemas.openxmlformats.org/officeDocument/2006/relationships" xmlns:p="http://schemas.openxmlformats.org/presentationml/2006/main">
   <p:cSld>
     <p:bg>
       <p:bgPr>
@@ -14202,7 +14848,14 @@
         <p:cNvGrpSpPr/>
         <p:nvPr/>
       </p:nvGrpSpPr>
-      <p:grpSpPr/>
+      <p:grpSpPr>
+        <a:xfrm>
+          <a:off x="0" y="0"/>
+          <a:ext cx="0" cy="0"/>
+          <a:chOff x="0" y="0"/>
+          <a:chExt cx="0" cy="0"/>
+        </a:xfrm>
+      </p:grpSpPr>
       <p:sp>
         <p:nvSpPr>
           <p:cNvPr id="2" name="Rectangle 1"/>
@@ -14243,6 +14896,7 @@
           <a:lstStyle/>
           <a:p>
             <a:pPr algn="ctr"/>
+            <a:endParaRPr/>
           </a:p>
         </p:txBody>
       </p:sp>
@@ -14286,6 +14940,7 @@
           <a:lstStyle/>
           <a:p>
             <a:pPr algn="ctr"/>
+            <a:endParaRPr/>
           </a:p>
         </p:txBody>
       </p:sp>
@@ -14329,6 +14984,7 @@
           <a:lstStyle/>
           <a:p>
             <a:pPr algn="ctr"/>
+            <a:endParaRPr/>
           </a:p>
         </p:txBody>
       </p:sp>
@@ -14349,7 +15005,7 @@
           <a:noFill/>
         </p:spPr>
         <p:txBody>
-          <a:bodyPr wrap="square" anchor="ctr" lIns="0" rIns="0" tIns="0" bIns="0">
+          <a:bodyPr wrap="square" lIns="0" tIns="0" rIns="0" bIns="0" anchor="ctr">
             <a:spAutoFit/>
           </a:bodyPr>
           <a:lstStyle/>
@@ -14409,6 +15065,7 @@
           <a:lstStyle/>
           <a:p>
             <a:pPr algn="ctr"/>
+            <a:endParaRPr/>
           </a:p>
         </p:txBody>
       </p:sp>
@@ -14452,6 +15109,7 @@
           <a:lstStyle/>
           <a:p>
             <a:pPr algn="ctr"/>
+            <a:endParaRPr/>
           </a:p>
         </p:txBody>
       </p:sp>
@@ -14472,7 +15130,7 @@
           <a:noFill/>
         </p:spPr>
         <p:txBody>
-          <a:bodyPr wrap="square" anchor="ctr" lIns="0" rIns="0" tIns="0" bIns="0">
+          <a:bodyPr wrap="square" lIns="0" tIns="0" rIns="0" bIns="0" anchor="ctr">
             <a:spAutoFit/>
           </a:bodyPr>
           <a:lstStyle/>
@@ -14530,6 +15188,7 @@
           <a:lstStyle/>
           <a:p>
             <a:pPr algn="ctr"/>
+            <a:endParaRPr/>
           </a:p>
         </p:txBody>
       </p:sp>
@@ -14573,6 +15232,7 @@
           <a:lstStyle/>
           <a:p>
             <a:pPr algn="ctr"/>
+            <a:endParaRPr/>
           </a:p>
         </p:txBody>
       </p:sp>
@@ -14593,7 +15253,7 @@
           <a:noFill/>
         </p:spPr>
         <p:txBody>
-          <a:bodyPr wrap="square" anchor="ctr" lIns="0" rIns="0" tIns="0" bIns="0">
+          <a:bodyPr wrap="square" lIns="0" tIns="0" rIns="0" bIns="0" anchor="ctr">
             <a:spAutoFit/>
           </a:bodyPr>
           <a:lstStyle/>
@@ -14628,7 +15288,7 @@
           <a:noFill/>
         </p:spPr>
         <p:txBody>
-          <a:bodyPr wrap="square" anchor="ctr" lIns="0" rIns="0" tIns="0" bIns="0">
+          <a:bodyPr wrap="square" lIns="0" tIns="0" rIns="0" bIns="0" anchor="ctr">
             <a:spAutoFit/>
           </a:bodyPr>
           <a:lstStyle/>
@@ -14663,7 +15323,7 @@
           <a:noFill/>
         </p:spPr>
         <p:txBody>
-          <a:bodyPr wrap="square" anchor="ctr" lIns="0" rIns="0" tIns="0" bIns="0">
+          <a:bodyPr wrap="square" lIns="0" tIns="0" rIns="0" bIns="0" anchor="ctr">
             <a:spAutoFit/>
           </a:bodyPr>
           <a:lstStyle/>
@@ -14723,6 +15383,7 @@
           <a:lstStyle/>
           <a:p>
             <a:pPr algn="ctr"/>
+            <a:endParaRPr/>
           </a:p>
         </p:txBody>
       </p:sp>
@@ -14766,6 +15427,7 @@
           <a:lstStyle/>
           <a:p>
             <a:pPr algn="ctr"/>
+            <a:endParaRPr/>
           </a:p>
         </p:txBody>
       </p:sp>
@@ -14786,7 +15448,7 @@
           <a:noFill/>
         </p:spPr>
         <p:txBody>
-          <a:bodyPr wrap="square" anchor="ctr" lIns="0" rIns="0" tIns="0" bIns="0">
+          <a:bodyPr wrap="square" lIns="0" tIns="0" rIns="0" bIns="0" anchor="ctr">
             <a:spAutoFit/>
           </a:bodyPr>
           <a:lstStyle/>
@@ -14821,7 +15483,7 @@
           <a:noFill/>
         </p:spPr>
         <p:txBody>
-          <a:bodyPr wrap="square" anchor="ctr" lIns="0" rIns="0" tIns="0" bIns="0">
+          <a:bodyPr wrap="square" lIns="0" tIns="0" rIns="0" bIns="0" anchor="ctr">
             <a:spAutoFit/>
           </a:bodyPr>
           <a:lstStyle/>
@@ -14881,6 +15543,7 @@
           <a:lstStyle/>
           <a:p>
             <a:pPr algn="ctr"/>
+            <a:endParaRPr/>
           </a:p>
         </p:txBody>
       </p:sp>
@@ -14924,6 +15587,7 @@
           <a:lstStyle/>
           <a:p>
             <a:pPr algn="ctr"/>
+            <a:endParaRPr/>
           </a:p>
         </p:txBody>
       </p:sp>
@@ -14944,7 +15608,7 @@
           <a:noFill/>
         </p:spPr>
         <p:txBody>
-          <a:bodyPr wrap="square" anchor="ctr" lIns="0" rIns="0" tIns="0" bIns="0">
+          <a:bodyPr wrap="square" lIns="0" tIns="0" rIns="0" bIns="0" anchor="ctr">
             <a:spAutoFit/>
           </a:bodyPr>
           <a:lstStyle/>
@@ -14979,7 +15643,7 @@
           <a:noFill/>
         </p:spPr>
         <p:txBody>
-          <a:bodyPr wrap="square" anchor="ctr" lIns="0" rIns="0" tIns="0" bIns="0">
+          <a:bodyPr wrap="square" lIns="0" tIns="0" rIns="0" bIns="0" anchor="ctr">
             <a:spAutoFit/>
           </a:bodyPr>
           <a:lstStyle/>
@@ -15039,6 +15703,7 @@
           <a:lstStyle/>
           <a:p>
             <a:pPr algn="ctr"/>
+            <a:endParaRPr/>
           </a:p>
         </p:txBody>
       </p:sp>
@@ -15082,6 +15747,7 @@
           <a:lstStyle/>
           <a:p>
             <a:pPr algn="ctr"/>
+            <a:endParaRPr/>
           </a:p>
         </p:txBody>
       </p:sp>
@@ -15102,7 +15768,7 @@
           <a:noFill/>
         </p:spPr>
         <p:txBody>
-          <a:bodyPr wrap="square" anchor="ctr" lIns="0" rIns="0" tIns="0" bIns="0">
+          <a:bodyPr wrap="square" lIns="0" tIns="0" rIns="0" bIns="0" anchor="ctr">
             <a:spAutoFit/>
           </a:bodyPr>
           <a:lstStyle/>
@@ -15137,7 +15803,7 @@
           <a:noFill/>
         </p:spPr>
         <p:txBody>
-          <a:bodyPr wrap="square" anchor="ctr" lIns="0" rIns="0" tIns="0" bIns="0">
+          <a:bodyPr wrap="square" lIns="0" tIns="0" rIns="0" bIns="0" anchor="ctr">
             <a:spAutoFit/>
           </a:bodyPr>
           <a:lstStyle/>
@@ -15197,6 +15863,7 @@
           <a:lstStyle/>
           <a:p>
             <a:pPr algn="ctr"/>
+            <a:endParaRPr/>
           </a:p>
         </p:txBody>
       </p:sp>
@@ -15240,6 +15907,7 @@
           <a:lstStyle/>
           <a:p>
             <a:pPr algn="ctr"/>
+            <a:endParaRPr/>
           </a:p>
         </p:txBody>
       </p:sp>
@@ -15260,7 +15928,7 @@
           <a:noFill/>
         </p:spPr>
         <p:txBody>
-          <a:bodyPr wrap="square" anchor="ctr" lIns="0" rIns="0" tIns="0" bIns="0">
+          <a:bodyPr wrap="square" lIns="0" tIns="0" rIns="0" bIns="0" anchor="ctr">
             <a:spAutoFit/>
           </a:bodyPr>
           <a:lstStyle/>
@@ -15295,7 +15963,7 @@
           <a:noFill/>
         </p:spPr>
         <p:txBody>
-          <a:bodyPr wrap="square" anchor="ctr" lIns="0" rIns="0" tIns="0" bIns="0">
+          <a:bodyPr wrap="square" lIns="0" tIns="0" rIns="0" bIns="0" anchor="ctr">
             <a:spAutoFit/>
           </a:bodyPr>
           <a:lstStyle/>
@@ -15355,6 +16023,7 @@
           <a:lstStyle/>
           <a:p>
             <a:pPr algn="ctr"/>
+            <a:endParaRPr/>
           </a:p>
         </p:txBody>
       </p:sp>
@@ -15398,6 +16067,7 @@
           <a:lstStyle/>
           <a:p>
             <a:pPr algn="ctr"/>
+            <a:endParaRPr/>
           </a:p>
         </p:txBody>
       </p:sp>
@@ -15418,7 +16088,7 @@
           <a:noFill/>
         </p:spPr>
         <p:txBody>
-          <a:bodyPr wrap="square" anchor="ctr" lIns="0" rIns="0" tIns="0" bIns="0">
+          <a:bodyPr wrap="square" lIns="0" tIns="0" rIns="0" bIns="0" anchor="ctr">
             <a:spAutoFit/>
           </a:bodyPr>
           <a:lstStyle/>
@@ -15453,7 +16123,7 @@
           <a:noFill/>
         </p:spPr>
         <p:txBody>
-          <a:bodyPr wrap="square" anchor="ctr" lIns="0" rIns="0" tIns="0" bIns="0">
+          <a:bodyPr wrap="square" lIns="0" tIns="0" rIns="0" bIns="0" anchor="ctr">
             <a:spAutoFit/>
           </a:bodyPr>
           <a:lstStyle/>
@@ -15513,6 +16183,7 @@
           <a:lstStyle/>
           <a:p>
             <a:pPr algn="ctr"/>
+            <a:endParaRPr/>
           </a:p>
         </p:txBody>
       </p:sp>
@@ -15556,6 +16227,7 @@
           <a:lstStyle/>
           <a:p>
             <a:pPr algn="ctr"/>
+            <a:endParaRPr/>
           </a:p>
         </p:txBody>
       </p:sp>
@@ -15576,7 +16248,7 @@
           <a:noFill/>
         </p:spPr>
         <p:txBody>
-          <a:bodyPr wrap="square" anchor="ctr" lIns="0" rIns="0" tIns="0" bIns="0">
+          <a:bodyPr wrap="square" lIns="0" tIns="0" rIns="0" bIns="0" anchor="ctr">
             <a:spAutoFit/>
           </a:bodyPr>
           <a:lstStyle/>
@@ -15611,7 +16283,7 @@
           <a:noFill/>
         </p:spPr>
         <p:txBody>
-          <a:bodyPr wrap="square" anchor="ctr" lIns="0" rIns="0" tIns="0" bIns="0">
+          <a:bodyPr wrap="square" lIns="0" tIns="0" rIns="0" bIns="0" anchor="ctr">
             <a:spAutoFit/>
           </a:bodyPr>
           <a:lstStyle/>
@@ -15671,6 +16343,7 @@
           <a:lstStyle/>
           <a:p>
             <a:pPr algn="ctr"/>
+            <a:endParaRPr/>
           </a:p>
         </p:txBody>
       </p:sp>
@@ -15714,6 +16387,7 @@
           <a:lstStyle/>
           <a:p>
             <a:pPr algn="ctr"/>
+            <a:endParaRPr/>
           </a:p>
         </p:txBody>
       </p:sp>
@@ -15734,7 +16408,7 @@
           <a:noFill/>
         </p:spPr>
         <p:txBody>
-          <a:bodyPr wrap="square" anchor="ctr" lIns="0" rIns="0" tIns="0" bIns="0">
+          <a:bodyPr wrap="square" lIns="0" tIns="0" rIns="0" bIns="0" anchor="ctr">
             <a:spAutoFit/>
           </a:bodyPr>
           <a:lstStyle/>
@@ -15792,6 +16466,7 @@
           <a:lstStyle/>
           <a:p>
             <a:pPr algn="ctr"/>
+            <a:endParaRPr/>
           </a:p>
         </p:txBody>
       </p:sp>
@@ -15835,6 +16510,7 @@
           <a:lstStyle/>
           <a:p>
             <a:pPr algn="ctr"/>
+            <a:endParaRPr/>
           </a:p>
         </p:txBody>
       </p:sp>
@@ -15855,7 +16531,7 @@
           <a:noFill/>
         </p:spPr>
         <p:txBody>
-          <a:bodyPr wrap="square" anchor="ctr" lIns="0" rIns="0" tIns="0" bIns="0">
+          <a:bodyPr wrap="square" lIns="0" tIns="0" rIns="0" bIns="0" anchor="ctr">
             <a:spAutoFit/>
           </a:bodyPr>
           <a:lstStyle/>
@@ -15890,7 +16566,7 @@
           <a:noFill/>
         </p:spPr>
         <p:txBody>
-          <a:bodyPr wrap="square" anchor="ctr" lIns="0" rIns="0" tIns="0" bIns="0">
+          <a:bodyPr wrap="square" lIns="0" tIns="0" rIns="0" bIns="0" anchor="ctr">
             <a:spAutoFit/>
           </a:bodyPr>
           <a:lstStyle/>
@@ -15948,6 +16624,7 @@
           <a:lstStyle/>
           <a:p>
             <a:pPr algn="ctr"/>
+            <a:endParaRPr/>
           </a:p>
         </p:txBody>
       </p:sp>
@@ -15968,7 +16645,7 @@
           <a:noFill/>
         </p:spPr>
         <p:txBody>
-          <a:bodyPr wrap="square" anchor="t" lIns="0" rIns="0" tIns="0" bIns="0">
+          <a:bodyPr wrap="square" lIns="0" tIns="0" rIns="0" bIns="0" anchor="t">
             <a:spAutoFit/>
           </a:bodyPr>
           <a:lstStyle/>
@@ -16030,6 +16707,7 @@
           <a:lstStyle/>
           <a:p>
             <a:pPr algn="ctr"/>
+            <a:endParaRPr/>
           </a:p>
         </p:txBody>
       </p:sp>
@@ -16050,7 +16728,7 @@
           <a:noFill/>
         </p:spPr>
         <p:txBody>
-          <a:bodyPr wrap="square" anchor="ctr" lIns="0" rIns="0" tIns="0" bIns="0">
+          <a:bodyPr wrap="square" lIns="0" tIns="0" rIns="0" bIns="0" anchor="ctr">
             <a:spAutoFit/>
           </a:bodyPr>
           <a:lstStyle/>
@@ -16085,7 +16763,7 @@
           <a:noFill/>
         </p:spPr>
         <p:txBody>
-          <a:bodyPr wrap="square" anchor="ctr" lIns="0" rIns="0" tIns="0" bIns="0">
+          <a:bodyPr wrap="square" lIns="0" tIns="0" rIns="0" bIns="0" anchor="ctr">
             <a:spAutoFit/>
           </a:bodyPr>
           <a:lstStyle/>
@@ -16143,6 +16821,7 @@
           <a:lstStyle/>
           <a:p>
             <a:pPr algn="ctr"/>
+            <a:endParaRPr/>
           </a:p>
         </p:txBody>
       </p:sp>
@@ -16163,7 +16842,7 @@
           <a:noFill/>
         </p:spPr>
         <p:txBody>
-          <a:bodyPr wrap="square" anchor="t" lIns="0" rIns="0" tIns="0" bIns="0">
+          <a:bodyPr wrap="square" lIns="0" tIns="0" rIns="0" bIns="0" anchor="t">
             <a:spAutoFit/>
           </a:bodyPr>
           <a:lstStyle/>
@@ -16222,6 +16901,7 @@
           <a:lstStyle/>
           <a:p>
             <a:pPr algn="ctr"/>
+            <a:endParaRPr/>
           </a:p>
         </p:txBody>
       </p:sp>
@@ -16242,7 +16922,7 @@
           <a:noFill/>
         </p:spPr>
         <p:txBody>
-          <a:bodyPr wrap="square" anchor="ctr" lIns="0" rIns="0" tIns="0" bIns="0">
+          <a:bodyPr wrap="square" lIns="0" tIns="0" rIns="0" bIns="0" anchor="ctr">
             <a:spAutoFit/>
           </a:bodyPr>
           <a:lstStyle/>
@@ -16277,7 +16957,7 @@
           <a:noFill/>
         </p:spPr>
         <p:txBody>
-          <a:bodyPr wrap="square" anchor="ctr" lIns="0" rIns="0" tIns="0" bIns="0">
+          <a:bodyPr wrap="square" lIns="0" tIns="0" rIns="0" bIns="0" anchor="ctr">
             <a:spAutoFit/>
           </a:bodyPr>
           <a:lstStyle/>
@@ -16335,6 +17015,7 @@
           <a:lstStyle/>
           <a:p>
             <a:pPr algn="ctr"/>
+            <a:endParaRPr/>
           </a:p>
         </p:txBody>
       </p:sp>
@@ -16355,7 +17036,7 @@
           <a:noFill/>
         </p:spPr>
         <p:txBody>
-          <a:bodyPr wrap="square" anchor="t" lIns="0" rIns="0" tIns="0" bIns="0">
+          <a:bodyPr wrap="square" lIns="0" tIns="0" rIns="0" bIns="0" anchor="t">
             <a:spAutoFit/>
           </a:bodyPr>
           <a:lstStyle/>
@@ -16391,7 +17072,7 @@
           <a:noFill/>
         </p:spPr>
         <p:txBody>
-          <a:bodyPr wrap="square" anchor="ctr" lIns="0" rIns="0" tIns="0" bIns="0">
+          <a:bodyPr wrap="square" lIns="0" tIns="0" rIns="0" bIns="0" anchor="ctr">
             <a:spAutoFit/>
           </a:bodyPr>
           <a:lstStyle/>
@@ -16418,7 +17099,7 @@
 </file>
 
 <file path=ppt/slides/slide7.xml><?xml version="1.0" encoding="utf-8"?>
-<p:sld xmlns:a="http://schemas.openxmlformats.org/drawingml/2006/main" xmlns:p="http://schemas.openxmlformats.org/presentationml/2006/main" xmlns:r="http://schemas.openxmlformats.org/officeDocument/2006/relationships">
+<p:sld xmlns:a="http://schemas.openxmlformats.org/drawingml/2006/main" xmlns:r="http://schemas.openxmlformats.org/officeDocument/2006/relationships" xmlns:p="http://schemas.openxmlformats.org/presentationml/2006/main">
   <p:cSld>
     <p:bg>
       <p:bgPr>
@@ -16434,7 +17115,14 @@
         <p:cNvGrpSpPr/>
         <p:nvPr/>
       </p:nvGrpSpPr>
-      <p:grpSpPr/>
+      <p:grpSpPr>
+        <a:xfrm>
+          <a:off x="0" y="0"/>
+          <a:ext cx="0" cy="0"/>
+          <a:chOff x="0" y="0"/>
+          <a:chExt cx="0" cy="0"/>
+        </a:xfrm>
+      </p:grpSpPr>
       <p:sp>
         <p:nvSpPr>
           <p:cNvPr id="2" name="Rectangle 1"/>
@@ -16475,6 +17163,7 @@
           <a:lstStyle/>
           <a:p>
             <a:pPr algn="ctr"/>
+            <a:endParaRPr/>
           </a:p>
         </p:txBody>
       </p:sp>
@@ -16518,6 +17207,7 @@
           <a:lstStyle/>
           <a:p>
             <a:pPr algn="ctr"/>
+            <a:endParaRPr/>
           </a:p>
         </p:txBody>
       </p:sp>
@@ -16561,6 +17251,7 @@
           <a:lstStyle/>
           <a:p>
             <a:pPr algn="ctr"/>
+            <a:endParaRPr/>
           </a:p>
         </p:txBody>
       </p:sp>
@@ -16572,30 +17263,36 @@
         </p:nvSpPr>
         <p:spPr>
           <a:xfrm>
-            <a:off x="256032" y="54864"/>
-            <a:ext cx="8595360" cy="475488"/>
-          </a:xfrm>
-          <a:prstGeom prst="rect">
-            <a:avLst/>
-          </a:prstGeom>
-          <a:noFill/>
-        </p:spPr>
-        <p:txBody>
-          <a:bodyPr wrap="square" anchor="ctr" lIns="0" rIns="0" tIns="0" bIns="0">
+            <a:off x="256032" y="138719"/>
+            <a:ext cx="8595360" cy="307777"/>
+          </a:xfrm>
+          <a:prstGeom prst="rect">
+            <a:avLst/>
+          </a:prstGeom>
+          <a:noFill/>
+        </p:spPr>
+        <p:txBody>
+          <a:bodyPr wrap="square" lIns="0" tIns="0" rIns="0" bIns="0" anchor="ctr">
             <a:spAutoFit/>
           </a:bodyPr>
           <a:lstStyle/>
           <a:p>
             <a:pPr algn="l"/>
             <a:r>
-              <a:rPr sz="2000" b="1" i="0">
+              <a:rPr sz="2000" b="1" i="0" dirty="0" err="1">
                 <a:solidFill>
                   <a:srgbClr val="2C3E35"/>
                 </a:solidFill>
                 <a:latin typeface="Meiryo"/>
               </a:rPr>
-              <a:t>リソース・追加機能</a:t>
-            </a:r>
+              <a:t>リソース機能</a:t>
+            </a:r>
+            <a:endParaRPr sz="2000" b="1" i="0" dirty="0">
+              <a:solidFill>
+                <a:srgbClr val="2C3E35"/>
+              </a:solidFill>
+              <a:latin typeface="Meiryo"/>
+            </a:endParaRPr>
           </a:p>
         </p:txBody>
       </p:sp>
@@ -16641,6 +17338,7 @@
           <a:lstStyle/>
           <a:p>
             <a:pPr algn="ctr"/>
+            <a:endParaRPr/>
           </a:p>
         </p:txBody>
       </p:sp>
@@ -16684,6 +17382,7 @@
           <a:lstStyle/>
           <a:p>
             <a:pPr algn="ctr"/>
+            <a:endParaRPr/>
           </a:p>
         </p:txBody>
       </p:sp>
@@ -16727,6 +17426,7 @@
           <a:lstStyle/>
           <a:p>
             <a:pPr algn="ctr"/>
+            <a:endParaRPr/>
           </a:p>
         </p:txBody>
       </p:sp>
@@ -16770,6 +17470,7 @@
           <a:lstStyle/>
           <a:p>
             <a:pPr algn="ctr"/>
+            <a:endParaRPr/>
           </a:p>
         </p:txBody>
       </p:sp>
@@ -16790,7 +17491,7 @@
           <a:noFill/>
         </p:spPr>
         <p:txBody>
-          <a:bodyPr wrap="square" anchor="ctr" lIns="0" rIns="0" tIns="0" bIns="0">
+          <a:bodyPr wrap="square" lIns="0" tIns="0" rIns="0" bIns="0" anchor="ctr">
             <a:spAutoFit/>
           </a:bodyPr>
           <a:lstStyle/>
@@ -16822,7 +17523,7 @@
           <a:noFill/>
         </p:spPr>
         <p:txBody>
-          <a:bodyPr wrap="square" anchor="ctr" lIns="0" rIns="0" tIns="0" bIns="0">
+          <a:bodyPr wrap="square" lIns="0" tIns="0" rIns="0" bIns="0" anchor="ctr">
             <a:spAutoFit/>
           </a:bodyPr>
           <a:lstStyle/>
@@ -16880,6 +17581,7 @@
           <a:lstStyle/>
           <a:p>
             <a:pPr algn="ctr"/>
+            <a:endParaRPr/>
           </a:p>
         </p:txBody>
       </p:sp>
@@ -16900,7 +17602,7 @@
           <a:noFill/>
         </p:spPr>
         <p:txBody>
-          <a:bodyPr wrap="square" anchor="t" lIns="0" rIns="0" tIns="0" bIns="0">
+          <a:bodyPr wrap="square" lIns="0" tIns="0" rIns="0" bIns="0" anchor="t">
             <a:spAutoFit/>
           </a:bodyPr>
           <a:lstStyle/>
@@ -16963,6 +17665,7 @@
           <a:lstStyle/>
           <a:p>
             <a:pPr algn="ctr"/>
+            <a:endParaRPr/>
           </a:p>
         </p:txBody>
       </p:sp>
@@ -17006,6 +17709,7 @@
           <a:lstStyle/>
           <a:p>
             <a:pPr algn="ctr"/>
+            <a:endParaRPr/>
           </a:p>
         </p:txBody>
       </p:sp>
@@ -17049,6 +17753,7 @@
           <a:lstStyle/>
           <a:p>
             <a:pPr algn="ctr"/>
+            <a:endParaRPr/>
           </a:p>
         </p:txBody>
       </p:sp>
@@ -17092,6 +17797,7 @@
           <a:lstStyle/>
           <a:p>
             <a:pPr algn="ctr"/>
+            <a:endParaRPr/>
           </a:p>
         </p:txBody>
       </p:sp>
@@ -17112,7 +17818,7 @@
           <a:noFill/>
         </p:spPr>
         <p:txBody>
-          <a:bodyPr wrap="square" anchor="ctr" lIns="0" rIns="0" tIns="0" bIns="0">
+          <a:bodyPr wrap="square" lIns="0" tIns="0" rIns="0" bIns="0" anchor="ctr">
             <a:spAutoFit/>
           </a:bodyPr>
           <a:lstStyle/>
@@ -17144,7 +17850,7 @@
           <a:noFill/>
         </p:spPr>
         <p:txBody>
-          <a:bodyPr wrap="square" anchor="ctr" lIns="0" rIns="0" tIns="0" bIns="0">
+          <a:bodyPr wrap="square" lIns="0" tIns="0" rIns="0" bIns="0" anchor="ctr">
             <a:spAutoFit/>
           </a:bodyPr>
           <a:lstStyle/>
@@ -17202,6 +17908,7 @@
           <a:lstStyle/>
           <a:p>
             <a:pPr algn="ctr"/>
+            <a:endParaRPr/>
           </a:p>
         </p:txBody>
       </p:sp>
@@ -17222,7 +17929,7 @@
           <a:noFill/>
         </p:spPr>
         <p:txBody>
-          <a:bodyPr wrap="square" anchor="t" lIns="0" rIns="0" tIns="0" bIns="0">
+          <a:bodyPr wrap="square" lIns="0" tIns="0" rIns="0" bIns="0" anchor="t">
             <a:spAutoFit/>
           </a:bodyPr>
           <a:lstStyle/>
@@ -17285,6 +17992,7 @@
           <a:lstStyle/>
           <a:p>
             <a:pPr algn="ctr"/>
+            <a:endParaRPr/>
           </a:p>
         </p:txBody>
       </p:sp>
@@ -17328,6 +18036,7 @@
           <a:lstStyle/>
           <a:p>
             <a:pPr algn="ctr"/>
+            <a:endParaRPr/>
           </a:p>
         </p:txBody>
       </p:sp>
@@ -17371,6 +18080,7 @@
           <a:lstStyle/>
           <a:p>
             <a:pPr algn="ctr"/>
+            <a:endParaRPr/>
           </a:p>
         </p:txBody>
       </p:sp>
@@ -17414,6 +18124,7 @@
           <a:lstStyle/>
           <a:p>
             <a:pPr algn="ctr"/>
+            <a:endParaRPr/>
           </a:p>
         </p:txBody>
       </p:sp>
@@ -17434,7 +18145,7 @@
           <a:noFill/>
         </p:spPr>
         <p:txBody>
-          <a:bodyPr wrap="square" anchor="ctr" lIns="0" rIns="0" tIns="0" bIns="0">
+          <a:bodyPr wrap="square" lIns="0" tIns="0" rIns="0" bIns="0" anchor="ctr">
             <a:spAutoFit/>
           </a:bodyPr>
           <a:lstStyle/>
@@ -17466,7 +18177,7 @@
           <a:noFill/>
         </p:spPr>
         <p:txBody>
-          <a:bodyPr wrap="square" anchor="ctr" lIns="0" rIns="0" tIns="0" bIns="0">
+          <a:bodyPr wrap="square" lIns="0" tIns="0" rIns="0" bIns="0" anchor="ctr">
             <a:spAutoFit/>
           </a:bodyPr>
           <a:lstStyle/>
@@ -17524,6 +18235,7 @@
           <a:lstStyle/>
           <a:p>
             <a:pPr algn="ctr"/>
+            <a:endParaRPr/>
           </a:p>
         </p:txBody>
       </p:sp>
@@ -17544,7 +18256,7 @@
           <a:noFill/>
         </p:spPr>
         <p:txBody>
-          <a:bodyPr wrap="square" anchor="t" lIns="0" rIns="0" tIns="0" bIns="0">
+          <a:bodyPr wrap="square" lIns="0" tIns="0" rIns="0" bIns="0" anchor="t">
             <a:spAutoFit/>
           </a:bodyPr>
           <a:lstStyle/>
@@ -17582,7 +18294,7 @@
           <a:noFill/>
         </p:spPr>
         <p:txBody>
-          <a:bodyPr wrap="square" anchor="ctr" lIns="0" rIns="0" tIns="0" bIns="0">
+          <a:bodyPr wrap="square" lIns="0" tIns="0" rIns="0" bIns="0" anchor="ctr">
             <a:spAutoFit/>
           </a:bodyPr>
           <a:lstStyle/>
@@ -17609,7 +18321,7 @@
 </file>
 
 <file path=ppt/slides/slide8.xml><?xml version="1.0" encoding="utf-8"?>
-<p:sld xmlns:a="http://schemas.openxmlformats.org/drawingml/2006/main" xmlns:p="http://schemas.openxmlformats.org/presentationml/2006/main" xmlns:r="http://schemas.openxmlformats.org/officeDocument/2006/relationships">
+<p:sld xmlns:a="http://schemas.openxmlformats.org/drawingml/2006/main" xmlns:r="http://schemas.openxmlformats.org/officeDocument/2006/relationships" xmlns:p="http://schemas.openxmlformats.org/presentationml/2006/main">
   <p:cSld>
     <p:bg>
       <p:bgPr>
@@ -17625,7 +18337,14 @@
         <p:cNvGrpSpPr/>
         <p:nvPr/>
       </p:nvGrpSpPr>
-      <p:grpSpPr/>
+      <p:grpSpPr>
+        <a:xfrm>
+          <a:off x="0" y="0"/>
+          <a:ext cx="0" cy="0"/>
+          <a:chOff x="0" y="0"/>
+          <a:chExt cx="0" cy="0"/>
+        </a:xfrm>
+      </p:grpSpPr>
       <p:sp>
         <p:nvSpPr>
           <p:cNvPr id="2" name="Rectangle 1"/>
@@ -17666,6 +18385,7 @@
           <a:lstStyle/>
           <a:p>
             <a:pPr algn="ctr"/>
+            <a:endParaRPr/>
           </a:p>
         </p:txBody>
       </p:sp>
@@ -17709,6 +18429,7 @@
           <a:lstStyle/>
           <a:p>
             <a:pPr algn="ctr"/>
+            <a:endParaRPr/>
           </a:p>
         </p:txBody>
       </p:sp>
@@ -17752,6 +18473,7 @@
           <a:lstStyle/>
           <a:p>
             <a:pPr algn="ctr"/>
+            <a:endParaRPr/>
           </a:p>
         </p:txBody>
       </p:sp>
@@ -17772,7 +18494,7 @@
           <a:noFill/>
         </p:spPr>
         <p:txBody>
-          <a:bodyPr wrap="square" anchor="ctr" lIns="0" rIns="0" tIns="0" bIns="0">
+          <a:bodyPr wrap="square" lIns="0" tIns="0" rIns="0" bIns="0" anchor="ctr">
             <a:spAutoFit/>
           </a:bodyPr>
           <a:lstStyle/>
@@ -17830,6 +18552,7 @@
           <a:lstStyle/>
           <a:p>
             <a:pPr algn="ctr"/>
+            <a:endParaRPr/>
           </a:p>
         </p:txBody>
       </p:sp>
@@ -17850,7 +18573,7 @@
           <a:noFill/>
         </p:spPr>
         <p:txBody>
-          <a:bodyPr wrap="square" anchor="ctr" lIns="0" rIns="0" tIns="0" bIns="0">
+          <a:bodyPr wrap="square" lIns="0" tIns="0" rIns="0" bIns="0" anchor="ctr">
             <a:spAutoFit/>
           </a:bodyPr>
           <a:lstStyle/>
@@ -17905,6 +18628,7 @@
           <a:lstStyle/>
           <a:p>
             <a:pPr algn="ctr"/>
+            <a:endParaRPr/>
           </a:p>
         </p:txBody>
       </p:sp>
@@ -17925,7 +18649,7 @@
           <a:noFill/>
         </p:spPr>
         <p:txBody>
-          <a:bodyPr wrap="square" anchor="ctr" lIns="0" rIns="0" tIns="0" bIns="0">
+          <a:bodyPr wrap="square" lIns="0" tIns="0" rIns="0" bIns="0" anchor="ctr">
             <a:spAutoFit/>
           </a:bodyPr>
           <a:lstStyle/>
@@ -17960,7 +18684,7 @@
           <a:noFill/>
         </p:spPr>
         <p:txBody>
-          <a:bodyPr wrap="square" anchor="t" lIns="0" rIns="0" tIns="0" bIns="0">
+          <a:bodyPr wrap="square" lIns="0" tIns="0" rIns="0" bIns="0" anchor="t">
             <a:spAutoFit/>
           </a:bodyPr>
           <a:lstStyle/>
@@ -17996,7 +18720,7 @@
           <a:noFill/>
         </p:spPr>
         <p:txBody>
-          <a:bodyPr wrap="square" anchor="ctr" lIns="0" rIns="0" tIns="0" bIns="0">
+          <a:bodyPr wrap="square" lIns="0" tIns="0" rIns="0" bIns="0" anchor="ctr">
             <a:spAutoFit/>
           </a:bodyPr>
           <a:lstStyle/>
@@ -18054,6 +18778,7 @@
           <a:lstStyle/>
           <a:p>
             <a:pPr algn="ctr"/>
+            <a:endParaRPr/>
           </a:p>
         </p:txBody>
       </p:sp>
@@ -18074,7 +18799,7 @@
           <a:noFill/>
         </p:spPr>
         <p:txBody>
-          <a:bodyPr wrap="square" anchor="ctr" lIns="0" rIns="0" tIns="0" bIns="0">
+          <a:bodyPr wrap="square" lIns="0" tIns="0" rIns="0" bIns="0" anchor="ctr">
             <a:spAutoFit/>
           </a:bodyPr>
           <a:lstStyle/>
@@ -18129,6 +18854,7 @@
           <a:lstStyle/>
           <a:p>
             <a:pPr algn="ctr"/>
+            <a:endParaRPr/>
           </a:p>
         </p:txBody>
       </p:sp>
@@ -18149,7 +18875,7 @@
           <a:noFill/>
         </p:spPr>
         <p:txBody>
-          <a:bodyPr wrap="square" anchor="ctr" lIns="0" rIns="0" tIns="0" bIns="0">
+          <a:bodyPr wrap="square" lIns="0" tIns="0" rIns="0" bIns="0" anchor="ctr">
             <a:spAutoFit/>
           </a:bodyPr>
           <a:lstStyle/>
@@ -18184,7 +18910,7 @@
           <a:noFill/>
         </p:spPr>
         <p:txBody>
-          <a:bodyPr wrap="square" anchor="t" lIns="0" rIns="0" tIns="0" bIns="0">
+          <a:bodyPr wrap="square" lIns="0" tIns="0" rIns="0" bIns="0" anchor="t">
             <a:spAutoFit/>
           </a:bodyPr>
           <a:lstStyle/>
@@ -18220,7 +18946,7 @@
           <a:noFill/>
         </p:spPr>
         <p:txBody>
-          <a:bodyPr wrap="square" anchor="ctr" lIns="0" rIns="0" tIns="0" bIns="0">
+          <a:bodyPr wrap="square" lIns="0" tIns="0" rIns="0" bIns="0" anchor="ctr">
             <a:spAutoFit/>
           </a:bodyPr>
           <a:lstStyle/>
@@ -18278,6 +19004,7 @@
           <a:lstStyle/>
           <a:p>
             <a:pPr algn="ctr"/>
+            <a:endParaRPr/>
           </a:p>
         </p:txBody>
       </p:sp>
@@ -18298,7 +19025,7 @@
           <a:noFill/>
         </p:spPr>
         <p:txBody>
-          <a:bodyPr wrap="square" anchor="ctr" lIns="0" rIns="0" tIns="0" bIns="0">
+          <a:bodyPr wrap="square" lIns="0" tIns="0" rIns="0" bIns="0" anchor="ctr">
             <a:spAutoFit/>
           </a:bodyPr>
           <a:lstStyle/>
@@ -18353,6 +19080,7 @@
           <a:lstStyle/>
           <a:p>
             <a:pPr algn="ctr"/>
+            <a:endParaRPr/>
           </a:p>
         </p:txBody>
       </p:sp>
@@ -18373,7 +19101,7 @@
           <a:noFill/>
         </p:spPr>
         <p:txBody>
-          <a:bodyPr wrap="square" anchor="ctr" lIns="0" rIns="0" tIns="0" bIns="0">
+          <a:bodyPr wrap="square" lIns="0" tIns="0" rIns="0" bIns="0" anchor="ctr">
             <a:spAutoFit/>
           </a:bodyPr>
           <a:lstStyle/>
@@ -18408,7 +19136,7 @@
           <a:noFill/>
         </p:spPr>
         <p:txBody>
-          <a:bodyPr wrap="square" anchor="t" lIns="0" rIns="0" tIns="0" bIns="0">
+          <a:bodyPr wrap="square" lIns="0" tIns="0" rIns="0" bIns="0" anchor="t">
             <a:spAutoFit/>
           </a:bodyPr>
           <a:lstStyle/>
@@ -18444,7 +19172,7 @@
           <a:noFill/>
         </p:spPr>
         <p:txBody>
-          <a:bodyPr wrap="square" anchor="ctr" lIns="0" rIns="0" tIns="0" bIns="0">
+          <a:bodyPr wrap="square" lIns="0" tIns="0" rIns="0" bIns="0" anchor="ctr">
             <a:spAutoFit/>
           </a:bodyPr>
           <a:lstStyle/>
@@ -18502,6 +19230,7 @@
           <a:lstStyle/>
           <a:p>
             <a:pPr algn="ctr"/>
+            <a:endParaRPr/>
           </a:p>
         </p:txBody>
       </p:sp>
@@ -18522,7 +19251,7 @@
           <a:noFill/>
         </p:spPr>
         <p:txBody>
-          <a:bodyPr wrap="square" anchor="ctr" lIns="0" rIns="0" tIns="0" bIns="0">
+          <a:bodyPr wrap="square" lIns="0" tIns="0" rIns="0" bIns="0" anchor="ctr">
             <a:spAutoFit/>
           </a:bodyPr>
           <a:lstStyle/>
@@ -18577,6 +19306,7 @@
           <a:lstStyle/>
           <a:p>
             <a:pPr algn="ctr"/>
+            <a:endParaRPr/>
           </a:p>
         </p:txBody>
       </p:sp>
@@ -18597,7 +19327,7 @@
           <a:noFill/>
         </p:spPr>
         <p:txBody>
-          <a:bodyPr wrap="square" anchor="ctr" lIns="0" rIns="0" tIns="0" bIns="0">
+          <a:bodyPr wrap="square" lIns="0" tIns="0" rIns="0" bIns="0" anchor="ctr">
             <a:spAutoFit/>
           </a:bodyPr>
           <a:lstStyle/>
@@ -18632,7 +19362,7 @@
           <a:noFill/>
         </p:spPr>
         <p:txBody>
-          <a:bodyPr wrap="square" anchor="t" lIns="0" rIns="0" tIns="0" bIns="0">
+          <a:bodyPr wrap="square" lIns="0" tIns="0" rIns="0" bIns="0" anchor="t">
             <a:spAutoFit/>
           </a:bodyPr>
           <a:lstStyle/>
@@ -18691,6 +19421,7 @@
           <a:lstStyle/>
           <a:p>
             <a:pPr algn="ctr"/>
+            <a:endParaRPr/>
           </a:p>
         </p:txBody>
       </p:sp>
@@ -18734,6 +19465,7 @@
           <a:lstStyle/>
           <a:p>
             <a:pPr algn="ctr"/>
+            <a:endParaRPr/>
           </a:p>
         </p:txBody>
       </p:sp>
@@ -18754,7 +19486,7 @@
           <a:noFill/>
         </p:spPr>
         <p:txBody>
-          <a:bodyPr wrap="square" anchor="ctr" lIns="0" rIns="0" tIns="0" bIns="0">
+          <a:bodyPr wrap="square" lIns="0" tIns="0" rIns="0" bIns="0" anchor="ctr">
             <a:spAutoFit/>
           </a:bodyPr>
           <a:lstStyle/>
@@ -18789,21 +19521,36 @@
           <a:noFill/>
         </p:spPr>
         <p:txBody>
-          <a:bodyPr wrap="square" anchor="ctr" lIns="0" rIns="0" tIns="0" bIns="0">
-            <a:spAutoFit/>
-          </a:bodyPr>
-          <a:lstStyle/>
-          <a:p>
-            <a:pPr algn="ctr"/>
-            <a:r>
-              <a:rPr sz="1000" b="0" i="0">
+          <a:bodyPr wrap="square" lIns="0" tIns="0" rIns="0" bIns="0" anchor="ctr">
+            <a:spAutoFit/>
+          </a:bodyPr>
+          <a:lstStyle/>
+          <a:p>
+            <a:pPr algn="ctr"/>
+            <a:r>
+              <a:rPr sz="1000" b="0" i="0" dirty="0">
                 <a:solidFill>
                   <a:srgbClr val="ECEDE9"/>
                 </a:solidFill>
                 <a:latin typeface="Meiryo"/>
               </a:rPr>
-              <a:t>× 閉じる</a:t>
-            </a:r>
+              <a:t>× </a:t>
+            </a:r>
+            <a:r>
+              <a:rPr sz="1000" b="0" i="0" dirty="0" err="1">
+                <a:solidFill>
+                  <a:srgbClr val="ECEDE9"/>
+                </a:solidFill>
+                <a:latin typeface="Meiryo"/>
+              </a:rPr>
+              <a:t>閉じる</a:t>
+            </a:r>
+            <a:endParaRPr sz="1000" b="0" i="0" dirty="0">
+              <a:solidFill>
+                <a:srgbClr val="ECEDE9"/>
+              </a:solidFill>
+              <a:latin typeface="Meiryo"/>
+            </a:endParaRPr>
           </a:p>
         </p:txBody>
       </p:sp>
@@ -18824,7 +19571,7 @@
           <a:noFill/>
         </p:spPr>
         <p:txBody>
-          <a:bodyPr wrap="square" anchor="ctr" lIns="0" rIns="0" tIns="0" bIns="0">
+          <a:bodyPr wrap="square" lIns="0" tIns="0" rIns="0" bIns="0" anchor="ctr">
             <a:spAutoFit/>
           </a:bodyPr>
           <a:lstStyle/>
@@ -18882,6 +19629,7 @@
           <a:lstStyle/>
           <a:p>
             <a:pPr algn="ctr"/>
+            <a:endParaRPr/>
           </a:p>
         </p:txBody>
       </p:sp>
@@ -18902,7 +19650,7 @@
           <a:noFill/>
         </p:spPr>
         <p:txBody>
-          <a:bodyPr wrap="square" anchor="ctr" lIns="0" rIns="0" tIns="0" bIns="0">
+          <a:bodyPr wrap="square" lIns="0" tIns="0" rIns="0" bIns="0" anchor="ctr">
             <a:spAutoFit/>
           </a:bodyPr>
           <a:lstStyle/>
@@ -18937,7 +19685,7 @@
           <a:noFill/>
         </p:spPr>
         <p:txBody>
-          <a:bodyPr wrap="square" anchor="ctr" lIns="0" rIns="0" tIns="0" bIns="0">
+          <a:bodyPr wrap="square" lIns="0" tIns="0" rIns="0" bIns="0" anchor="ctr">
             <a:spAutoFit/>
           </a:bodyPr>
           <a:lstStyle/>
@@ -18995,6 +19743,7 @@
           <a:lstStyle/>
           <a:p>
             <a:pPr algn="ctr"/>
+            <a:endParaRPr/>
           </a:p>
         </p:txBody>
       </p:sp>
@@ -19015,7 +19764,7 @@
           <a:noFill/>
         </p:spPr>
         <p:txBody>
-          <a:bodyPr wrap="square" anchor="ctr" lIns="0" rIns="0" tIns="0" bIns="0">
+          <a:bodyPr wrap="square" lIns="0" tIns="0" rIns="0" bIns="0" anchor="ctr">
             <a:spAutoFit/>
           </a:bodyPr>
           <a:lstStyle/>
@@ -19041,29 +19790,47 @@
         </p:nvSpPr>
         <p:spPr>
           <a:xfrm>
-            <a:off x="713232" y="4389120"/>
-            <a:ext cx="7955279" cy="292608"/>
-          </a:xfrm>
-          <a:prstGeom prst="rect">
-            <a:avLst/>
-          </a:prstGeom>
-          <a:noFill/>
-        </p:spPr>
-        <p:txBody>
-          <a:bodyPr wrap="square" anchor="ctr" lIns="0" rIns="0" tIns="0" bIns="0">
+            <a:off x="713232" y="4450785"/>
+            <a:ext cx="7955279" cy="169277"/>
+          </a:xfrm>
+          <a:prstGeom prst="rect">
+            <a:avLst/>
+          </a:prstGeom>
+          <a:noFill/>
+        </p:spPr>
+        <p:txBody>
+          <a:bodyPr wrap="square" lIns="0" tIns="0" rIns="0" bIns="0" anchor="ctr">
             <a:spAutoFit/>
           </a:bodyPr>
           <a:lstStyle/>
           <a:p>
             <a:pPr algn="l"/>
             <a:r>
-              <a:rPr sz="1100" b="0" i="0">
+              <a:rPr sz="1100" b="0" i="0" dirty="0">
                 <a:solidFill>
                   <a:srgbClr val="2E3D35"/>
                 </a:solidFill>
                 <a:latin typeface="Meiryo"/>
               </a:rPr>
-              <a:t>通知バナーは3秒後に自動で消えます</a:t>
+              <a:t>通知バナーは</a:t>
+            </a:r>
+            <a:r>
+              <a:rPr lang="en-US" altLang="ja-JP" sz="1100" b="0" i="0" dirty="0">
+                <a:solidFill>
+                  <a:srgbClr val="2E3D35"/>
+                </a:solidFill>
+                <a:latin typeface="Meiryo"/>
+              </a:rPr>
+              <a:t>5</a:t>
+            </a:r>
+            <a:r>
+              <a:rPr sz="1100" b="0" i="0" dirty="0">
+                <a:solidFill>
+                  <a:srgbClr val="2E3D35"/>
+                </a:solidFill>
+                <a:latin typeface="Meiryo"/>
+              </a:rPr>
+              <a:t>秒後に自動で消えます</a:t>
             </a:r>
           </a:p>
         </p:txBody>
@@ -19108,6 +19875,7 @@
           <a:lstStyle/>
           <a:p>
             <a:pPr algn="ctr"/>
+            <a:endParaRPr/>
           </a:p>
         </p:txBody>
       </p:sp>
@@ -19128,7 +19896,7 @@
           <a:noFill/>
         </p:spPr>
         <p:txBody>
-          <a:bodyPr wrap="square" anchor="ctr" lIns="0" rIns="0" tIns="0" bIns="0">
+          <a:bodyPr wrap="square" lIns="0" tIns="0" rIns="0" bIns="0" anchor="ctr">
             <a:spAutoFit/>
           </a:bodyPr>
           <a:lstStyle/>
@@ -19163,7 +19931,7 @@
           <a:noFill/>
         </p:spPr>
         <p:txBody>
-          <a:bodyPr wrap="square" anchor="ctr" lIns="0" rIns="0" tIns="0" bIns="0">
+          <a:bodyPr wrap="square" lIns="0" tIns="0" rIns="0" bIns="0" anchor="ctr">
             <a:spAutoFit/>
           </a:bodyPr>
           <a:lstStyle/>
@@ -19198,7 +19966,7 @@
           <a:noFill/>
         </p:spPr>
         <p:txBody>
-          <a:bodyPr wrap="square" anchor="ctr" lIns="0" rIns="0" tIns="0" bIns="0">
+          <a:bodyPr wrap="square" lIns="0" tIns="0" rIns="0" bIns="0" anchor="ctr">
             <a:spAutoFit/>
           </a:bodyPr>
           <a:lstStyle/>
@@ -19225,7 +19993,7 @@
 </file>
 
 <file path=ppt/slides/slide9.xml><?xml version="1.0" encoding="utf-8"?>
-<p:sld xmlns:a="http://schemas.openxmlformats.org/drawingml/2006/main" xmlns:p="http://schemas.openxmlformats.org/presentationml/2006/main" xmlns:r="http://schemas.openxmlformats.org/officeDocument/2006/relationships">
+<p:sld xmlns:a="http://schemas.openxmlformats.org/drawingml/2006/main" xmlns:r="http://schemas.openxmlformats.org/officeDocument/2006/relationships" xmlns:p="http://schemas.openxmlformats.org/presentationml/2006/main">
   <p:cSld>
     <p:bg>
       <p:bgPr>
@@ -19241,7 +20009,14 @@
         <p:cNvGrpSpPr/>
         <p:nvPr/>
       </p:nvGrpSpPr>
-      <p:grpSpPr/>
+      <p:grpSpPr>
+        <a:xfrm>
+          <a:off x="0" y="0"/>
+          <a:ext cx="0" cy="0"/>
+          <a:chOff x="0" y="0"/>
+          <a:chExt cx="0" cy="0"/>
+        </a:xfrm>
+      </p:grpSpPr>
       <p:sp>
         <p:nvSpPr>
           <p:cNvPr id="2" name="Rectangle 1"/>
@@ -19282,6 +20057,7 @@
           <a:lstStyle/>
           <a:p>
             <a:pPr algn="ctr"/>
+            <a:endParaRPr/>
           </a:p>
         </p:txBody>
       </p:sp>
@@ -19325,6 +20101,7 @@
           <a:lstStyle/>
           <a:p>
             <a:pPr algn="ctr"/>
+            <a:endParaRPr/>
           </a:p>
         </p:txBody>
       </p:sp>
@@ -19368,6 +20145,7 @@
           <a:lstStyle/>
           <a:p>
             <a:pPr algn="ctr"/>
+            <a:endParaRPr/>
           </a:p>
         </p:txBody>
       </p:sp>
@@ -19388,7 +20166,7 @@
           <a:noFill/>
         </p:spPr>
         <p:txBody>
-          <a:bodyPr wrap="square" anchor="ctr" lIns="0" rIns="0" tIns="0" bIns="0">
+          <a:bodyPr wrap="square" lIns="0" tIns="0" rIns="0" bIns="0" anchor="ctr">
             <a:spAutoFit/>
           </a:bodyPr>
           <a:lstStyle/>
@@ -19448,6 +20226,7 @@
           <a:lstStyle/>
           <a:p>
             <a:pPr algn="ctr"/>
+            <a:endParaRPr/>
           </a:p>
         </p:txBody>
       </p:sp>
@@ -19491,6 +20270,7 @@
           <a:lstStyle/>
           <a:p>
             <a:pPr algn="ctr"/>
+            <a:endParaRPr/>
           </a:p>
         </p:txBody>
       </p:sp>
@@ -19511,7 +20291,7 @@
           <a:noFill/>
         </p:spPr>
         <p:txBody>
-          <a:bodyPr wrap="square" anchor="ctr" lIns="0" rIns="0" tIns="0" bIns="0">
+          <a:bodyPr wrap="square" lIns="0" tIns="0" rIns="0" bIns="0" anchor="ctr">
             <a:spAutoFit/>
           </a:bodyPr>
           <a:lstStyle/>
@@ -19569,6 +20349,7 @@
           <a:lstStyle/>
           <a:p>
             <a:pPr algn="ctr"/>
+            <a:endParaRPr/>
           </a:p>
         </p:txBody>
       </p:sp>
@@ -19612,6 +20393,7 @@
           <a:lstStyle/>
           <a:p>
             <a:pPr algn="ctr"/>
+            <a:endParaRPr/>
           </a:p>
         </p:txBody>
       </p:sp>
@@ -19632,7 +20414,7 @@
           <a:noFill/>
         </p:spPr>
         <p:txBody>
-          <a:bodyPr wrap="square" anchor="ctr" lIns="0" rIns="0" tIns="0" bIns="0">
+          <a:bodyPr wrap="square" lIns="0" tIns="0" rIns="0" bIns="0" anchor="ctr">
             <a:spAutoFit/>
           </a:bodyPr>
           <a:lstStyle/>
@@ -19659,29 +20441,53 @@
         <p:spPr>
           <a:xfrm>
             <a:off x="877824" y="1152144"/>
-            <a:ext cx="2999232" cy="768096"/>
-          </a:xfrm>
-          <a:prstGeom prst="rect">
-            <a:avLst/>
-          </a:prstGeom>
-          <a:noFill/>
-        </p:spPr>
-        <p:txBody>
-          <a:bodyPr wrap="square" anchor="t" lIns="0" rIns="0" tIns="0" bIns="0">
+            <a:ext cx="2999232" cy="338554"/>
+          </a:xfrm>
+          <a:prstGeom prst="rect">
+            <a:avLst/>
+          </a:prstGeom>
+          <a:noFill/>
+        </p:spPr>
+        <p:txBody>
+          <a:bodyPr wrap="square" lIns="0" tIns="0" rIns="0" bIns="0" anchor="t">
             <a:spAutoFit/>
           </a:bodyPr>
           <a:lstStyle/>
           <a:p>
             <a:pPr algn="l"/>
             <a:r>
-              <a:rPr sz="1100" b="0" i="0">
+              <a:rPr sz="1100" b="0" i="0" dirty="0" err="1">
                 <a:solidFill>
                   <a:srgbClr val="5C7065"/>
                 </a:solidFill>
                 <a:latin typeface="Meiryo"/>
               </a:rPr>
-              <a:t>画面右上の「📋 更新履歴」ボタンをクリックします。</a:t>
-            </a:r>
+              <a:t>画面右上の</a:t>
+            </a:r>
+            <a:r>
+              <a:rPr sz="1100" b="0" i="0" dirty="0">
+                <a:solidFill>
+                  <a:srgbClr val="5C7065"/>
+                </a:solidFill>
+                <a:latin typeface="Meiryo"/>
+              </a:rPr>
+              <a:t>「📋 </a:t>
+            </a:r>
+            <a:r>
+              <a:rPr sz="1100" b="0" i="0" dirty="0" err="1">
+                <a:solidFill>
+                  <a:srgbClr val="5C7065"/>
+                </a:solidFill>
+                <a:latin typeface="Meiryo"/>
+              </a:rPr>
+              <a:t>更新履歴」ボタンをクリックします</a:t>
+            </a:r>
+            <a:endParaRPr sz="1100" b="0" i="0" dirty="0">
+              <a:solidFill>
+                <a:srgbClr val="5C7065"/>
+              </a:solidFill>
+              <a:latin typeface="Meiryo"/>
+            </a:endParaRPr>
           </a:p>
         </p:txBody>
       </p:sp>
@@ -19725,6 +20531,7 @@
           <a:lstStyle/>
           <a:p>
             <a:pPr algn="ctr"/>
+            <a:endParaRPr/>
           </a:p>
         </p:txBody>
       </p:sp>
@@ -19768,6 +20575,7 @@
           <a:lstStyle/>
           <a:p>
             <a:pPr algn="ctr"/>
+            <a:endParaRPr/>
           </a:p>
         </p:txBody>
       </p:sp>
@@ -19788,7 +20596,7 @@
           <a:noFill/>
         </p:spPr>
         <p:txBody>
-          <a:bodyPr wrap="square" anchor="ctr" lIns="0" rIns="0" tIns="0" bIns="0">
+          <a:bodyPr wrap="square" lIns="0" tIns="0" rIns="0" bIns="0" anchor="ctr">
             <a:spAutoFit/>
           </a:bodyPr>
           <a:lstStyle/>
@@ -19815,28 +20623,28 @@
         <p:spPr>
           <a:xfrm>
             <a:off x="877824" y="2048255"/>
-            <a:ext cx="2999232" cy="768096"/>
-          </a:xfrm>
-          <a:prstGeom prst="rect">
-            <a:avLst/>
-          </a:prstGeom>
-          <a:noFill/>
-        </p:spPr>
-        <p:txBody>
-          <a:bodyPr wrap="square" anchor="t" lIns="0" rIns="0" tIns="0" bIns="0">
+            <a:ext cx="2999232" cy="338554"/>
+          </a:xfrm>
+          <a:prstGeom prst="rect">
+            <a:avLst/>
+          </a:prstGeom>
+          <a:noFill/>
+        </p:spPr>
+        <p:txBody>
+          <a:bodyPr wrap="square" lIns="0" tIns="0" rIns="0" bIns="0" anchor="t">
             <a:spAutoFit/>
           </a:bodyPr>
           <a:lstStyle/>
           <a:p>
             <a:pPr algn="l"/>
             <a:r>
-              <a:rPr sz="1100" b="0" i="0">
+              <a:rPr sz="1100" b="0" i="0" dirty="0">
                 <a:solidFill>
                   <a:srgbClr val="5C7065"/>
                 </a:solidFill>
                 <a:latin typeface="Meiryo"/>
               </a:rPr>
-              <a:t>モーダルウィンドウが開き、過去1ヶ月の変更履歴が一覧表示されます。</a:t>
+              <a:t>モーダルウィンドウが開き、過去1ヶ月の変更履歴が一覧表示されます</a:t>
             </a:r>
           </a:p>
         </p:txBody>
@@ -19881,6 +20689,7 @@
           <a:lstStyle/>
           <a:p>
             <a:pPr algn="ctr"/>
+            <a:endParaRPr/>
           </a:p>
         </p:txBody>
       </p:sp>
@@ -19924,6 +20733,7 @@
           <a:lstStyle/>
           <a:p>
             <a:pPr algn="ctr"/>
+            <a:endParaRPr/>
           </a:p>
         </p:txBody>
       </p:sp>
@@ -19944,7 +20754,7 @@
           <a:noFill/>
         </p:spPr>
         <p:txBody>
-          <a:bodyPr wrap="square" anchor="ctr" lIns="0" rIns="0" tIns="0" bIns="0">
+          <a:bodyPr wrap="square" lIns="0" tIns="0" rIns="0" bIns="0" anchor="ctr">
             <a:spAutoFit/>
           </a:bodyPr>
           <a:lstStyle/>
@@ -19971,29 +20781,83 @@
         <p:spPr>
           <a:xfrm>
             <a:off x="877824" y="2944368"/>
-            <a:ext cx="2999232" cy="768096"/>
-          </a:xfrm>
-          <a:prstGeom prst="rect">
-            <a:avLst/>
-          </a:prstGeom>
-          <a:noFill/>
-        </p:spPr>
-        <p:txBody>
-          <a:bodyPr wrap="square" anchor="t" lIns="0" rIns="0" tIns="0" bIns="0">
+            <a:ext cx="2999232" cy="338554"/>
+          </a:xfrm>
+          <a:prstGeom prst="rect">
+            <a:avLst/>
+          </a:prstGeom>
+          <a:noFill/>
+        </p:spPr>
+        <p:txBody>
+          <a:bodyPr wrap="square" lIns="0" tIns="0" rIns="0" bIns="0" anchor="t">
             <a:spAutoFit/>
           </a:bodyPr>
           <a:lstStyle/>
           <a:p>
             <a:pPr algn="l"/>
             <a:r>
-              <a:rPr sz="1100" b="0" i="0">
+              <a:rPr sz="1100" b="0" i="0" dirty="0" err="1">
                 <a:solidFill>
                   <a:srgbClr val="5C7065"/>
                 </a:solidFill>
                 <a:latin typeface="Meiryo"/>
               </a:rPr>
-              <a:t>変更日時・工事番号・変更箇所・変更内容を確認できます。</a:t>
-            </a:r>
+              <a:t>変更日時・工事番号</a:t>
+            </a:r>
+            <a:r>
+              <a:rPr sz="1100" b="0" i="0" dirty="0">
+                <a:solidFill>
+                  <a:srgbClr val="5C7065"/>
+                </a:solidFill>
+                <a:latin typeface="Meiryo"/>
+              </a:rPr>
+              <a:t>・</a:t>
+            </a:r>
+            <a:r>
+              <a:rPr lang="ja-JP" altLang="en-US" sz="1100" b="0" i="0" dirty="0">
+                <a:solidFill>
+                  <a:srgbClr val="5C7065"/>
+                </a:solidFill>
+                <a:latin typeface="メイリオ" panose="020B0604030504040204" pitchFamily="50" charset="-128"/>
+                <a:ea typeface="メイリオ" panose="020B0604030504040204" pitchFamily="50" charset="-128"/>
+              </a:rPr>
+              <a:t>機械・ユニット・タスク名・</a:t>
+            </a:r>
+            <a:r>
+              <a:rPr sz="1100" b="0" i="0" dirty="0" err="1">
+                <a:solidFill>
+                  <a:srgbClr val="5C7065"/>
+                </a:solidFill>
+                <a:latin typeface="メイリオ" panose="020B0604030504040204" pitchFamily="50" charset="-128"/>
+                <a:ea typeface="メイリオ" panose="020B0604030504040204" pitchFamily="50" charset="-128"/>
+              </a:rPr>
+              <a:t>変更箇所・変更</a:t>
+            </a:r>
+            <a:r>
+              <a:rPr lang="ja-JP" altLang="en-US" sz="1100" b="0" i="0" dirty="0">
+                <a:solidFill>
+                  <a:srgbClr val="5C7065"/>
+                </a:solidFill>
+                <a:latin typeface="メイリオ" panose="020B0604030504040204" pitchFamily="50" charset="-128"/>
+                <a:ea typeface="メイリオ" panose="020B0604030504040204" pitchFamily="50" charset="-128"/>
+              </a:rPr>
+              <a:t>元・変更者</a:t>
+            </a:r>
+            <a:r>
+              <a:rPr sz="1100" b="0" i="0" dirty="0" err="1">
+                <a:solidFill>
+                  <a:srgbClr val="5C7065"/>
+                </a:solidFill>
+                <a:latin typeface="Meiryo"/>
+              </a:rPr>
+              <a:t>を確認できます</a:t>
+            </a:r>
+            <a:endParaRPr sz="1100" b="0" i="0" dirty="0">
+              <a:solidFill>
+                <a:srgbClr val="5C7065"/>
+              </a:solidFill>
+              <a:latin typeface="Meiryo"/>
+            </a:endParaRPr>
           </a:p>
         </p:txBody>
       </p:sp>
@@ -20037,6 +20901,7 @@
           <a:lstStyle/>
           <a:p>
             <a:pPr algn="ctr"/>
+            <a:endParaRPr/>
           </a:p>
         </p:txBody>
       </p:sp>
@@ -20080,6 +20945,7 @@
           <a:lstStyle/>
           <a:p>
             <a:pPr algn="ctr"/>
+            <a:endParaRPr/>
           </a:p>
         </p:txBody>
       </p:sp>
@@ -20100,7 +20966,7 @@
           <a:noFill/>
         </p:spPr>
         <p:txBody>
-          <a:bodyPr wrap="square" anchor="ctr" lIns="0" rIns="0" tIns="0" bIns="0">
+          <a:bodyPr wrap="square" lIns="0" tIns="0" rIns="0" bIns="0" anchor="ctr">
             <a:spAutoFit/>
           </a:bodyPr>
           <a:lstStyle/>
@@ -20127,29 +20993,53 @@
         <p:spPr>
           <a:xfrm>
             <a:off x="877824" y="3840479"/>
-            <a:ext cx="2999232" cy="768096"/>
-          </a:xfrm>
-          <a:prstGeom prst="rect">
-            <a:avLst/>
-          </a:prstGeom>
-          <a:noFill/>
-        </p:spPr>
-        <p:txBody>
-          <a:bodyPr wrap="square" anchor="t" lIns="0" rIns="0" tIns="0" bIns="0">
+            <a:ext cx="2999232" cy="338554"/>
+          </a:xfrm>
+          <a:prstGeom prst="rect">
+            <a:avLst/>
+          </a:prstGeom>
+          <a:noFill/>
+        </p:spPr>
+        <p:txBody>
+          <a:bodyPr wrap="square" lIns="0" tIns="0" rIns="0" bIns="0" anchor="t">
             <a:spAutoFit/>
           </a:bodyPr>
           <a:lstStyle/>
           <a:p>
             <a:pPr algn="l"/>
             <a:r>
-              <a:rPr sz="1100" b="0" i="0">
+              <a:rPr sz="1100" b="0" i="0" dirty="0" err="1">
                 <a:solidFill>
                   <a:srgbClr val="5C7065"/>
                 </a:solidFill>
                 <a:latin typeface="Meiryo"/>
               </a:rPr>
-              <a:t>モーダル外をクリックするか、右上の「✕」で閉じます。</a:t>
-            </a:r>
+              <a:t>モーダル外をクリックするか、右上の</a:t>
+            </a:r>
+            <a:r>
+              <a:rPr sz="1100" b="0" i="0" dirty="0">
+                <a:solidFill>
+                  <a:srgbClr val="5C7065"/>
+                </a:solidFill>
+                <a:latin typeface="Meiryo"/>
+              </a:rPr>
+              <a:t>「✕」</a:t>
+            </a:r>
+            <a:r>
+              <a:rPr sz="1100" b="0" i="0" dirty="0" err="1">
+                <a:solidFill>
+                  <a:srgbClr val="5C7065"/>
+                </a:solidFill>
+                <a:latin typeface="Meiryo"/>
+              </a:rPr>
+              <a:t>で閉じます</a:t>
+            </a:r>
+            <a:endParaRPr sz="1100" b="0" i="0" dirty="0">
+              <a:solidFill>
+                <a:srgbClr val="5C7065"/>
+              </a:solidFill>
+              <a:latin typeface="Meiryo"/>
+            </a:endParaRPr>
           </a:p>
         </p:txBody>
       </p:sp>
@@ -20195,6 +21085,7 @@
           <a:lstStyle/>
           <a:p>
             <a:pPr algn="ctr"/>
+            <a:endParaRPr/>
           </a:p>
         </p:txBody>
       </p:sp>
@@ -20238,6 +21129,7 @@
           <a:lstStyle/>
           <a:p>
             <a:pPr algn="ctr"/>
+            <a:endParaRPr/>
           </a:p>
         </p:txBody>
       </p:sp>
@@ -20258,7 +21150,7 @@
           <a:noFill/>
         </p:spPr>
         <p:txBody>
-          <a:bodyPr wrap="square" anchor="ctr" lIns="0" rIns="0" tIns="0" bIns="0">
+          <a:bodyPr wrap="square" lIns="0" tIns="0" rIns="0" bIns="0" anchor="ctr">
             <a:spAutoFit/>
           </a:bodyPr>
           <a:lstStyle/>
@@ -20316,6 +21208,7 @@
           <a:lstStyle/>
           <a:p>
             <a:pPr algn="ctr"/>
+            <a:endParaRPr/>
           </a:p>
         </p:txBody>
       </p:sp>
@@ -20361,6 +21254,7 @@
           <a:lstStyle/>
           <a:p>
             <a:pPr algn="ctr"/>
+            <a:endParaRPr/>
           </a:p>
         </p:txBody>
       </p:sp>
@@ -20381,7 +21275,7 @@
           <a:noFill/>
         </p:spPr>
         <p:txBody>
-          <a:bodyPr wrap="square" anchor="ctr" lIns="0" rIns="0" tIns="0" bIns="0">
+          <a:bodyPr wrap="square" lIns="0" tIns="0" rIns="0" bIns="0" anchor="ctr">
             <a:spAutoFit/>
           </a:bodyPr>
           <a:lstStyle/>
@@ -20441,6 +21335,7 @@
           <a:lstStyle/>
           <a:p>
             <a:pPr algn="ctr"/>
+            <a:endParaRPr/>
           </a:p>
         </p:txBody>
       </p:sp>
@@ -20461,7 +21356,7 @@
           <a:noFill/>
         </p:spPr>
         <p:txBody>
-          <a:bodyPr wrap="square" anchor="ctr" lIns="0" rIns="0" tIns="0" bIns="0">
+          <a:bodyPr wrap="square" lIns="0" tIns="0" rIns="0" bIns="0" anchor="ctr">
             <a:spAutoFit/>
           </a:bodyPr>
           <a:lstStyle/>
@@ -20521,6 +21416,7 @@
           <a:lstStyle/>
           <a:p>
             <a:pPr algn="ctr"/>
+            <a:endParaRPr/>
           </a:p>
         </p:txBody>
       </p:sp>
@@ -20541,7 +21437,7 @@
           <a:noFill/>
         </p:spPr>
         <p:txBody>
-          <a:bodyPr wrap="square" anchor="ctr" lIns="0" rIns="0" tIns="0" bIns="0">
+          <a:bodyPr wrap="square" lIns="0" tIns="0" rIns="0" bIns="0" anchor="ctr">
             <a:spAutoFit/>
           </a:bodyPr>
           <a:lstStyle/>
@@ -20601,6 +21497,7 @@
           <a:lstStyle/>
           <a:p>
             <a:pPr algn="ctr"/>
+            <a:endParaRPr/>
           </a:p>
         </p:txBody>
       </p:sp>
@@ -20621,7 +21518,7 @@
           <a:noFill/>
         </p:spPr>
         <p:txBody>
-          <a:bodyPr wrap="square" anchor="ctr" lIns="0" rIns="0" tIns="0" bIns="0">
+          <a:bodyPr wrap="square" lIns="0" tIns="0" rIns="0" bIns="0" anchor="ctr">
             <a:spAutoFit/>
           </a:bodyPr>
           <a:lstStyle/>
@@ -20681,6 +21578,7 @@
           <a:lstStyle/>
           <a:p>
             <a:pPr algn="ctr"/>
+            <a:endParaRPr/>
           </a:p>
         </p:txBody>
       </p:sp>
@@ -20701,7 +21599,7 @@
           <a:noFill/>
         </p:spPr>
         <p:txBody>
-          <a:bodyPr wrap="square" anchor="ctr" lIns="0" rIns="0" tIns="0" bIns="0">
+          <a:bodyPr wrap="square" lIns="0" tIns="0" rIns="0" bIns="0" anchor="ctr">
             <a:spAutoFit/>
           </a:bodyPr>
           <a:lstStyle/>
@@ -20761,6 +21659,7 @@
           <a:lstStyle/>
           <a:p>
             <a:pPr algn="ctr"/>
+            <a:endParaRPr/>
           </a:p>
         </p:txBody>
       </p:sp>
@@ -20781,7 +21680,7 @@
           <a:noFill/>
         </p:spPr>
         <p:txBody>
-          <a:bodyPr wrap="square" anchor="ctr" lIns="0" rIns="0" tIns="0" bIns="0">
+          <a:bodyPr wrap="square" lIns="0" tIns="0" rIns="0" bIns="0" anchor="ctr">
             <a:spAutoFit/>
           </a:bodyPr>
           <a:lstStyle/>
@@ -20841,6 +21740,7 @@
           <a:lstStyle/>
           <a:p>
             <a:pPr algn="ctr"/>
+            <a:endParaRPr/>
           </a:p>
         </p:txBody>
       </p:sp>
@@ -20861,7 +21761,7 @@
           <a:noFill/>
         </p:spPr>
         <p:txBody>
-          <a:bodyPr wrap="square" anchor="ctr" lIns="0" rIns="0" tIns="0" bIns="0">
+          <a:bodyPr wrap="square" lIns="0" tIns="0" rIns="0" bIns="0" anchor="ctr">
             <a:spAutoFit/>
           </a:bodyPr>
           <a:lstStyle/>
@@ -20921,6 +21821,7 @@
           <a:lstStyle/>
           <a:p>
             <a:pPr algn="ctr"/>
+            <a:endParaRPr/>
           </a:p>
         </p:txBody>
       </p:sp>
@@ -20941,7 +21842,7 @@
           <a:noFill/>
         </p:spPr>
         <p:txBody>
-          <a:bodyPr wrap="square" anchor="ctr" lIns="0" rIns="0" tIns="0" bIns="0">
+          <a:bodyPr wrap="square" lIns="0" tIns="0" rIns="0" bIns="0" anchor="ctr">
             <a:spAutoFit/>
           </a:bodyPr>
           <a:lstStyle/>
@@ -21001,6 +21902,7 @@
           <a:lstStyle/>
           <a:p>
             <a:pPr algn="ctr"/>
+            <a:endParaRPr/>
           </a:p>
         </p:txBody>
       </p:sp>
@@ -21021,7 +21923,7 @@
           <a:noFill/>
         </p:spPr>
         <p:txBody>
-          <a:bodyPr wrap="square" anchor="ctr" lIns="0" rIns="0" tIns="0" bIns="0">
+          <a:bodyPr wrap="square" lIns="0" tIns="0" rIns="0" bIns="0" anchor="ctr">
             <a:spAutoFit/>
           </a:bodyPr>
           <a:lstStyle/>
@@ -21081,6 +21983,7 @@
           <a:lstStyle/>
           <a:p>
             <a:pPr algn="ctr"/>
+            <a:endParaRPr/>
           </a:p>
         </p:txBody>
       </p:sp>
@@ -21101,7 +22004,7 @@
           <a:noFill/>
         </p:spPr>
         <p:txBody>
-          <a:bodyPr wrap="square" anchor="ctr" lIns="0" rIns="0" tIns="0" bIns="0">
+          <a:bodyPr wrap="square" lIns="0" tIns="0" rIns="0" bIns="0" anchor="ctr">
             <a:spAutoFit/>
           </a:bodyPr>
           <a:lstStyle/>
@@ -21161,6 +22064,7 @@
           <a:lstStyle/>
           <a:p>
             <a:pPr algn="ctr"/>
+            <a:endParaRPr/>
           </a:p>
         </p:txBody>
       </p:sp>
@@ -21181,7 +22085,7 @@
           <a:noFill/>
         </p:spPr>
         <p:txBody>
-          <a:bodyPr wrap="square" anchor="ctr" lIns="0" rIns="0" tIns="0" bIns="0">
+          <a:bodyPr wrap="square" lIns="0" tIns="0" rIns="0" bIns="0" anchor="ctr">
             <a:spAutoFit/>
           </a:bodyPr>
           <a:lstStyle/>
@@ -21241,6 +22145,7 @@
           <a:lstStyle/>
           <a:p>
             <a:pPr algn="ctr"/>
+            <a:endParaRPr/>
           </a:p>
         </p:txBody>
       </p:sp>
@@ -21261,7 +22166,7 @@
           <a:noFill/>
         </p:spPr>
         <p:txBody>
-          <a:bodyPr wrap="square" anchor="ctr" lIns="0" rIns="0" tIns="0" bIns="0">
+          <a:bodyPr wrap="square" lIns="0" tIns="0" rIns="0" bIns="0" anchor="ctr">
             <a:spAutoFit/>
           </a:bodyPr>
           <a:lstStyle/>
@@ -21321,6 +22226,7 @@
           <a:lstStyle/>
           <a:p>
             <a:pPr algn="ctr"/>
+            <a:endParaRPr/>
           </a:p>
         </p:txBody>
       </p:sp>
@@ -21341,7 +22247,7 @@
           <a:noFill/>
         </p:spPr>
         <p:txBody>
-          <a:bodyPr wrap="square" anchor="ctr" lIns="0" rIns="0" tIns="0" bIns="0">
+          <a:bodyPr wrap="square" lIns="0" tIns="0" rIns="0" bIns="0" anchor="ctr">
             <a:spAutoFit/>
           </a:bodyPr>
           <a:lstStyle/>
@@ -21401,6 +22307,7 @@
           <a:lstStyle/>
           <a:p>
             <a:pPr algn="ctr"/>
+            <a:endParaRPr/>
           </a:p>
         </p:txBody>
       </p:sp>
@@ -21421,7 +22328,7 @@
           <a:noFill/>
         </p:spPr>
         <p:txBody>
-          <a:bodyPr wrap="square" anchor="ctr" lIns="0" rIns="0" tIns="0" bIns="0">
+          <a:bodyPr wrap="square" lIns="0" tIns="0" rIns="0" bIns="0" anchor="ctr">
             <a:spAutoFit/>
           </a:bodyPr>
           <a:lstStyle/>
@@ -21481,6 +22388,7 @@
           <a:lstStyle/>
           <a:p>
             <a:pPr algn="ctr"/>
+            <a:endParaRPr/>
           </a:p>
         </p:txBody>
       </p:sp>
@@ -21501,7 +22409,7 @@
           <a:noFill/>
         </p:spPr>
         <p:txBody>
-          <a:bodyPr wrap="square" anchor="ctr" lIns="0" rIns="0" tIns="0" bIns="0">
+          <a:bodyPr wrap="square" lIns="0" tIns="0" rIns="0" bIns="0" anchor="ctr">
             <a:spAutoFit/>
           </a:bodyPr>
           <a:lstStyle/>
@@ -21561,6 +22469,7 @@
           <a:lstStyle/>
           <a:p>
             <a:pPr algn="ctr"/>
+            <a:endParaRPr/>
           </a:p>
         </p:txBody>
       </p:sp>
@@ -21581,7 +22490,7 @@
           <a:noFill/>
         </p:spPr>
         <p:txBody>
-          <a:bodyPr wrap="square" anchor="ctr" lIns="0" rIns="0" tIns="0" bIns="0">
+          <a:bodyPr wrap="square" lIns="0" tIns="0" rIns="0" bIns="0" anchor="ctr">
             <a:spAutoFit/>
           </a:bodyPr>
           <a:lstStyle/>
@@ -21641,6 +22550,7 @@
           <a:lstStyle/>
           <a:p>
             <a:pPr algn="ctr"/>
+            <a:endParaRPr/>
           </a:p>
         </p:txBody>
       </p:sp>
@@ -21661,7 +22571,7 @@
           <a:noFill/>
         </p:spPr>
         <p:txBody>
-          <a:bodyPr wrap="square" anchor="ctr" lIns="0" rIns="0" tIns="0" bIns="0">
+          <a:bodyPr wrap="square" lIns="0" tIns="0" rIns="0" bIns="0" anchor="ctr">
             <a:spAutoFit/>
           </a:bodyPr>
           <a:lstStyle/>
@@ -21721,6 +22631,7 @@
           <a:lstStyle/>
           <a:p>
             <a:pPr algn="ctr"/>
+            <a:endParaRPr/>
           </a:p>
         </p:txBody>
       </p:sp>
@@ -21741,7 +22652,7 @@
           <a:noFill/>
         </p:spPr>
         <p:txBody>
-          <a:bodyPr wrap="square" anchor="ctr" lIns="0" rIns="0" tIns="0" bIns="0">
+          <a:bodyPr wrap="square" lIns="0" tIns="0" rIns="0" bIns="0" anchor="ctr">
             <a:spAutoFit/>
           </a:bodyPr>
           <a:lstStyle/>
@@ -21801,6 +22712,7 @@
           <a:lstStyle/>
           <a:p>
             <a:pPr algn="ctr"/>
+            <a:endParaRPr/>
           </a:p>
         </p:txBody>
       </p:sp>
@@ -21821,7 +22733,7 @@
           <a:noFill/>
         </p:spPr>
         <p:txBody>
-          <a:bodyPr wrap="square" anchor="ctr" lIns="0" rIns="0" tIns="0" bIns="0">
+          <a:bodyPr wrap="square" lIns="0" tIns="0" rIns="0" bIns="0" anchor="ctr">
             <a:spAutoFit/>
           </a:bodyPr>
           <a:lstStyle/>
@@ -21881,6 +22793,7 @@
           <a:lstStyle/>
           <a:p>
             <a:pPr algn="ctr"/>
+            <a:endParaRPr/>
           </a:p>
         </p:txBody>
       </p:sp>
@@ -21901,7 +22814,7 @@
           <a:noFill/>
         </p:spPr>
         <p:txBody>
-          <a:bodyPr wrap="square" anchor="ctr" lIns="0" rIns="0" tIns="0" bIns="0">
+          <a:bodyPr wrap="square" lIns="0" tIns="0" rIns="0" bIns="0" anchor="ctr">
             <a:spAutoFit/>
           </a:bodyPr>
           <a:lstStyle/>
@@ -21961,6 +22874,7 @@
           <a:lstStyle/>
           <a:p>
             <a:pPr algn="ctr"/>
+            <a:endParaRPr/>
           </a:p>
         </p:txBody>
       </p:sp>
@@ -21981,7 +22895,7 @@
           <a:noFill/>
         </p:spPr>
         <p:txBody>
-          <a:bodyPr wrap="square" anchor="ctr" lIns="0" rIns="0" tIns="0" bIns="0">
+          <a:bodyPr wrap="square" lIns="0" tIns="0" rIns="0" bIns="0" anchor="ctr">
             <a:spAutoFit/>
           </a:bodyPr>
           <a:lstStyle/>
@@ -22016,7 +22930,7 @@
           <a:noFill/>
         </p:spPr>
         <p:txBody>
-          <a:bodyPr wrap="square" anchor="ctr" lIns="0" rIns="0" tIns="0" bIns="0">
+          <a:bodyPr wrap="square" lIns="0" tIns="0" rIns="0" bIns="0" anchor="ctr">
             <a:spAutoFit/>
           </a:bodyPr>
           <a:lstStyle/>
@@ -22360,4 +23274,319 @@
   </a:objectDefaults>
   <a:extraClrSchemeLst/>
 </a:theme>
+</file>
+
+<file path=ppt/theme/theme2.xml><?xml version="1.0" encoding="utf-8"?>
+<a:theme xmlns:a="http://schemas.openxmlformats.org/drawingml/2006/main" name="Office テーマ">
+  <a:themeElements>
+    <a:clrScheme name="Office">
+      <a:dk1>
+        <a:sysClr val="windowText" lastClr="000000"/>
+      </a:dk1>
+      <a:lt1>
+        <a:sysClr val="window" lastClr="FFFFFF"/>
+      </a:lt1>
+      <a:dk2>
+        <a:srgbClr val="0E2841"/>
+      </a:dk2>
+      <a:lt2>
+        <a:srgbClr val="E8E8E8"/>
+      </a:lt2>
+      <a:accent1>
+        <a:srgbClr val="156082"/>
+      </a:accent1>
+      <a:accent2>
+        <a:srgbClr val="E97132"/>
+      </a:accent2>
+      <a:accent3>
+        <a:srgbClr val="196B24"/>
+      </a:accent3>
+      <a:accent4>
+        <a:srgbClr val="0F9ED5"/>
+      </a:accent4>
+      <a:accent5>
+        <a:srgbClr val="A02B93"/>
+      </a:accent5>
+      <a:accent6>
+        <a:srgbClr val="4EA72E"/>
+      </a:accent6>
+      <a:hlink>
+        <a:srgbClr val="467886"/>
+      </a:hlink>
+      <a:folHlink>
+        <a:srgbClr val="96607D"/>
+      </a:folHlink>
+    </a:clrScheme>
+    <a:fontScheme name="Office">
+      <a:majorFont>
+        <a:latin typeface="游ゴシック Light" panose="02110004020202020204"/>
+        <a:ea typeface=""/>
+        <a:cs typeface=""/>
+        <a:font script="Jpan" typeface="游ゴシック Light"/>
+        <a:font script="Hang" typeface="맑은 고딕"/>
+        <a:font script="Hans" typeface="等线 Light"/>
+        <a:font script="Hant" typeface="新細明體"/>
+        <a:font script="Arab" typeface="Times New Roman"/>
+        <a:font script="Hebr" typeface="Times New Roman"/>
+        <a:font script="Thai" typeface="Angsana New"/>
+        <a:font script="Ethi" typeface="Nyala"/>
+        <a:font script="Beng" typeface="Vrinda"/>
+        <a:font script="Gujr" typeface="Shruti"/>
+        <a:font script="Khmr" typeface="MoolBoran"/>
+        <a:font script="Knda" typeface="Tunga"/>
+        <a:font script="Guru" typeface="Raavi"/>
+        <a:font script="Cans" typeface="Euphemia"/>
+        <a:font script="Cher" typeface="Plantagenet Cherokee"/>
+        <a:font script="Yiii" typeface="Microsoft Yi Baiti"/>
+        <a:font script="Tibt" typeface="Microsoft Himalaya"/>
+        <a:font script="Thaa" typeface="MV Boli"/>
+        <a:font script="Deva" typeface="Mangal"/>
+        <a:font script="Telu" typeface="Gautami"/>
+        <a:font script="Taml" typeface="Latha"/>
+        <a:font script="Syrc" typeface="Estrangelo Edessa"/>
+        <a:font script="Orya" typeface="Kalinga"/>
+        <a:font script="Mlym" typeface="Kartika"/>
+        <a:font script="Laoo" typeface="DokChampa"/>
+        <a:font script="Sinh" typeface="Iskoola Pota"/>
+        <a:font script="Mong" typeface="Mongolian Baiti"/>
+        <a:font script="Viet" typeface="Times New Roman"/>
+        <a:font script="Uigh" typeface="Microsoft Uighur"/>
+        <a:font script="Geor" typeface="Sylfaen"/>
+        <a:font script="Armn" typeface="Arial"/>
+        <a:font script="Bugi" typeface="Leelawadee UI"/>
+        <a:font script="Bopo" typeface="Microsoft JhengHei"/>
+        <a:font script="Java" typeface="Javanese Text"/>
+        <a:font script="Lisu" typeface="Segoe UI"/>
+        <a:font script="Mymr" typeface="Myanmar Text"/>
+        <a:font script="Nkoo" typeface="Ebrima"/>
+        <a:font script="Olck" typeface="Nirmala UI"/>
+        <a:font script="Osma" typeface="Ebrima"/>
+        <a:font script="Phag" typeface="Phagspa"/>
+        <a:font script="Syrn" typeface="Estrangelo Edessa"/>
+        <a:font script="Syrj" typeface="Estrangelo Edessa"/>
+        <a:font script="Syre" typeface="Estrangelo Edessa"/>
+        <a:font script="Sora" typeface="Nirmala UI"/>
+        <a:font script="Tale" typeface="Microsoft Tai Le"/>
+        <a:font script="Talu" typeface="Microsoft New Tai Lue"/>
+        <a:font script="Tfng" typeface="Ebrima"/>
+      </a:majorFont>
+      <a:minorFont>
+        <a:latin typeface="游ゴシック" panose="02110004020202020204"/>
+        <a:ea typeface=""/>
+        <a:cs typeface=""/>
+        <a:font script="Jpan" typeface="游ゴシック"/>
+        <a:font script="Hang" typeface="맑은 고딕"/>
+        <a:font script="Hans" typeface="等线"/>
+        <a:font script="Hant" typeface="新細明體"/>
+        <a:font script="Arab" typeface="Arial"/>
+        <a:font script="Hebr" typeface="Arial"/>
+        <a:font script="Thai" typeface="Cordia New"/>
+        <a:font script="Ethi" typeface="Nyala"/>
+        <a:font script="Beng" typeface="Vrinda"/>
+        <a:font script="Gujr" typeface="Shruti"/>
+        <a:font script="Khmr" typeface="DaunPenh"/>
+        <a:font script="Knda" typeface="Tunga"/>
+        <a:font script="Guru" typeface="Raavi"/>
+        <a:font script="Cans" typeface="Euphemia"/>
+        <a:font script="Cher" typeface="Plantagenet Cherokee"/>
+        <a:font script="Yiii" typeface="Microsoft Yi Baiti"/>
+        <a:font script="Tibt" typeface="Microsoft Himalaya"/>
+        <a:font script="Thaa" typeface="MV Boli"/>
+        <a:font script="Deva" typeface="Mangal"/>
+        <a:font script="Telu" typeface="Gautami"/>
+        <a:font script="Taml" typeface="Latha"/>
+        <a:font script="Syrc" typeface="Estrangelo Edessa"/>
+        <a:font script="Orya" typeface="Kalinga"/>
+        <a:font script="Mlym" typeface="Kartika"/>
+        <a:font script="Laoo" typeface="DokChampa"/>
+        <a:font script="Sinh" typeface="Iskoola Pota"/>
+        <a:font script="Mong" typeface="Mongolian Baiti"/>
+        <a:font script="Viet" typeface="Arial"/>
+        <a:font script="Uigh" typeface="Microsoft Uighur"/>
+        <a:font script="Geor" typeface="Sylfaen"/>
+        <a:font script="Armn" typeface="Arial"/>
+        <a:font script="Bugi" typeface="Leelawadee UI"/>
+        <a:font script="Bopo" typeface="Microsoft JhengHei"/>
+        <a:font script="Java" typeface="Javanese Text"/>
+        <a:font script="Lisu" typeface="Segoe UI"/>
+        <a:font script="Mymr" typeface="Myanmar Text"/>
+        <a:font script="Nkoo" typeface="Ebrima"/>
+        <a:font script="Olck" typeface="Nirmala UI"/>
+        <a:font script="Osma" typeface="Ebrima"/>
+        <a:font script="Phag" typeface="Phagspa"/>
+        <a:font script="Syrn" typeface="Estrangelo Edessa"/>
+        <a:font script="Syrj" typeface="Estrangelo Edessa"/>
+        <a:font script="Syre" typeface="Estrangelo Edessa"/>
+        <a:font script="Sora" typeface="Nirmala UI"/>
+        <a:font script="Tale" typeface="Microsoft Tai Le"/>
+        <a:font script="Talu" typeface="Microsoft New Tai Lue"/>
+        <a:font script="Tfng" typeface="Ebrima"/>
+      </a:minorFont>
+    </a:fontScheme>
+    <a:fmtScheme name="Office">
+      <a:fillStyleLst>
+        <a:solidFill>
+          <a:schemeClr val="phClr"/>
+        </a:solidFill>
+        <a:gradFill rotWithShape="1">
+          <a:gsLst>
+            <a:gs pos="0">
+              <a:schemeClr val="phClr">
+                <a:lumMod val="110000"/>
+                <a:satMod val="105000"/>
+                <a:tint val="67000"/>
+              </a:schemeClr>
+            </a:gs>
+            <a:gs pos="50000">
+              <a:schemeClr val="phClr">
+                <a:lumMod val="105000"/>
+                <a:satMod val="103000"/>
+                <a:tint val="73000"/>
+              </a:schemeClr>
+            </a:gs>
+            <a:gs pos="100000">
+              <a:schemeClr val="phClr">
+                <a:lumMod val="105000"/>
+                <a:satMod val="109000"/>
+                <a:tint val="81000"/>
+              </a:schemeClr>
+            </a:gs>
+          </a:gsLst>
+          <a:lin ang="5400000" scaled="0"/>
+        </a:gradFill>
+        <a:gradFill rotWithShape="1">
+          <a:gsLst>
+            <a:gs pos="0">
+              <a:schemeClr val="phClr">
+                <a:satMod val="103000"/>
+                <a:lumMod val="102000"/>
+                <a:tint val="94000"/>
+              </a:schemeClr>
+            </a:gs>
+            <a:gs pos="50000">
+              <a:schemeClr val="phClr">
+                <a:satMod val="110000"/>
+                <a:lumMod val="100000"/>
+                <a:shade val="100000"/>
+              </a:schemeClr>
+            </a:gs>
+            <a:gs pos="100000">
+              <a:schemeClr val="phClr">
+                <a:lumMod val="99000"/>
+                <a:satMod val="120000"/>
+                <a:shade val="78000"/>
+              </a:schemeClr>
+            </a:gs>
+          </a:gsLst>
+          <a:lin ang="5400000" scaled="0"/>
+        </a:gradFill>
+      </a:fillStyleLst>
+      <a:lnStyleLst>
+        <a:ln w="12700" cap="flat" cmpd="sng" algn="ctr">
+          <a:solidFill>
+            <a:schemeClr val="phClr"/>
+          </a:solidFill>
+          <a:prstDash val="solid"/>
+          <a:miter lim="800000"/>
+        </a:ln>
+        <a:ln w="19050" cap="flat" cmpd="sng" algn="ctr">
+          <a:solidFill>
+            <a:schemeClr val="phClr"/>
+          </a:solidFill>
+          <a:prstDash val="solid"/>
+          <a:miter lim="800000"/>
+        </a:ln>
+        <a:ln w="25400" cap="flat" cmpd="sng" algn="ctr">
+          <a:solidFill>
+            <a:schemeClr val="phClr"/>
+          </a:solidFill>
+          <a:prstDash val="solid"/>
+          <a:miter lim="800000"/>
+        </a:ln>
+      </a:lnStyleLst>
+      <a:effectStyleLst>
+        <a:effectStyle>
+          <a:effectLst/>
+        </a:effectStyle>
+        <a:effectStyle>
+          <a:effectLst/>
+        </a:effectStyle>
+        <a:effectStyle>
+          <a:effectLst>
+            <a:outerShdw blurRad="57150" dist="19050" dir="5400000" algn="ctr" rotWithShape="0">
+              <a:srgbClr val="000000">
+                <a:alpha val="63000"/>
+              </a:srgbClr>
+            </a:outerShdw>
+          </a:effectLst>
+        </a:effectStyle>
+      </a:effectStyleLst>
+      <a:bgFillStyleLst>
+        <a:solidFill>
+          <a:schemeClr val="phClr"/>
+        </a:solidFill>
+        <a:solidFill>
+          <a:schemeClr val="phClr">
+            <a:tint val="95000"/>
+            <a:satMod val="170000"/>
+          </a:schemeClr>
+        </a:solidFill>
+        <a:gradFill rotWithShape="1">
+          <a:gsLst>
+            <a:gs pos="0">
+              <a:schemeClr val="phClr">
+                <a:tint val="93000"/>
+                <a:satMod val="150000"/>
+                <a:shade val="98000"/>
+                <a:lumMod val="102000"/>
+              </a:schemeClr>
+            </a:gs>
+            <a:gs pos="50000">
+              <a:schemeClr val="phClr">
+                <a:tint val="98000"/>
+                <a:satMod val="130000"/>
+                <a:shade val="90000"/>
+                <a:lumMod val="103000"/>
+              </a:schemeClr>
+            </a:gs>
+            <a:gs pos="100000">
+              <a:schemeClr val="phClr">
+                <a:shade val="63000"/>
+                <a:satMod val="120000"/>
+              </a:schemeClr>
+            </a:gs>
+          </a:gsLst>
+          <a:lin ang="5400000" scaled="0"/>
+        </a:gradFill>
+      </a:bgFillStyleLst>
+    </a:fmtScheme>
+  </a:themeElements>
+  <a:objectDefaults>
+    <a:lnDef>
+      <a:spPr/>
+      <a:bodyPr/>
+      <a:lstStyle/>
+      <a:style>
+        <a:lnRef idx="2">
+          <a:schemeClr val="accent1"/>
+        </a:lnRef>
+        <a:fillRef idx="0">
+          <a:schemeClr val="accent1"/>
+        </a:fillRef>
+        <a:effectRef idx="1">
+          <a:schemeClr val="accent1"/>
+        </a:effectRef>
+        <a:fontRef idx="minor">
+          <a:schemeClr val="tx1"/>
+        </a:fontRef>
+      </a:style>
+    </a:lnDef>
+  </a:objectDefaults>
+  <a:extraClrSchemeLst/>
+  <a:extLst>
+    <a:ext uri="{05A4C25C-085E-4340-85A3-A5531E510DB2}">
+      <thm15:themeFamily xmlns:thm15="http://schemas.microsoft.com/office/thememl/2012/main" name="Office Theme" id="{2E142A2C-CD16-42D6-873A-C26D2A0506FA}" vid="{1BDDFF52-6CD6-40A5-AB3C-68EB2F1E4D0A}"/>
+    </a:ext>
+  </a:extLst>
+</a:theme>
 </file>
--- a/全体工程表_使い方ガイド（閲覧者向け）_new.pptx
+++ b/全体工程表_使い方ガイド（閲覧者向け）_new.pptx
@@ -18,6 +18,7 @@
     <p:sldId id="263" r:id="rId9"/>
     <p:sldId id="264" r:id="rId10"/>
     <p:sldId id="265" r:id="rId11"/>
+    <p:sldId id="266" r:id="rId17"/>
   </p:sldIdLst>
   <p:sldSz cx="9144000" cy="5143500" type="screen16x9"/>
   <p:notesSz cx="6858000" cy="9144000"/>
@@ -4142,7 +4143,7 @@
         </p:nvSpPr>
         <p:spPr>
           <a:xfrm>
-            <a:off x="6035040" y="1682496"/>
+            <a:off x="6035040" y="1603624"/>
             <a:ext cx="201168" cy="201168"/>
           </a:xfrm>
           <a:prstGeom prst="ellipse">
@@ -4186,7 +4187,7 @@
         </p:nvSpPr>
         <p:spPr>
           <a:xfrm>
-            <a:off x="6309360" y="1627632"/>
+            <a:off x="6309360" y="1548760"/>
             <a:ext cx="2651760" cy="502920"/>
           </a:xfrm>
           <a:prstGeom prst="rect">
@@ -4221,7 +4222,7 @@
         </p:nvSpPr>
         <p:spPr>
           <a:xfrm>
-            <a:off x="6035040" y="2304288"/>
+            <a:off x="6035040" y="2146544"/>
             <a:ext cx="201168" cy="201168"/>
           </a:xfrm>
           <a:prstGeom prst="ellipse">
@@ -4265,7 +4266,7 @@
         </p:nvSpPr>
         <p:spPr>
           <a:xfrm>
-            <a:off x="6309360" y="2249424"/>
+            <a:off x="6309360" y="2091680"/>
             <a:ext cx="2651760" cy="502920"/>
           </a:xfrm>
           <a:prstGeom prst="rect">
@@ -4300,7 +4301,7 @@
         </p:nvSpPr>
         <p:spPr>
           <a:xfrm>
-            <a:off x="6035040" y="2926080"/>
+            <a:off x="6035040" y="2689464"/>
             <a:ext cx="201168" cy="201168"/>
           </a:xfrm>
           <a:prstGeom prst="ellipse">
@@ -4344,7 +4345,7 @@
         </p:nvSpPr>
         <p:spPr>
           <a:xfrm>
-            <a:off x="6309360" y="2871216"/>
+            <a:off x="6309360" y="2634600"/>
             <a:ext cx="2651760" cy="502920"/>
           </a:xfrm>
           <a:prstGeom prst="rect">
@@ -4379,7 +4380,7 @@
         </p:nvSpPr>
         <p:spPr>
           <a:xfrm>
-            <a:off x="6035040" y="3547872"/>
+            <a:off x="6035040" y="3232384"/>
             <a:ext cx="201168" cy="201168"/>
           </a:xfrm>
           <a:prstGeom prst="ellipse">
@@ -4423,7 +4424,7 @@
         </p:nvSpPr>
         <p:spPr>
           <a:xfrm>
-            <a:off x="6309360" y="3493008"/>
+            <a:off x="6309360" y="3177520"/>
             <a:ext cx="2651760" cy="502920"/>
           </a:xfrm>
           <a:prstGeom prst="rect">
@@ -4458,7 +4459,7 @@
         </p:nvSpPr>
         <p:spPr>
           <a:xfrm>
-            <a:off x="6035040" y="4169663"/>
+            <a:off x="6035040" y="3775304"/>
             <a:ext cx="201168" cy="201168"/>
           </a:xfrm>
           <a:prstGeom prst="ellipse">
@@ -4502,7 +4503,7 @@
         </p:nvSpPr>
         <p:spPr>
           <a:xfrm>
-            <a:off x="6309360" y="4114800"/>
+            <a:off x="6309360" y="3720440"/>
             <a:ext cx="2651760" cy="502920"/>
           </a:xfrm>
           <a:prstGeom prst="rect">
@@ -4559,7 +4560,86 @@
                 </a:solidFill>
                 <a:latin typeface="Meiryo"/>
               </a:rPr>
-              <a:t>1  /  10</a:t>
+              <a:t>1  /  11</a:t>
+            </a:r>
+          </a:p>
+        </p:txBody>
+      </p:sp>
+      <p:sp>
+        <p:nvSpPr>
+          <p:cNvPr id="27" name="TocOval7"/>
+          <p:cNvSpPr/>
+          <p:nvPr/>
+        </p:nvSpPr>
+        <p:spPr>
+          <a:xfrm>
+            <a:off x="6035040" y="4318224"/>
+            <a:ext cx="201168" cy="201168"/>
+          </a:xfrm>
+          <a:prstGeom prst="ellipse">
+            <a:avLst/>
+          </a:prstGeom>
+          <a:solidFill>
+            <a:srgbClr val="7AAB8A"/>
+          </a:solidFill>
+          <a:ln>
+            <a:noFill/>
+          </a:ln>
+        </p:spPr>
+        <p:style>
+          <a:lnRef idx="1">
+            <a:schemeClr val="accent1"/>
+          </a:lnRef>
+          <a:fillRef idx="3">
+            <a:schemeClr val="accent1"/>
+          </a:fillRef>
+          <a:effectRef idx="2">
+            <a:schemeClr val="accent1"/>
+          </a:effectRef>
+          <a:fontRef idx="minor">
+            <a:schemeClr val="lt1"/>
+          </a:fontRef>
+        </p:style>
+        <p:txBody>
+          <a:bodyPr rtlCol="0" anchor="ctr"/>
+          <a:lstStyle/>
+          <a:p>
+            <a:pPr algn="ctr"/>
+            <a:endParaRPr/>
+          </a:p>
+        </p:txBody>
+      </p:sp>
+      <p:sp>
+        <p:nvSpPr>
+          <p:cNvPr id="28" name="TocText7"/>
+          <p:cNvSpPr txBox="1"/>
+          <p:nvPr/>
+        </p:nvSpPr>
+        <p:spPr>
+          <a:xfrm>
+            <a:off x="6309360" y="4263360"/>
+            <a:ext cx="2651760" cy="502920"/>
+          </a:xfrm>
+          <a:prstGeom prst="rect">
+            <a:avLst/>
+          </a:prstGeom>
+          <a:noFill/>
+        </p:spPr>
+        <p:txBody>
+          <a:bodyPr wrap="square" lIns="0" tIns="0" rIns="0" bIns="0" anchor="ctr">
+            <a:spAutoFit/>
+          </a:bodyPr>
+          <a:lstStyle/>
+          <a:p>
+            <a:pPr algn="l"/>
+            <a:r>
+              <a:rPr sz="1150" b="0" i="0" dirty="0" err="1">
+                <a:solidFill>
+                  <a:srgbClr val="FAFBF8"/>
+                </a:solidFill>
+                <a:latin typeface="Meiryo"/>
+              </a:rPr>
+              <a:t>グリッドと追加機能</a:t>
             </a:r>
           </a:p>
         </p:txBody>
@@ -7277,7 +7357,1706 @@
                 </a:solidFill>
                 <a:latin typeface="Meiryo"/>
               </a:rPr>
-              <a:t>10  /  10</a:t>
+              <a:t>11  /  11</a:t>
+            </a:r>
+          </a:p>
+        </p:txBody>
+      </p:sp>
+    </p:spTree>
+  </p:cSld>
+  <p:clrMapOvr>
+    <a:masterClrMapping/>
+  </p:clrMapOvr>
+</p:sld>
+</file>
+
+<file path=ppt/slides/slide11.xml><?xml version="1.0" encoding="utf-8"?>
+<p:sld xmlns:a="http://schemas.openxmlformats.org/drawingml/2006/main" xmlns:r="http://schemas.openxmlformats.org/officeDocument/2006/relationships" xmlns:p="http://schemas.openxmlformats.org/presentationml/2006/main">
+  <p:cSld>
+    <p:bg>
+      <p:bgPr>
+        <a:solidFill>
+          <a:srgbClr val="F5F0E8"/>
+        </a:solidFill>
+        <a:effectLst/>
+      </p:bgPr>
+    </p:bg>
+    <p:spTree>
+      <p:nvGrpSpPr>
+        <p:cNvPr id="1" name=""/>
+        <p:cNvGrpSpPr/>
+        <p:nvPr/>
+      </p:nvGrpSpPr>
+      <p:grpSpPr>
+        <a:xfrm>
+          <a:off x="0" y="0"/>
+          <a:ext cx="0" cy="0"/>
+          <a:chOff x="0" y="0"/>
+          <a:chExt cx="0" cy="0"/>
+        </a:xfrm>
+      </p:grpSpPr>
+      <p:sp>
+        <p:nvSpPr>
+          <p:cNvPr id="2" name="Rectangle 1"/>
+          <p:cNvSpPr/>
+          <p:nvPr/>
+        </p:nvSpPr>
+        <p:spPr>
+          <a:xfrm>
+            <a:off x="0" y="0"/>
+            <a:ext cx="64008" cy="5143500"/>
+          </a:xfrm>
+          <a:prstGeom prst="rect">
+            <a:avLst/>
+          </a:prstGeom>
+          <a:solidFill>
+            <a:srgbClr val="4A7C59"/>
+          </a:solidFill>
+          <a:ln>
+            <a:noFill/>
+          </a:ln>
+        </p:spPr>
+        <p:style>
+          <a:lnRef idx="1">
+            <a:schemeClr val="accent1"/>
+          </a:lnRef>
+          <a:fillRef idx="3">
+            <a:schemeClr val="accent1"/>
+          </a:fillRef>
+          <a:effectRef idx="2">
+            <a:schemeClr val="accent1"/>
+          </a:effectRef>
+          <a:fontRef idx="minor">
+            <a:schemeClr val="lt1"/>
+          </a:fontRef>
+        </p:style>
+        <p:txBody>
+          <a:bodyPr rtlCol="0" anchor="ctr"/>
+          <a:lstStyle/>
+          <a:p>
+            <a:pPr algn="ctr"/>
+            <a:endParaRPr/>
+          </a:p>
+        </p:txBody>
+      </p:sp>
+      <p:sp>
+        <p:nvSpPr>
+          <p:cNvPr id="3" name="Rectangle 2"/>
+          <p:cNvSpPr/>
+          <p:nvPr/>
+        </p:nvSpPr>
+        <p:spPr>
+          <a:xfrm>
+            <a:off x="0" y="0"/>
+            <a:ext cx="9144000" cy="566928"/>
+          </a:xfrm>
+          <a:prstGeom prst="rect">
+            <a:avLst/>
+          </a:prstGeom>
+          <a:solidFill>
+            <a:srgbClr val="FAFBF8"/>
+          </a:solidFill>
+          <a:ln>
+            <a:noFill/>
+          </a:ln>
+        </p:spPr>
+        <p:style>
+          <a:lnRef idx="1">
+            <a:schemeClr val="accent1"/>
+          </a:lnRef>
+          <a:fillRef idx="3">
+            <a:schemeClr val="accent1"/>
+          </a:fillRef>
+          <a:effectRef idx="2">
+            <a:schemeClr val="accent1"/>
+          </a:effectRef>
+          <a:fontRef idx="minor">
+            <a:schemeClr val="lt1"/>
+          </a:fontRef>
+        </p:style>
+        <p:txBody>
+          <a:bodyPr rtlCol="0" anchor="ctr"/>
+          <a:lstStyle/>
+          <a:p>
+            <a:pPr algn="ctr"/>
+            <a:endParaRPr/>
+          </a:p>
+        </p:txBody>
+      </p:sp>
+      <p:sp>
+        <p:nvSpPr>
+          <p:cNvPr id="4" name="Rectangle 3"/>
+          <p:cNvSpPr/>
+          <p:nvPr/>
+        </p:nvSpPr>
+        <p:spPr>
+          <a:xfrm>
+            <a:off x="64008" y="530352"/>
+            <a:ext cx="9079992" cy="36576"/>
+          </a:xfrm>
+          <a:prstGeom prst="rect">
+            <a:avLst/>
+          </a:prstGeom>
+          <a:solidFill>
+            <a:srgbClr val="4A7C59"/>
+          </a:solidFill>
+          <a:ln>
+            <a:noFill/>
+          </a:ln>
+        </p:spPr>
+        <p:style>
+          <a:lnRef idx="1">
+            <a:schemeClr val="accent1"/>
+          </a:lnRef>
+          <a:fillRef idx="3">
+            <a:schemeClr val="accent1"/>
+          </a:fillRef>
+          <a:effectRef idx="2">
+            <a:schemeClr val="accent1"/>
+          </a:effectRef>
+          <a:fontRef idx="minor">
+            <a:schemeClr val="lt1"/>
+          </a:fontRef>
+        </p:style>
+        <p:txBody>
+          <a:bodyPr rtlCol="0" anchor="ctr"/>
+          <a:lstStyle/>
+          <a:p>
+            <a:pPr algn="ctr"/>
+            <a:endParaRPr/>
+          </a:p>
+        </p:txBody>
+      </p:sp>
+      <p:sp>
+        <p:nvSpPr>
+          <p:cNvPr id="5" name="TextBox 4"/>
+          <p:cNvSpPr txBox="1"/>
+          <p:nvPr/>
+        </p:nvSpPr>
+        <p:spPr>
+          <a:xfrm>
+            <a:off x="256032" y="54864"/>
+            <a:ext cx="8595360" cy="475488"/>
+          </a:xfrm>
+          <a:prstGeom prst="rect">
+            <a:avLst/>
+          </a:prstGeom>
+          <a:noFill/>
+        </p:spPr>
+        <p:txBody>
+          <a:bodyPr wrap="square" lIns="0" tIns="0" rIns="0" bIns="0" anchor="ctr">
+            <a:spAutoFit/>
+          </a:bodyPr>
+          <a:lstStyle/>
+          <a:p>
+            <a:pPr algn="l"/>
+            <a:r>
+              <a:rPr sz="2000" b="1" i="0">
+                <a:solidFill>
+                  <a:srgbClr val="2C3E35"/>
+                </a:solidFill>
+                <a:latin typeface="Meiryo"/>
+              </a:rPr>
+              <a:t>グリッドと追加機能</a:t>
+            </a:r>
+          </a:p>
+        </p:txBody>
+      </p:sp>
+      <p:sp>
+        <p:nvSpPr>
+          <p:cNvPr id="6" name="Rectangle 5"/>
+          <p:cNvSpPr/>
+          <p:nvPr/>
+        </p:nvSpPr>
+        <p:spPr>
+          <a:xfrm>
+            <a:off x="274320" y="713232"/>
+            <a:ext cx="4224528" cy="1993392"/>
+          </a:xfrm>
+          <a:prstGeom prst="rect">
+            <a:avLst/>
+          </a:prstGeom>
+          <a:solidFill>
+            <a:srgbClr val="FFFFFF"/>
+          </a:solidFill>
+          <a:ln w="7620">
+            <a:solidFill>
+              <a:srgbClr val="ECEDE9"/>
+            </a:solidFill>
+          </a:ln>
+        </p:spPr>
+        <p:style>
+          <a:lnRef idx="1">
+            <a:schemeClr val="accent1"/>
+          </a:lnRef>
+          <a:fillRef idx="3">
+            <a:schemeClr val="accent1"/>
+          </a:fillRef>
+          <a:effectRef idx="2">
+            <a:schemeClr val="accent1"/>
+          </a:effectRef>
+          <a:fontRef idx="minor">
+            <a:schemeClr val="lt1"/>
+          </a:fontRef>
+        </p:style>
+        <p:txBody>
+          <a:bodyPr rtlCol="0" anchor="ctr"/>
+          <a:lstStyle/>
+          <a:p>
+            <a:pPr algn="ctr"/>
+            <a:endParaRPr/>
+          </a:p>
+        </p:txBody>
+      </p:sp>
+      <p:sp>
+        <p:nvSpPr>
+          <p:cNvPr id="7" name="Rectangle 6"/>
+          <p:cNvSpPr/>
+          <p:nvPr/>
+        </p:nvSpPr>
+        <p:spPr>
+          <a:xfrm>
+            <a:off x="274320" y="713232"/>
+            <a:ext cx="4224528" cy="54864"/>
+          </a:xfrm>
+          <a:prstGeom prst="rect">
+            <a:avLst/>
+          </a:prstGeom>
+          <a:solidFill>
+            <a:srgbClr val="C87A5A"/>
+          </a:solidFill>
+          <a:ln>
+            <a:noFill/>
+          </a:ln>
+        </p:spPr>
+        <p:style>
+          <a:lnRef idx="1">
+            <a:schemeClr val="accent1"/>
+          </a:lnRef>
+          <a:fillRef idx="3">
+            <a:schemeClr val="accent1"/>
+          </a:fillRef>
+          <a:effectRef idx="2">
+            <a:schemeClr val="accent1"/>
+          </a:effectRef>
+          <a:fontRef idx="minor">
+            <a:schemeClr val="lt1"/>
+          </a:fontRef>
+        </p:style>
+        <p:txBody>
+          <a:bodyPr rtlCol="0" anchor="ctr"/>
+          <a:lstStyle/>
+          <a:p>
+            <a:pPr algn="ctr"/>
+            <a:endParaRPr/>
+          </a:p>
+        </p:txBody>
+      </p:sp>
+      <p:sp>
+        <p:nvSpPr>
+          <p:cNvPr id="8" name="Rectangle 7"/>
+          <p:cNvSpPr/>
+          <p:nvPr/>
+        </p:nvSpPr>
+        <p:spPr>
+          <a:xfrm>
+            <a:off x="274320" y="713232"/>
+            <a:ext cx="54864" cy="1993392"/>
+          </a:xfrm>
+          <a:prstGeom prst="rect">
+            <a:avLst/>
+          </a:prstGeom>
+          <a:solidFill>
+            <a:srgbClr val="C87A5A"/>
+          </a:solidFill>
+          <a:ln>
+            <a:noFill/>
+          </a:ln>
+        </p:spPr>
+        <p:style>
+          <a:lnRef idx="1">
+            <a:schemeClr val="accent1"/>
+          </a:lnRef>
+          <a:fillRef idx="3">
+            <a:schemeClr val="accent1"/>
+          </a:fillRef>
+          <a:effectRef idx="2">
+            <a:schemeClr val="accent1"/>
+          </a:effectRef>
+          <a:fontRef idx="minor">
+            <a:schemeClr val="lt1"/>
+          </a:fontRef>
+        </p:style>
+        <p:txBody>
+          <a:bodyPr rtlCol="0" anchor="ctr"/>
+          <a:lstStyle/>
+          <a:p>
+            <a:pPr algn="ctr"/>
+            <a:endParaRPr/>
+          </a:p>
+        </p:txBody>
+      </p:sp>
+      <p:sp>
+        <p:nvSpPr>
+          <p:cNvPr id="9" name="Oval 8"/>
+          <p:cNvSpPr/>
+          <p:nvPr/>
+        </p:nvSpPr>
+        <p:spPr>
+          <a:xfrm>
+            <a:off x="493776" y="969264"/>
+            <a:ext cx="694944" cy="694944"/>
+          </a:xfrm>
+          <a:prstGeom prst="ellipse">
+            <a:avLst/>
+          </a:prstGeom>
+          <a:solidFill>
+            <a:srgbClr val="ECEDE9"/>
+          </a:solidFill>
+          <a:ln>
+            <a:noFill/>
+          </a:ln>
+        </p:spPr>
+        <p:style>
+          <a:lnRef idx="1">
+            <a:schemeClr val="accent1"/>
+          </a:lnRef>
+          <a:fillRef idx="3">
+            <a:schemeClr val="accent1"/>
+          </a:fillRef>
+          <a:effectRef idx="2">
+            <a:schemeClr val="accent1"/>
+          </a:effectRef>
+          <a:fontRef idx="minor">
+            <a:schemeClr val="lt1"/>
+          </a:fontRef>
+        </p:style>
+        <p:txBody>
+          <a:bodyPr rtlCol="0" anchor="ctr"/>
+          <a:lstStyle/>
+          <a:p>
+            <a:pPr algn="ctr"/>
+            <a:endParaRPr/>
+          </a:p>
+        </p:txBody>
+      </p:sp>
+      <p:sp>
+        <p:nvSpPr>
+          <p:cNvPr id="10" name="TextBox 9"/>
+          <p:cNvSpPr txBox="1"/>
+          <p:nvPr/>
+        </p:nvSpPr>
+        <p:spPr>
+          <a:xfrm>
+            <a:off x="438912" y="914400"/>
+            <a:ext cx="804672" cy="804672"/>
+          </a:xfrm>
+          <a:prstGeom prst="rect">
+            <a:avLst/>
+          </a:prstGeom>
+          <a:noFill/>
+        </p:spPr>
+        <p:txBody>
+          <a:bodyPr wrap="square" lIns="0" tIns="0" rIns="0" bIns="0" anchor="ctr">
+            <a:spAutoFit/>
+          </a:bodyPr>
+          <a:lstStyle/>
+          <a:p>
+            <a:pPr algn="ctr"/>
+            <a:r>
+              <a:rPr sz="2800" b="0" i="0">
+                <a:latin typeface="Meiryo"/>
+              </a:rPr>
+              <a:t>💬</a:t>
+            </a:r>
+          </a:p>
+        </p:txBody>
+      </p:sp>
+      <p:sp>
+        <p:nvSpPr>
+          <p:cNvPr id="11" name="TextBox 10"/>
+          <p:cNvSpPr txBox="1"/>
+          <p:nvPr/>
+        </p:nvSpPr>
+        <p:spPr>
+          <a:xfrm>
+            <a:off x="1353312" y="969264"/>
+            <a:ext cx="2926080" cy="347472"/>
+          </a:xfrm>
+          <a:prstGeom prst="rect">
+            <a:avLst/>
+          </a:prstGeom>
+          <a:noFill/>
+        </p:spPr>
+        <p:txBody>
+          <a:bodyPr wrap="square" lIns="0" tIns="0" rIns="0" bIns="0" anchor="ctr">
+            <a:spAutoFit/>
+          </a:bodyPr>
+          <a:lstStyle/>
+          <a:p>
+            <a:pPr algn="l"/>
+            <a:r>
+              <a:rPr sz="1400" b="1" i="0">
+                <a:solidFill>
+                  <a:srgbClr val="C87A5A"/>
+                </a:solidFill>
+                <a:latin typeface="Meiryo"/>
+              </a:rPr>
+              <a:t>ホバーで吹き出し表示</a:t>
+            </a:r>
+          </a:p>
+        </p:txBody>
+      </p:sp>
+      <p:sp>
+        <p:nvSpPr>
+          <p:cNvPr id="12" name="Rectangle 11"/>
+          <p:cNvSpPr/>
+          <p:nvPr/>
+        </p:nvSpPr>
+        <p:spPr>
+          <a:xfrm>
+            <a:off x="1353312" y="1353312"/>
+            <a:ext cx="2743200" cy="22860"/>
+          </a:xfrm>
+          <a:prstGeom prst="rect">
+            <a:avLst/>
+          </a:prstGeom>
+          <a:solidFill>
+            <a:srgbClr val="ECEDE9"/>
+          </a:solidFill>
+          <a:ln>
+            <a:noFill/>
+          </a:ln>
+        </p:spPr>
+        <p:style>
+          <a:lnRef idx="1">
+            <a:schemeClr val="accent1"/>
+          </a:lnRef>
+          <a:fillRef idx="3">
+            <a:schemeClr val="accent1"/>
+          </a:fillRef>
+          <a:effectRef idx="2">
+            <a:schemeClr val="accent1"/>
+          </a:effectRef>
+          <a:fontRef idx="minor">
+            <a:schemeClr val="lt1"/>
+          </a:fontRef>
+        </p:style>
+        <p:txBody>
+          <a:bodyPr rtlCol="0" anchor="ctr"/>
+          <a:lstStyle/>
+          <a:p>
+            <a:pPr algn="ctr"/>
+            <a:endParaRPr/>
+          </a:p>
+        </p:txBody>
+      </p:sp>
+      <p:sp>
+        <p:nvSpPr>
+          <p:cNvPr id="13" name="TextBox 12"/>
+          <p:cNvSpPr txBox="1"/>
+          <p:nvPr/>
+        </p:nvSpPr>
+        <p:spPr>
+          <a:xfrm>
+            <a:off x="1353312" y="1444752"/>
+            <a:ext cx="2999232" cy="1133856"/>
+          </a:xfrm>
+          <a:prstGeom prst="rect">
+            <a:avLst/>
+          </a:prstGeom>
+          <a:noFill/>
+        </p:spPr>
+        <p:txBody>
+          <a:bodyPr wrap="square" lIns="0" tIns="0" rIns="0" bIns="0" anchor="t">
+            <a:spAutoFit/>
+          </a:bodyPr>
+          <a:lstStyle/>
+          <a:p>
+            <a:pPr algn="l"/>
+            <a:r>
+              <a:rPr sz="1150" b="0" i="0">
+                <a:solidFill>
+                  <a:srgbClr val="5C7065"/>
+                </a:solidFill>
+                <a:latin typeface="Meiryo"/>
+              </a:rPr>
+              <a:t>工事一覧にマウスをかざすと</a:t>
+            </a:r>
+          </a:p>
+          <a:p>
+            <a:pPr algn="l"/>
+            <a:r>
+              <a:rPr sz="1150" b="0" i="0">
+                <a:solidFill>
+                  <a:srgbClr val="5C7065"/>
+                </a:solidFill>
+                <a:latin typeface="Meiryo"/>
+              </a:rPr>
+              <a:t>客先名と工事名が右側に</a:t>
+            </a:r>
+          </a:p>
+          <a:p>
+            <a:pPr algn="l"/>
+            <a:r>
+              <a:rPr sz="1150" b="0" i="0">
+                <a:solidFill>
+                  <a:srgbClr val="5C7065"/>
+                </a:solidFill>
+                <a:latin typeface="Meiryo"/>
+              </a:rPr>
+              <a:t>吹き出しで表示されます。</a:t>
+            </a:r>
+          </a:p>
+        </p:txBody>
+      </p:sp>
+      <p:sp>
+        <p:nvSpPr>
+          <p:cNvPr id="14" name="Rectangle 13"/>
+          <p:cNvSpPr/>
+          <p:nvPr/>
+        </p:nvSpPr>
+        <p:spPr>
+          <a:xfrm>
+            <a:off x="4709159" y="713232"/>
+            <a:ext cx="4224528" cy="1993392"/>
+          </a:xfrm>
+          <a:prstGeom prst="rect">
+            <a:avLst/>
+          </a:prstGeom>
+          <a:solidFill>
+            <a:srgbClr val="FFFFFF"/>
+          </a:solidFill>
+          <a:ln w="7620">
+            <a:solidFill>
+              <a:srgbClr val="ECEDE9"/>
+            </a:solidFill>
+          </a:ln>
+        </p:spPr>
+        <p:style>
+          <a:lnRef idx="1">
+            <a:schemeClr val="accent1"/>
+          </a:lnRef>
+          <a:fillRef idx="3">
+            <a:schemeClr val="accent1"/>
+          </a:fillRef>
+          <a:effectRef idx="2">
+            <a:schemeClr val="accent1"/>
+          </a:effectRef>
+          <a:fontRef idx="minor">
+            <a:schemeClr val="lt1"/>
+          </a:fontRef>
+        </p:style>
+        <p:txBody>
+          <a:bodyPr rtlCol="0" anchor="ctr"/>
+          <a:lstStyle/>
+          <a:p>
+            <a:pPr algn="ctr"/>
+            <a:endParaRPr/>
+          </a:p>
+        </p:txBody>
+      </p:sp>
+      <p:sp>
+        <p:nvSpPr>
+          <p:cNvPr id="15" name="Rectangle 14"/>
+          <p:cNvSpPr/>
+          <p:nvPr/>
+        </p:nvSpPr>
+        <p:spPr>
+          <a:xfrm>
+            <a:off x="4709159" y="713232"/>
+            <a:ext cx="4224528" cy="54864"/>
+          </a:xfrm>
+          <a:prstGeom prst="rect">
+            <a:avLst/>
+          </a:prstGeom>
+          <a:solidFill>
+            <a:srgbClr val="4A7C59"/>
+          </a:solidFill>
+          <a:ln>
+            <a:noFill/>
+          </a:ln>
+        </p:spPr>
+        <p:style>
+          <a:lnRef idx="1">
+            <a:schemeClr val="accent1"/>
+          </a:lnRef>
+          <a:fillRef idx="3">
+            <a:schemeClr val="accent1"/>
+          </a:fillRef>
+          <a:effectRef idx="2">
+            <a:schemeClr val="accent1"/>
+          </a:effectRef>
+          <a:fontRef idx="minor">
+            <a:schemeClr val="lt1"/>
+          </a:fontRef>
+        </p:style>
+        <p:txBody>
+          <a:bodyPr rtlCol="0" anchor="ctr"/>
+          <a:lstStyle/>
+          <a:p>
+            <a:pPr algn="ctr"/>
+            <a:endParaRPr/>
+          </a:p>
+        </p:txBody>
+      </p:sp>
+      <p:sp>
+        <p:nvSpPr>
+          <p:cNvPr id="16" name="Rectangle 15"/>
+          <p:cNvSpPr/>
+          <p:nvPr/>
+        </p:nvSpPr>
+        <p:spPr>
+          <a:xfrm>
+            <a:off x="4709159" y="713232"/>
+            <a:ext cx="54864" cy="1993392"/>
+          </a:xfrm>
+          <a:prstGeom prst="rect">
+            <a:avLst/>
+          </a:prstGeom>
+          <a:solidFill>
+            <a:srgbClr val="4A7C59"/>
+          </a:solidFill>
+          <a:ln>
+            <a:noFill/>
+          </a:ln>
+        </p:spPr>
+        <p:style>
+          <a:lnRef idx="1">
+            <a:schemeClr val="accent1"/>
+          </a:lnRef>
+          <a:fillRef idx="3">
+            <a:schemeClr val="accent1"/>
+          </a:fillRef>
+          <a:effectRef idx="2">
+            <a:schemeClr val="accent1"/>
+          </a:effectRef>
+          <a:fontRef idx="minor">
+            <a:schemeClr val="lt1"/>
+          </a:fontRef>
+        </p:style>
+        <p:txBody>
+          <a:bodyPr rtlCol="0" anchor="ctr"/>
+          <a:lstStyle/>
+          <a:p>
+            <a:pPr algn="ctr"/>
+            <a:endParaRPr/>
+          </a:p>
+        </p:txBody>
+      </p:sp>
+      <p:sp>
+        <p:nvSpPr>
+          <p:cNvPr id="17" name="Oval 16"/>
+          <p:cNvSpPr/>
+          <p:nvPr/>
+        </p:nvSpPr>
+        <p:spPr>
+          <a:xfrm>
+            <a:off x="4928616" y="969264"/>
+            <a:ext cx="694944" cy="694944"/>
+          </a:xfrm>
+          <a:prstGeom prst="ellipse">
+            <a:avLst/>
+          </a:prstGeom>
+          <a:solidFill>
+            <a:srgbClr val="ECEDE9"/>
+          </a:solidFill>
+          <a:ln>
+            <a:noFill/>
+          </a:ln>
+        </p:spPr>
+        <p:style>
+          <a:lnRef idx="1">
+            <a:schemeClr val="accent1"/>
+          </a:lnRef>
+          <a:fillRef idx="3">
+            <a:schemeClr val="accent1"/>
+          </a:fillRef>
+          <a:effectRef idx="2">
+            <a:schemeClr val="accent1"/>
+          </a:effectRef>
+          <a:fontRef idx="minor">
+            <a:schemeClr val="lt1"/>
+          </a:fontRef>
+        </p:style>
+        <p:txBody>
+          <a:bodyPr rtlCol="0" anchor="ctr"/>
+          <a:lstStyle/>
+          <a:p>
+            <a:pPr algn="ctr"/>
+            <a:endParaRPr/>
+          </a:p>
+        </p:txBody>
+      </p:sp>
+      <p:sp>
+        <p:nvSpPr>
+          <p:cNvPr id="18" name="TextBox 17"/>
+          <p:cNvSpPr txBox="1"/>
+          <p:nvPr/>
+        </p:nvSpPr>
+        <p:spPr>
+          <a:xfrm>
+            <a:off x="4873751" y="914400"/>
+            <a:ext cx="804672" cy="804672"/>
+          </a:xfrm>
+          <a:prstGeom prst="rect">
+            <a:avLst/>
+          </a:prstGeom>
+          <a:noFill/>
+        </p:spPr>
+        <p:txBody>
+          <a:bodyPr wrap="square" lIns="0" tIns="0" rIns="0" bIns="0" anchor="ctr">
+            <a:spAutoFit/>
+          </a:bodyPr>
+          <a:lstStyle/>
+          <a:p>
+            <a:pPr algn="ctr"/>
+            <a:r>
+              <a:rPr sz="2800" b="0" i="0">
+                <a:latin typeface="Meiryo"/>
+              </a:rPr>
+              <a:t>?</a:t>
+            </a:r>
+          </a:p>
+        </p:txBody>
+      </p:sp>
+      <p:sp>
+        <p:nvSpPr>
+          <p:cNvPr id="19" name="TextBox 18"/>
+          <p:cNvSpPr txBox="1"/>
+          <p:nvPr/>
+        </p:nvSpPr>
+        <p:spPr>
+          <a:xfrm>
+            <a:off x="5788151" y="969264"/>
+            <a:ext cx="2926080" cy="347472"/>
+          </a:xfrm>
+          <a:prstGeom prst="rect">
+            <a:avLst/>
+          </a:prstGeom>
+          <a:noFill/>
+        </p:spPr>
+        <p:txBody>
+          <a:bodyPr wrap="square" lIns="0" tIns="0" rIns="0" bIns="0" anchor="ctr">
+            <a:spAutoFit/>
+          </a:bodyPr>
+          <a:lstStyle/>
+          <a:p>
+            <a:pPr algn="l"/>
+            <a:r>
+              <a:rPr sz="1400" b="1" i="0">
+                <a:solidFill>
+                  <a:srgbClr val="4A7C59"/>
+                </a:solidFill>
+                <a:latin typeface="Meiryo"/>
+              </a:rPr>
+              <a:t>使い方ガイドボタン</a:t>
+            </a:r>
+          </a:p>
+        </p:txBody>
+      </p:sp>
+      <p:sp>
+        <p:nvSpPr>
+          <p:cNvPr id="20" name="Rectangle 19"/>
+          <p:cNvSpPr/>
+          <p:nvPr/>
+        </p:nvSpPr>
+        <p:spPr>
+          <a:xfrm>
+            <a:off x="5788151" y="1353312"/>
+            <a:ext cx="2743200" cy="22860"/>
+          </a:xfrm>
+          <a:prstGeom prst="rect">
+            <a:avLst/>
+          </a:prstGeom>
+          <a:solidFill>
+            <a:srgbClr val="ECEDE9"/>
+          </a:solidFill>
+          <a:ln>
+            <a:noFill/>
+          </a:ln>
+        </p:spPr>
+        <p:style>
+          <a:lnRef idx="1">
+            <a:schemeClr val="accent1"/>
+          </a:lnRef>
+          <a:fillRef idx="3">
+            <a:schemeClr val="accent1"/>
+          </a:fillRef>
+          <a:effectRef idx="2">
+            <a:schemeClr val="accent1"/>
+          </a:effectRef>
+          <a:fontRef idx="minor">
+            <a:schemeClr val="lt1"/>
+          </a:fontRef>
+        </p:style>
+        <p:txBody>
+          <a:bodyPr rtlCol="0" anchor="ctr"/>
+          <a:lstStyle/>
+          <a:p>
+            <a:pPr algn="ctr"/>
+            <a:endParaRPr/>
+          </a:p>
+        </p:txBody>
+      </p:sp>
+      <p:sp>
+        <p:nvSpPr>
+          <p:cNvPr id="21" name="TextBox 20"/>
+          <p:cNvSpPr txBox="1"/>
+          <p:nvPr/>
+        </p:nvSpPr>
+        <p:spPr>
+          <a:xfrm>
+            <a:off x="5788151" y="1444752"/>
+            <a:ext cx="2999232" cy="1133856"/>
+          </a:xfrm>
+          <a:prstGeom prst="rect">
+            <a:avLst/>
+          </a:prstGeom>
+          <a:noFill/>
+        </p:spPr>
+        <p:txBody>
+          <a:bodyPr wrap="square" lIns="0" tIns="0" rIns="0" bIns="0" anchor="t">
+            <a:spAutoFit/>
+          </a:bodyPr>
+          <a:lstStyle/>
+          <a:p>
+            <a:pPr algn="l"/>
+            <a:r>
+              <a:rPr sz="1150" b="0" i="0">
+                <a:solidFill>
+                  <a:srgbClr val="5C7065"/>
+                </a:solidFill>
+                <a:latin typeface="Meiryo"/>
+              </a:rPr>
+              <a:t>右上「？使い方ガイド」クリックで</a:t>
+            </a:r>
+          </a:p>
+          <a:p>
+            <a:pPr algn="l"/>
+            <a:r>
+              <a:rPr sz="1150" b="0" i="0">
+                <a:solidFill>
+                  <a:srgbClr val="5C7065"/>
+                </a:solidFill>
+                <a:latin typeface="Meiryo"/>
+              </a:rPr>
+              <a:t>各UIボタンの説明がハイライト</a:t>
+            </a:r>
+          </a:p>
+          <a:p>
+            <a:pPr algn="l"/>
+            <a:r>
+              <a:rPr sz="1150" b="0" i="0">
+                <a:solidFill>
+                  <a:srgbClr val="5C7065"/>
+                </a:solidFill>
+                <a:latin typeface="Meiryo"/>
+              </a:rPr>
+              <a:t>表示されます。</a:t>
+            </a:r>
+          </a:p>
+          <a:p>
+            <a:pPr algn="l"/>
+            <a:r>
+              <a:rPr sz="1150" b="0" i="0">
+                <a:solidFill>
+                  <a:srgbClr val="5C7065"/>
+                </a:solidFill>
+                <a:latin typeface="Meiryo"/>
+              </a:rPr>
+              <a:t>背景クリックで閉じます。</a:t>
+            </a:r>
+          </a:p>
+        </p:txBody>
+      </p:sp>
+      <p:sp>
+        <p:nvSpPr>
+          <p:cNvPr id="22" name="Rectangle 21"/>
+          <p:cNvSpPr/>
+          <p:nvPr/>
+        </p:nvSpPr>
+        <p:spPr>
+          <a:xfrm>
+            <a:off x="274320" y="2834639"/>
+            <a:ext cx="4224528" cy="1993392"/>
+          </a:xfrm>
+          <a:prstGeom prst="rect">
+            <a:avLst/>
+          </a:prstGeom>
+          <a:solidFill>
+            <a:srgbClr val="FFFFFF"/>
+          </a:solidFill>
+          <a:ln w="7620">
+            <a:solidFill>
+              <a:srgbClr val="ECEDE9"/>
+            </a:solidFill>
+          </a:ln>
+        </p:spPr>
+        <p:style>
+          <a:lnRef idx="1">
+            <a:schemeClr val="accent1"/>
+          </a:lnRef>
+          <a:fillRef idx="3">
+            <a:schemeClr val="accent1"/>
+          </a:fillRef>
+          <a:effectRef idx="2">
+            <a:schemeClr val="accent1"/>
+          </a:effectRef>
+          <a:fontRef idx="minor">
+            <a:schemeClr val="lt1"/>
+          </a:fontRef>
+        </p:style>
+        <p:txBody>
+          <a:bodyPr rtlCol="0" anchor="ctr"/>
+          <a:lstStyle/>
+          <a:p>
+            <a:pPr algn="ctr"/>
+            <a:endParaRPr/>
+          </a:p>
+        </p:txBody>
+      </p:sp>
+      <p:sp>
+        <p:nvSpPr>
+          <p:cNvPr id="23" name="Rectangle 22"/>
+          <p:cNvSpPr/>
+          <p:nvPr/>
+        </p:nvSpPr>
+        <p:spPr>
+          <a:xfrm>
+            <a:off x="274320" y="2834639"/>
+            <a:ext cx="4224528" cy="54864"/>
+          </a:xfrm>
+          <a:prstGeom prst="rect">
+            <a:avLst/>
+          </a:prstGeom>
+          <a:solidFill>
+            <a:srgbClr val="6A8EAD"/>
+          </a:solidFill>
+          <a:ln>
+            <a:noFill/>
+          </a:ln>
+        </p:spPr>
+        <p:style>
+          <a:lnRef idx="1">
+            <a:schemeClr val="accent1"/>
+          </a:lnRef>
+          <a:fillRef idx="3">
+            <a:schemeClr val="accent1"/>
+          </a:fillRef>
+          <a:effectRef idx="2">
+            <a:schemeClr val="accent1"/>
+          </a:effectRef>
+          <a:fontRef idx="minor">
+            <a:schemeClr val="lt1"/>
+          </a:fontRef>
+        </p:style>
+        <p:txBody>
+          <a:bodyPr rtlCol="0" anchor="ctr"/>
+          <a:lstStyle/>
+          <a:p>
+            <a:pPr algn="ctr"/>
+            <a:endParaRPr/>
+          </a:p>
+        </p:txBody>
+      </p:sp>
+      <p:sp>
+        <p:nvSpPr>
+          <p:cNvPr id="24" name="Rectangle 23"/>
+          <p:cNvSpPr/>
+          <p:nvPr/>
+        </p:nvSpPr>
+        <p:spPr>
+          <a:xfrm>
+            <a:off x="274320" y="2834639"/>
+            <a:ext cx="54864" cy="1993392"/>
+          </a:xfrm>
+          <a:prstGeom prst="rect">
+            <a:avLst/>
+          </a:prstGeom>
+          <a:solidFill>
+            <a:srgbClr val="6A8EAD"/>
+          </a:solidFill>
+          <a:ln>
+            <a:noFill/>
+          </a:ln>
+        </p:spPr>
+        <p:style>
+          <a:lnRef idx="1">
+            <a:schemeClr val="accent1"/>
+          </a:lnRef>
+          <a:fillRef idx="3">
+            <a:schemeClr val="accent1"/>
+          </a:fillRef>
+          <a:effectRef idx="2">
+            <a:schemeClr val="accent1"/>
+          </a:effectRef>
+          <a:fontRef idx="minor">
+            <a:schemeClr val="lt1"/>
+          </a:fontRef>
+        </p:style>
+        <p:txBody>
+          <a:bodyPr rtlCol="0" anchor="ctr"/>
+          <a:lstStyle/>
+          <a:p>
+            <a:pPr algn="ctr"/>
+            <a:endParaRPr/>
+          </a:p>
+        </p:txBody>
+      </p:sp>
+      <p:sp>
+        <p:nvSpPr>
+          <p:cNvPr id="25" name="Oval 24"/>
+          <p:cNvSpPr/>
+          <p:nvPr/>
+        </p:nvSpPr>
+        <p:spPr>
+          <a:xfrm>
+            <a:off x="493776" y="3090672"/>
+            <a:ext cx="694944" cy="694944"/>
+          </a:xfrm>
+          <a:prstGeom prst="ellipse">
+            <a:avLst/>
+          </a:prstGeom>
+          <a:solidFill>
+            <a:srgbClr val="ECEDE9"/>
+          </a:solidFill>
+          <a:ln>
+            <a:noFill/>
+          </a:ln>
+        </p:spPr>
+        <p:style>
+          <a:lnRef idx="1">
+            <a:schemeClr val="accent1"/>
+          </a:lnRef>
+          <a:fillRef idx="3">
+            <a:schemeClr val="accent1"/>
+          </a:fillRef>
+          <a:effectRef idx="2">
+            <a:schemeClr val="accent1"/>
+          </a:effectRef>
+          <a:fontRef idx="minor">
+            <a:schemeClr val="lt1"/>
+          </a:fontRef>
+        </p:style>
+        <p:txBody>
+          <a:bodyPr rtlCol="0" anchor="ctr"/>
+          <a:lstStyle/>
+          <a:p>
+            <a:pPr algn="ctr"/>
+            <a:endParaRPr/>
+          </a:p>
+        </p:txBody>
+      </p:sp>
+      <p:sp>
+        <p:nvSpPr>
+          <p:cNvPr id="26" name="TextBox 25"/>
+          <p:cNvSpPr txBox="1"/>
+          <p:nvPr/>
+        </p:nvSpPr>
+        <p:spPr>
+          <a:xfrm>
+            <a:off x="438912" y="3035808"/>
+            <a:ext cx="804672" cy="804672"/>
+          </a:xfrm>
+          <a:prstGeom prst="rect">
+            <a:avLst/>
+          </a:prstGeom>
+          <a:noFill/>
+        </p:spPr>
+        <p:txBody>
+          <a:bodyPr wrap="square" lIns="0" tIns="0" rIns="0" bIns="0" anchor="ctr">
+            <a:spAutoFit/>
+          </a:bodyPr>
+          <a:lstStyle/>
+          <a:p>
+            <a:pPr algn="ctr"/>
+            <a:r>
+              <a:rPr sz="2800" b="0" i="0">
+                <a:latin typeface="Meiryo"/>
+              </a:rPr>
+              <a:t>🔍</a:t>
+            </a:r>
+          </a:p>
+        </p:txBody>
+      </p:sp>
+      <p:sp>
+        <p:nvSpPr>
+          <p:cNvPr id="27" name="TextBox 26"/>
+          <p:cNvSpPr txBox="1"/>
+          <p:nvPr/>
+        </p:nvSpPr>
+        <p:spPr>
+          <a:xfrm>
+            <a:off x="1353312" y="3090672"/>
+            <a:ext cx="2926080" cy="347472"/>
+          </a:xfrm>
+          <a:prstGeom prst="rect">
+            <a:avLst/>
+          </a:prstGeom>
+          <a:noFill/>
+        </p:spPr>
+        <p:txBody>
+          <a:bodyPr wrap="square" lIns="0" tIns="0" rIns="0" bIns="0" anchor="ctr">
+            <a:spAutoFit/>
+          </a:bodyPr>
+          <a:lstStyle/>
+          <a:p>
+            <a:pPr algn="l"/>
+            <a:r>
+              <a:rPr sz="1400" b="1" i="0">
+                <a:solidFill>
+                  <a:srgbClr val="6A8EAD"/>
+                </a:solidFill>
+                <a:latin typeface="Meiryo"/>
+              </a:rPr>
+              <a:t>詳細工程表を開く</a:t>
+            </a:r>
+          </a:p>
+        </p:txBody>
+      </p:sp>
+      <p:sp>
+        <p:nvSpPr>
+          <p:cNvPr id="28" name="Rectangle 27"/>
+          <p:cNvSpPr/>
+          <p:nvPr/>
+        </p:nvSpPr>
+        <p:spPr>
+          <a:xfrm>
+            <a:off x="1353312" y="3474720"/>
+            <a:ext cx="2743200" cy="22860"/>
+          </a:xfrm>
+          <a:prstGeom prst="rect">
+            <a:avLst/>
+          </a:prstGeom>
+          <a:solidFill>
+            <a:srgbClr val="ECEDE9"/>
+          </a:solidFill>
+          <a:ln>
+            <a:noFill/>
+          </a:ln>
+        </p:spPr>
+        <p:style>
+          <a:lnRef idx="1">
+            <a:schemeClr val="accent1"/>
+          </a:lnRef>
+          <a:fillRef idx="3">
+            <a:schemeClr val="accent1"/>
+          </a:fillRef>
+          <a:effectRef idx="2">
+            <a:schemeClr val="accent1"/>
+          </a:effectRef>
+          <a:fontRef idx="minor">
+            <a:schemeClr val="lt1"/>
+          </a:fontRef>
+        </p:style>
+        <p:txBody>
+          <a:bodyPr rtlCol="0" anchor="ctr"/>
+          <a:lstStyle/>
+          <a:p>
+            <a:pPr algn="ctr"/>
+            <a:endParaRPr/>
+          </a:p>
+        </p:txBody>
+      </p:sp>
+      <p:sp>
+        <p:nvSpPr>
+          <p:cNvPr id="29" name="TextBox 28"/>
+          <p:cNvSpPr txBox="1"/>
+          <p:nvPr/>
+        </p:nvSpPr>
+        <p:spPr>
+          <a:xfrm>
+            <a:off x="1353312" y="3566159"/>
+            <a:ext cx="2999232" cy="1133856"/>
+          </a:xfrm>
+          <a:prstGeom prst="rect">
+            <a:avLst/>
+          </a:prstGeom>
+          <a:noFill/>
+        </p:spPr>
+        <p:txBody>
+          <a:bodyPr wrap="square" lIns="0" tIns="0" rIns="0" bIns="0" anchor="t">
+            <a:spAutoFit/>
+          </a:bodyPr>
+          <a:lstStyle/>
+          <a:p>
+            <a:pPr algn="l"/>
+            <a:r>
+              <a:rPr sz="1150" b="0" i="0">
+                <a:solidFill>
+                  <a:srgbClr val="5C7065"/>
+                </a:solidFill>
+                <a:latin typeface="Meiryo"/>
+              </a:rPr>
+              <a:t>グリッドの見出し行</a:t>
+            </a:r>
+          </a:p>
+          <a:p>
+            <a:pPr algn="l"/>
+            <a:r>
+              <a:rPr sz="1150" b="0" i="0">
+                <a:solidFill>
+                  <a:srgbClr val="5C7065"/>
+                </a:solidFill>
+                <a:latin typeface="Meiryo"/>
+              </a:rPr>
+              <a:t>「長納期品手配」</a:t>
+            </a:r>
+          </a:p>
+          <a:p>
+            <a:pPr algn="l"/>
+            <a:r>
+              <a:rPr sz="1150" b="0" i="0">
+                <a:solidFill>
+                  <a:srgbClr val="5C7065"/>
+                </a:solidFill>
+                <a:latin typeface="Meiryo"/>
+              </a:rPr>
+              <a:t>「出図＆部品手配」</a:t>
+            </a:r>
+          </a:p>
+          <a:p>
+            <a:pPr algn="l"/>
+            <a:r>
+              <a:rPr sz="1150" b="0" i="0">
+                <a:solidFill>
+                  <a:srgbClr val="5C7065"/>
+                </a:solidFill>
+                <a:latin typeface="Meiryo"/>
+              </a:rPr>
+              <a:t>に表示されるボタン。</a:t>
+            </a:r>
+          </a:p>
+          <a:p>
+            <a:pPr algn="l"/>
+            <a:r>
+              <a:rPr sz="1150" b="0" i="0">
+                <a:solidFill>
+                  <a:srgbClr val="5C7065"/>
+                </a:solidFill>
+                <a:latin typeface="Meiryo"/>
+              </a:rPr>
+              <a:t>クリックで詳細工程表を</a:t>
+            </a:r>
+          </a:p>
+          <a:p>
+            <a:pPr algn="l"/>
+            <a:r>
+              <a:rPr sz="1150" b="0" i="0">
+                <a:solidFill>
+                  <a:srgbClr val="5C7065"/>
+                </a:solidFill>
+                <a:latin typeface="Meiryo"/>
+              </a:rPr>
+              <a:t>別タブで開きます。</a:t>
+            </a:r>
+          </a:p>
+        </p:txBody>
+      </p:sp>
+      <p:sp>
+        <p:nvSpPr>
+          <p:cNvPr id="30" name="Rectangle 29"/>
+          <p:cNvSpPr/>
+          <p:nvPr/>
+        </p:nvSpPr>
+        <p:spPr>
+          <a:xfrm>
+            <a:off x="4709159" y="2834639"/>
+            <a:ext cx="4224528" cy="1993392"/>
+          </a:xfrm>
+          <a:prstGeom prst="rect">
+            <a:avLst/>
+          </a:prstGeom>
+          <a:solidFill>
+            <a:srgbClr val="FFFFFF"/>
+          </a:solidFill>
+          <a:ln w="7620">
+            <a:solidFill>
+              <a:srgbClr val="ECEDE9"/>
+            </a:solidFill>
+          </a:ln>
+        </p:spPr>
+        <p:style>
+          <a:lnRef idx="1">
+            <a:schemeClr val="accent1"/>
+          </a:lnRef>
+          <a:fillRef idx="3">
+            <a:schemeClr val="accent1"/>
+          </a:fillRef>
+          <a:effectRef idx="2">
+            <a:schemeClr val="accent1"/>
+          </a:effectRef>
+          <a:fontRef idx="minor">
+            <a:schemeClr val="lt1"/>
+          </a:fontRef>
+        </p:style>
+        <p:txBody>
+          <a:bodyPr rtlCol="0" anchor="ctr"/>
+          <a:lstStyle/>
+          <a:p>
+            <a:pPr algn="ctr"/>
+            <a:endParaRPr/>
+          </a:p>
+        </p:txBody>
+      </p:sp>
+      <p:sp>
+        <p:nvSpPr>
+          <p:cNvPr id="31" name="Rectangle 30"/>
+          <p:cNvSpPr/>
+          <p:nvPr/>
+        </p:nvSpPr>
+        <p:spPr>
+          <a:xfrm>
+            <a:off x="4709159" y="2834639"/>
+            <a:ext cx="4224528" cy="54864"/>
+          </a:xfrm>
+          <a:prstGeom prst="rect">
+            <a:avLst/>
+          </a:prstGeom>
+          <a:solidFill>
+            <a:srgbClr val="7AAB8A"/>
+          </a:solidFill>
+          <a:ln>
+            <a:noFill/>
+          </a:ln>
+        </p:spPr>
+        <p:style>
+          <a:lnRef idx="1">
+            <a:schemeClr val="accent1"/>
+          </a:lnRef>
+          <a:fillRef idx="3">
+            <a:schemeClr val="accent1"/>
+          </a:fillRef>
+          <a:effectRef idx="2">
+            <a:schemeClr val="accent1"/>
+          </a:effectRef>
+          <a:fontRef idx="minor">
+            <a:schemeClr val="lt1"/>
+          </a:fontRef>
+        </p:style>
+        <p:txBody>
+          <a:bodyPr rtlCol="0" anchor="ctr"/>
+          <a:lstStyle/>
+          <a:p>
+            <a:pPr algn="ctr"/>
+            <a:endParaRPr/>
+          </a:p>
+        </p:txBody>
+      </p:sp>
+      <p:sp>
+        <p:nvSpPr>
+          <p:cNvPr id="32" name="Rectangle 31"/>
+          <p:cNvSpPr/>
+          <p:nvPr/>
+        </p:nvSpPr>
+        <p:spPr>
+          <a:xfrm>
+            <a:off x="4709159" y="2834639"/>
+            <a:ext cx="54864" cy="1993392"/>
+          </a:xfrm>
+          <a:prstGeom prst="rect">
+            <a:avLst/>
+          </a:prstGeom>
+          <a:solidFill>
+            <a:srgbClr val="7AAB8A"/>
+          </a:solidFill>
+          <a:ln>
+            <a:noFill/>
+          </a:ln>
+        </p:spPr>
+        <p:style>
+          <a:lnRef idx="1">
+            <a:schemeClr val="accent1"/>
+          </a:lnRef>
+          <a:fillRef idx="3">
+            <a:schemeClr val="accent1"/>
+          </a:fillRef>
+          <a:effectRef idx="2">
+            <a:schemeClr val="accent1"/>
+          </a:effectRef>
+          <a:fontRef idx="minor">
+            <a:schemeClr val="lt1"/>
+          </a:fontRef>
+        </p:style>
+        <p:txBody>
+          <a:bodyPr rtlCol="0" anchor="ctr"/>
+          <a:lstStyle/>
+          <a:p>
+            <a:pPr algn="ctr"/>
+            <a:endParaRPr/>
+          </a:p>
+        </p:txBody>
+      </p:sp>
+      <p:sp>
+        <p:nvSpPr>
+          <p:cNvPr id="33" name="Oval 32"/>
+          <p:cNvSpPr/>
+          <p:nvPr/>
+        </p:nvSpPr>
+        <p:spPr>
+          <a:xfrm>
+            <a:off x="4928616" y="3090672"/>
+            <a:ext cx="694944" cy="694944"/>
+          </a:xfrm>
+          <a:prstGeom prst="ellipse">
+            <a:avLst/>
+          </a:prstGeom>
+          <a:solidFill>
+            <a:srgbClr val="ECEDE9"/>
+          </a:solidFill>
+          <a:ln>
+            <a:noFill/>
+          </a:ln>
+        </p:spPr>
+        <p:style>
+          <a:lnRef idx="1">
+            <a:schemeClr val="accent1"/>
+          </a:lnRef>
+          <a:fillRef idx="3">
+            <a:schemeClr val="accent1"/>
+          </a:fillRef>
+          <a:effectRef idx="2">
+            <a:schemeClr val="accent1"/>
+          </a:effectRef>
+          <a:fontRef idx="minor">
+            <a:schemeClr val="lt1"/>
+          </a:fontRef>
+        </p:style>
+        <p:txBody>
+          <a:bodyPr rtlCol="0" anchor="ctr"/>
+          <a:lstStyle/>
+          <a:p>
+            <a:pPr algn="ctr"/>
+            <a:endParaRPr/>
+          </a:p>
+        </p:txBody>
+      </p:sp>
+      <p:sp>
+        <p:nvSpPr>
+          <p:cNvPr id="34" name="TextBox 33"/>
+          <p:cNvSpPr txBox="1"/>
+          <p:nvPr/>
+        </p:nvSpPr>
+        <p:spPr>
+          <a:xfrm>
+            <a:off x="4873751" y="3035808"/>
+            <a:ext cx="804672" cy="804672"/>
+          </a:xfrm>
+          <a:prstGeom prst="rect">
+            <a:avLst/>
+          </a:prstGeom>
+          <a:noFill/>
+        </p:spPr>
+        <p:txBody>
+          <a:bodyPr wrap="square" lIns="0" tIns="0" rIns="0" bIns="0" anchor="ctr">
+            <a:spAutoFit/>
+          </a:bodyPr>
+          <a:lstStyle/>
+          <a:p>
+            <a:pPr algn="ctr"/>
+            <a:r>
+              <a:rPr sz="2800" b="0" i="0">
+                <a:latin typeface="Meiryo"/>
+              </a:rPr>
+              <a:t>📋</a:t>
+            </a:r>
+          </a:p>
+        </p:txBody>
+      </p:sp>
+      <p:sp>
+        <p:nvSpPr>
+          <p:cNvPr id="35" name="TextBox 34"/>
+          <p:cNvSpPr txBox="1"/>
+          <p:nvPr/>
+        </p:nvSpPr>
+        <p:spPr>
+          <a:xfrm>
+            <a:off x="5788151" y="3090672"/>
+            <a:ext cx="2926080" cy="347472"/>
+          </a:xfrm>
+          <a:prstGeom prst="rect">
+            <a:avLst/>
+          </a:prstGeom>
+          <a:noFill/>
+        </p:spPr>
+        <p:txBody>
+          <a:bodyPr wrap="square" lIns="0" tIns="0" rIns="0" bIns="0" anchor="ctr">
+            <a:spAutoFit/>
+          </a:bodyPr>
+          <a:lstStyle/>
+          <a:p>
+            <a:pPr algn="l"/>
+            <a:r>
+              <a:rPr sz="1400" b="1" i="0">
+                <a:solidFill>
+                  <a:srgbClr val="7AAB8A"/>
+                </a:solidFill>
+                <a:latin typeface="Meiryo"/>
+              </a:rPr>
+              <a:t>グリッドの階層構造</a:t>
+            </a:r>
+          </a:p>
+        </p:txBody>
+      </p:sp>
+      <p:sp>
+        <p:nvSpPr>
+          <p:cNvPr id="36" name="Rectangle 35"/>
+          <p:cNvSpPr/>
+          <p:nvPr/>
+        </p:nvSpPr>
+        <p:spPr>
+          <a:xfrm>
+            <a:off x="5788151" y="3474720"/>
+            <a:ext cx="2743200" cy="22860"/>
+          </a:xfrm>
+          <a:prstGeom prst="rect">
+            <a:avLst/>
+          </a:prstGeom>
+          <a:solidFill>
+            <a:srgbClr val="ECEDE9"/>
+          </a:solidFill>
+          <a:ln>
+            <a:noFill/>
+          </a:ln>
+        </p:spPr>
+        <p:style>
+          <a:lnRef idx="1">
+            <a:schemeClr val="accent1"/>
+          </a:lnRef>
+          <a:fillRef idx="3">
+            <a:schemeClr val="accent1"/>
+          </a:fillRef>
+          <a:effectRef idx="2">
+            <a:schemeClr val="accent1"/>
+          </a:effectRef>
+          <a:fontRef idx="minor">
+            <a:schemeClr val="lt1"/>
+          </a:fontRef>
+        </p:style>
+        <p:txBody>
+          <a:bodyPr rtlCol="0" anchor="ctr"/>
+          <a:lstStyle/>
+          <a:p>
+            <a:pPr algn="ctr"/>
+            <a:endParaRPr/>
+          </a:p>
+        </p:txBody>
+      </p:sp>
+      <p:sp>
+        <p:nvSpPr>
+          <p:cNvPr id="37" name="TextBox 36"/>
+          <p:cNvSpPr txBox="1"/>
+          <p:nvPr/>
+        </p:nvSpPr>
+        <p:spPr>
+          <a:xfrm>
+            <a:off x="5788151" y="3566159"/>
+            <a:ext cx="2999232" cy="1133856"/>
+          </a:xfrm>
+          <a:prstGeom prst="rect">
+            <a:avLst/>
+          </a:prstGeom>
+          <a:noFill/>
+        </p:spPr>
+        <p:txBody>
+          <a:bodyPr wrap="square" lIns="0" tIns="0" rIns="0" bIns="0" anchor="t">
+            <a:spAutoFit/>
+          </a:bodyPr>
+          <a:lstStyle/>
+          <a:p>
+            <a:pPr algn="l"/>
+            <a:r>
+              <a:rPr sz="1150" b="0" i="0">
+                <a:solidFill>
+                  <a:srgbClr val="5C7065"/>
+                </a:solidFill>
+                <a:latin typeface="Meiryo"/>
+              </a:rPr>
+              <a:t>グリッド左側の表は2段階構造。</a:t>
+            </a:r>
+          </a:p>
+          <a:p>
+            <a:pPr algn="l"/>
+            <a:r>
+              <a:rPr sz="1150" b="0" i="0">
+                <a:solidFill>
+                  <a:srgbClr val="5C7065"/>
+                </a:solidFill>
+                <a:latin typeface="Meiryo"/>
+              </a:rPr>
+              <a:t>見出し行（工番・機械名）の</a:t>
+            </a:r>
+          </a:p>
+          <a:p>
+            <a:pPr algn="l"/>
+            <a:r>
+              <a:rPr sz="1150" b="0" i="0">
+                <a:solidFill>
+                  <a:srgbClr val="5C7065"/>
+                </a:solidFill>
+                <a:latin typeface="Meiryo"/>
+              </a:rPr>
+              <a:t>配下に各工程タスクが並びます。</a:t>
+            </a:r>
+          </a:p>
+          <a:p>
+            <a:pPr algn="l"/>
+            <a:r>
+              <a:rPr sz="1150" b="0" i="0">
+                <a:solidFill>
+                  <a:srgbClr val="5C7065"/>
+                </a:solidFill>
+                <a:latin typeface="Meiryo"/>
+              </a:rPr>
+              <a:t>▶クリックで折りたたみ・</a:t>
+            </a:r>
+          </a:p>
+          <a:p>
+            <a:pPr algn="l"/>
+            <a:r>
+              <a:rPr sz="1150" b="0" i="0">
+                <a:solidFill>
+                  <a:srgbClr val="5C7065"/>
+                </a:solidFill>
+                <a:latin typeface="Meiryo"/>
+              </a:rPr>
+              <a:t>展開できます。</a:t>
+            </a:r>
+          </a:p>
+        </p:txBody>
+      </p:sp>
+      <p:sp>
+        <p:nvSpPr>
+          <p:cNvPr id="38" name="TextBox 37"/>
+          <p:cNvSpPr txBox="1"/>
+          <p:nvPr/>
+        </p:nvSpPr>
+        <p:spPr>
+          <a:xfrm>
+            <a:off x="8046720" y="4864608"/>
+            <a:ext cx="1005840" cy="201168"/>
+          </a:xfrm>
+          <a:prstGeom prst="rect">
+            <a:avLst/>
+          </a:prstGeom>
+          <a:noFill/>
+        </p:spPr>
+        <p:txBody>
+          <a:bodyPr wrap="square" lIns="0" tIns="0" rIns="0" bIns="0" anchor="ctr">
+            <a:spAutoFit/>
+          </a:bodyPr>
+          <a:lstStyle/>
+          <a:p>
+            <a:pPr algn="r"/>
+            <a:r>
+              <a:rPr sz="900" b="0" i="0">
+                <a:solidFill>
+                  <a:srgbClr val="9AAEA4"/>
+                </a:solidFill>
+                <a:latin typeface="Meiryo"/>
+              </a:rPr>
+              <a:t>11  /  11</a:t>
             </a:r>
           </a:p>
         </p:txBody>
@@ -9973,7 +11752,7 @@
                 </a:solidFill>
                 <a:latin typeface="Meiryo"/>
               </a:rPr>
-              <a:t>2  /  10</a:t>
+              <a:t>2  /  11</a:t>
             </a:r>
           </a:p>
         </p:txBody>
@@ -11122,7 +12901,7 @@
                 </a:solidFill>
                 <a:latin typeface="Meiryo"/>
               </a:rPr>
-              <a:t>3  /  10</a:t>
+              <a:t>3  /  11</a:t>
             </a:r>
           </a:p>
         </p:txBody>
@@ -12661,7 +14440,7 @@
                 </a:solidFill>
                 <a:latin typeface="Meiryo"/>
               </a:rPr>
-              <a:t>4  /  10</a:t>
+              <a:t>4  /  11</a:t>
             </a:r>
           </a:p>
         </p:txBody>
@@ -14818,7 +16597,7 @@
                 </a:solidFill>
                 <a:latin typeface="Meiryo"/>
               </a:rPr>
-              <a:t>5  /  10</a:t>
+              <a:t>5  /  11</a:t>
             </a:r>
           </a:p>
         </p:txBody>
@@ -17085,7 +18864,89 @@
                 </a:solidFill>
                 <a:latin typeface="Meiryo"/>
               </a:rPr>
-              <a:t>6  /  10</a:t>
+              <a:t>6  /  11</a:t>
+            </a:r>
+          </a:p>
+        </p:txBody>
+      </p:sp>
+      <p:sp>
+        <p:nvSpPr>
+          <p:cNvPr id="58" name="TipBg"/>
+          <p:cNvSpPr/>
+          <p:nvPr/>
+        </p:nvSpPr>
+        <p:spPr>
+          <a:xfrm>
+            <a:off x="310896" y="4635000"/>
+            <a:ext cx="3000000" cy="175000"/>
+          </a:xfrm>
+          <a:prstGeom prst="roundRect">
+            <a:avLst>
+              <a:gd name="adj" fmla="val 20000"/>
+            </a:avLst>
+          </a:prstGeom>
+          <a:solidFill>
+            <a:srgbClr val="E6F2E9"/>
+          </a:solidFill>
+          <a:ln w="5080">
+            <a:solidFill>
+              <a:srgbClr val="7AAB8A"/>
+            </a:solidFill>
+          </a:ln>
+        </p:spPr>
+        <p:style>
+          <a:lnRef idx="1">
+            <a:schemeClr val="accent1"/>
+          </a:lnRef>
+          <a:fillRef idx="3">
+            <a:schemeClr val="accent1"/>
+          </a:fillRef>
+          <a:effectRef idx="2">
+            <a:schemeClr val="accent1"/>
+          </a:effectRef>
+          <a:fontRef idx="minor">
+            <a:schemeClr val="lt1"/>
+          </a:fontRef>
+        </p:style>
+        <p:txBody>
+          <a:bodyPr rtlCol="0" anchor="ctr"/>
+          <a:lstStyle/>
+          <a:p>
+            <a:pPr algn="ctr"/>
+          </a:p>
+        </p:txBody>
+      </p:sp>
+      <p:sp>
+        <p:nvSpPr>
+          <p:cNvPr id="59" name="TipTxt" txBox="1"/>
+          <p:cNvSpPr txBox="1"/>
+          <p:nvPr/>
+        </p:nvSpPr>
+        <p:spPr>
+          <a:xfrm>
+            <a:off x="325000" y="4640000"/>
+            <a:ext cx="2970000" cy="165000"/>
+          </a:xfrm>
+          <a:prstGeom prst="rect">
+            <a:avLst/>
+          </a:prstGeom>
+          <a:noFill/>
+        </p:spPr>
+        <p:txBody>
+          <a:bodyPr wrap="square" anchor="ctr" lIns="45720" rIns="45720" tIns="0" bIns="0">
+            <a:spAutoFit/>
+          </a:bodyPr>
+          <a:lstStyle/>
+          <a:p>
+            <a:pPr algn="l"/>
+            <a:r>
+              <a:rPr sz="800" b="0" i="0">
+                <a:solidFill>
+                  <a:srgbClr val="2E5935"/>
+                </a:solidFill>
+                <a:latin typeface="Meiryo"/>
+              </a:rPr>
+              <a:t>💬 マウスをかざすと客先名・工事名が表示</a:t>
             </a:r>
           </a:p>
         </p:txBody>
@@ -18307,7 +20168,7 @@
                 </a:solidFill>
                 <a:latin typeface="Meiryo"/>
               </a:rPr>
-              <a:t>7  /  10</a:t>
+              <a:t>7  /  11</a:t>
             </a:r>
           </a:p>
         </p:txBody>
@@ -19944,7 +21805,7 @@
                 </a:solidFill>
                 <a:latin typeface="Meiryo"/>
               </a:rPr>
-              <a:t>閲覧者がいる間は定期的に更新チェックが行われます（ポーリング方式）</a:t>
+              <a:t>編集者が「公開」ボタンを押したときに更新が通知されます（Supabase Realtimeによる即時通知）</a:t>
             </a:r>
           </a:p>
         </p:txBody>
@@ -19979,7 +21840,7 @@
                 </a:solidFill>
                 <a:latin typeface="Meiryo"/>
               </a:rPr>
-              <a:t>8  /  10</a:t>
+              <a:t>8  /  11</a:t>
             </a:r>
           </a:p>
         </p:txBody>
@@ -22943,7 +24804,7 @@
                 </a:solidFill>
                 <a:latin typeface="Meiryo"/>
               </a:rPr>
-              <a:t>9  /  10</a:t>
+              <a:t>9  /  11</a:t>
             </a:r>
           </a:p>
         </p:txBody>
